--- a/HMS_DApp_Presentation.pptx
+++ b/HMS_DApp_Presentation.pptx
@@ -22701,45 +22701,30 @@
           </a:p>
         </p:txBody>
       </p:sp>
-      <p:sp>
-        <p:nvSpPr>
-          <p:cNvPr id="6" name="TextBox 5"/>
-          <p:cNvSpPr txBox="1"/>
-          <p:nvPr/>
-        </p:nvSpPr>
-        <p:spPr>
-          <a:xfrm>
-            <a:off x="762000" y="2559050"/>
-            <a:ext cx="3429000" cy="254000"/>
-          </a:xfrm>
-          <a:prstGeom prst="rect">
-            <a:avLst/>
-          </a:prstGeom>
-          <a:noFill/>
-        </p:spPr>
-        <p:txBody>
-          <a:bodyPr wrap="square" lIns="0" rIns="0" tIns="0" bIns="0" anchor="t">
-            <a:spAutoFit/>
-          </a:bodyPr>
-          <a:lstStyle/>
-          <a:p>
-            <a:pPr algn="ctr">
-              <a:lnSpc>
-                <a:spcPct val="115000"/>
-              </a:lnSpc>
-            </a:pPr>
-            <a:r>
-              <a:rPr sz="1100" b="0" i="1">
-                <a:solidFill>
-                  <a:srgbClr val="5A6A7E"/>
-                </a:solidFill>
-                <a:latin typeface="DM Sans"/>
-              </a:rPr>
-              <a:t>[ shot-01-admin-dashboard.png ]</a:t>
-            </a:r>
-          </a:p>
-        </p:txBody>
-      </p:sp>
+      <p:pic>
+        <p:nvPicPr>
+          <p:cNvPr id="6" name="Picture 5" descr="shot-01-admin-dashboard.png"/>
+          <p:cNvPicPr>
+            <a:picLocks noChangeAspect="1"/>
+          </p:cNvPicPr>
+          <p:nvPr/>
+        </p:nvPicPr>
+        <p:blipFill>
+          <a:blip r:embed="rId2"/>
+          <a:stretch>
+            <a:fillRect/>
+          </a:stretch>
+        </p:blipFill>
+        <p:spPr>
+          <a:xfrm>
+            <a:off x="787400" y="1803400"/>
+            <a:ext cx="3378200" cy="1765300"/>
+          </a:xfrm>
+          <a:prstGeom prst="rect">
+            <a:avLst/>
+          </a:prstGeom>
+        </p:spPr>
+      </p:pic>
       <p:sp>
         <p:nvSpPr>
           <p:cNvPr id="7" name="TextBox 6"/>
@@ -22827,45 +22812,30 @@
           </a:p>
         </p:txBody>
       </p:sp>
-      <p:sp>
-        <p:nvSpPr>
-          <p:cNvPr id="9" name="TextBox 8"/>
-          <p:cNvSpPr txBox="1"/>
-          <p:nvPr/>
-        </p:nvSpPr>
-        <p:spPr>
-          <a:xfrm>
-            <a:off x="4318000" y="2559050"/>
-            <a:ext cx="3429000" cy="254000"/>
-          </a:xfrm>
-          <a:prstGeom prst="rect">
-            <a:avLst/>
-          </a:prstGeom>
-          <a:noFill/>
-        </p:spPr>
-        <p:txBody>
-          <a:bodyPr wrap="square" lIns="0" rIns="0" tIns="0" bIns="0" anchor="t">
-            <a:spAutoFit/>
-          </a:bodyPr>
-          <a:lstStyle/>
-          <a:p>
-            <a:pPr algn="ctr">
-              <a:lnSpc>
-                <a:spcPct val="115000"/>
-              </a:lnSpc>
-            </a:pPr>
-            <a:r>
-              <a:rPr sz="1100" b="0" i="1">
-                <a:solidFill>
-                  <a:srgbClr val="5A6A7E"/>
-                </a:solidFill>
-                <a:latin typeface="DM Sans"/>
-              </a:rPr>
-              <a:t>[ shot-02-appointment-booking.png ]</a:t>
-            </a:r>
-          </a:p>
-        </p:txBody>
-      </p:sp>
+      <p:pic>
+        <p:nvPicPr>
+          <p:cNvPr id="9" name="Picture 8" descr="shot-02-appointment-booking.png"/>
+          <p:cNvPicPr>
+            <a:picLocks noChangeAspect="1"/>
+          </p:cNvPicPr>
+          <p:nvPr/>
+        </p:nvPicPr>
+        <p:blipFill>
+          <a:blip r:embed="rId3"/>
+          <a:stretch>
+            <a:fillRect/>
+          </a:stretch>
+        </p:blipFill>
+        <p:spPr>
+          <a:xfrm>
+            <a:off x="4343400" y="1803400"/>
+            <a:ext cx="3378200" cy="1765300"/>
+          </a:xfrm>
+          <a:prstGeom prst="rect">
+            <a:avLst/>
+          </a:prstGeom>
+        </p:spPr>
+      </p:pic>
       <p:sp>
         <p:nvSpPr>
           <p:cNvPr id="10" name="TextBox 9"/>
@@ -22953,45 +22923,30 @@
           </a:p>
         </p:txBody>
       </p:sp>
-      <p:sp>
-        <p:nvSpPr>
-          <p:cNvPr id="12" name="TextBox 11"/>
-          <p:cNvSpPr txBox="1"/>
-          <p:nvPr/>
-        </p:nvSpPr>
-        <p:spPr>
-          <a:xfrm>
-            <a:off x="7874000" y="2559050"/>
-            <a:ext cx="3429000" cy="254000"/>
-          </a:xfrm>
-          <a:prstGeom prst="rect">
-            <a:avLst/>
-          </a:prstGeom>
-          <a:noFill/>
-        </p:spPr>
-        <p:txBody>
-          <a:bodyPr wrap="square" lIns="0" rIns="0" tIns="0" bIns="0" anchor="t">
-            <a:spAutoFit/>
-          </a:bodyPr>
-          <a:lstStyle/>
-          <a:p>
-            <a:pPr algn="ctr">
-              <a:lnSpc>
-                <a:spcPct val="115000"/>
-              </a:lnSpc>
-            </a:pPr>
-            <a:r>
-              <a:rPr sz="1100" b="0" i="1">
-                <a:solidFill>
-                  <a:srgbClr val="5A6A7E"/>
-                </a:solidFill>
-                <a:latin typeface="DM Sans"/>
-              </a:rPr>
-              <a:t>[ shot-03-metamask-payment.png ]</a:t>
-            </a:r>
-          </a:p>
-        </p:txBody>
-      </p:sp>
+      <p:pic>
+        <p:nvPicPr>
+          <p:cNvPr id="12" name="Picture 11" descr="shot-03-metamask-payment.png"/>
+          <p:cNvPicPr>
+            <a:picLocks noChangeAspect="1"/>
+          </p:cNvPicPr>
+          <p:nvPr/>
+        </p:nvPicPr>
+        <p:blipFill>
+          <a:blip r:embed="rId4"/>
+          <a:stretch>
+            <a:fillRect/>
+          </a:stretch>
+        </p:blipFill>
+        <p:spPr>
+          <a:xfrm>
+            <a:off x="7899400" y="1803400"/>
+            <a:ext cx="3378200" cy="1765300"/>
+          </a:xfrm>
+          <a:prstGeom prst="rect">
+            <a:avLst/>
+          </a:prstGeom>
+        </p:spPr>
+      </p:pic>
       <p:sp>
         <p:nvSpPr>
           <p:cNvPr id="13" name="TextBox 12"/>
@@ -23079,45 +23034,30 @@
           </a:p>
         </p:txBody>
       </p:sp>
-      <p:sp>
-        <p:nvSpPr>
-          <p:cNvPr id="15" name="TextBox 14"/>
-          <p:cNvSpPr txBox="1"/>
-          <p:nvPr/>
-        </p:nvSpPr>
-        <p:spPr>
-          <a:xfrm>
-            <a:off x="762000" y="4908550"/>
-            <a:ext cx="3429000" cy="254000"/>
-          </a:xfrm>
-          <a:prstGeom prst="rect">
-            <a:avLst/>
-          </a:prstGeom>
-          <a:noFill/>
-        </p:spPr>
-        <p:txBody>
-          <a:bodyPr wrap="square" lIns="0" rIns="0" tIns="0" bIns="0" anchor="t">
-            <a:spAutoFit/>
-          </a:bodyPr>
-          <a:lstStyle/>
-          <a:p>
-            <a:pPr algn="ctr">
-              <a:lnSpc>
-                <a:spcPct val="115000"/>
-              </a:lnSpc>
-            </a:pPr>
-            <a:r>
-              <a:rPr sz="1100" b="0" i="1">
-                <a:solidFill>
-                  <a:srgbClr val="5A6A7E"/>
-                </a:solidFill>
-                <a:latin typeface="DM Sans"/>
-              </a:rPr>
-              <a:t>[ shot-04-blockchain-verification.png ]</a:t>
-            </a:r>
-          </a:p>
-        </p:txBody>
-      </p:sp>
+      <p:pic>
+        <p:nvPicPr>
+          <p:cNvPr id="15" name="Picture 14" descr="shot-04-blockchain-verification.png"/>
+          <p:cNvPicPr>
+            <a:picLocks noChangeAspect="1"/>
+          </p:cNvPicPr>
+          <p:nvPr/>
+        </p:nvPicPr>
+        <p:blipFill>
+          <a:blip r:embed="rId5"/>
+          <a:stretch>
+            <a:fillRect/>
+          </a:stretch>
+        </p:blipFill>
+        <p:spPr>
+          <a:xfrm>
+            <a:off x="787400" y="4152900"/>
+            <a:ext cx="3378200" cy="1765300"/>
+          </a:xfrm>
+          <a:prstGeom prst="rect">
+            <a:avLst/>
+          </a:prstGeom>
+        </p:spPr>
+      </p:pic>
       <p:sp>
         <p:nvSpPr>
           <p:cNvPr id="16" name="TextBox 15"/>
@@ -23205,45 +23145,30 @@
           </a:p>
         </p:txBody>
       </p:sp>
-      <p:sp>
-        <p:nvSpPr>
-          <p:cNvPr id="18" name="TextBox 17"/>
-          <p:cNvSpPr txBox="1"/>
-          <p:nvPr/>
-        </p:nvSpPr>
-        <p:spPr>
-          <a:xfrm>
-            <a:off x="4318000" y="4908550"/>
-            <a:ext cx="3429000" cy="254000"/>
-          </a:xfrm>
-          <a:prstGeom prst="rect">
-            <a:avLst/>
-          </a:prstGeom>
-          <a:noFill/>
-        </p:spPr>
-        <p:txBody>
-          <a:bodyPr wrap="square" lIns="0" rIns="0" tIns="0" bIns="0" anchor="t">
-            <a:spAutoFit/>
-          </a:bodyPr>
-          <a:lstStyle/>
-          <a:p>
-            <a:pPr algn="ctr">
-              <a:lnSpc>
-                <a:spcPct val="115000"/>
-              </a:lnSpc>
-            </a:pPr>
-            <a:r>
-              <a:rPr sz="1100" b="0" i="1">
-                <a:solidFill>
-                  <a:srgbClr val="5A6A7E"/>
-                </a:solidFill>
-                <a:latin typeface="DM Sans"/>
-              </a:rPr>
-              <a:t>[ shot-05-audit-log.png ]</a:t>
-            </a:r>
-          </a:p>
-        </p:txBody>
-      </p:sp>
+      <p:pic>
+        <p:nvPicPr>
+          <p:cNvPr id="18" name="Picture 17" descr="shot-05-audit-log.png"/>
+          <p:cNvPicPr>
+            <a:picLocks noChangeAspect="1"/>
+          </p:cNvPicPr>
+          <p:nvPr/>
+        </p:nvPicPr>
+        <p:blipFill>
+          <a:blip r:embed="rId6"/>
+          <a:stretch>
+            <a:fillRect/>
+          </a:stretch>
+        </p:blipFill>
+        <p:spPr>
+          <a:xfrm>
+            <a:off x="4343400" y="4152900"/>
+            <a:ext cx="3378200" cy="1765300"/>
+          </a:xfrm>
+          <a:prstGeom prst="rect">
+            <a:avLst/>
+          </a:prstGeom>
+        </p:spPr>
+      </p:pic>
       <p:sp>
         <p:nvSpPr>
           <p:cNvPr id="19" name="TextBox 18"/>
@@ -23331,45 +23256,30 @@
           </a:p>
         </p:txBody>
       </p:sp>
-      <p:sp>
-        <p:nvSpPr>
-          <p:cNvPr id="21" name="TextBox 20"/>
-          <p:cNvSpPr txBox="1"/>
-          <p:nvPr/>
-        </p:nvSpPr>
-        <p:spPr>
-          <a:xfrm>
-            <a:off x="7874000" y="4908550"/>
-            <a:ext cx="3429000" cy="254000"/>
-          </a:xfrm>
-          <a:prstGeom prst="rect">
-            <a:avLst/>
-          </a:prstGeom>
-          <a:noFill/>
-        </p:spPr>
-        <p:txBody>
-          <a:bodyPr wrap="square" lIns="0" rIns="0" tIns="0" bIns="0" anchor="t">
-            <a:spAutoFit/>
-          </a:bodyPr>
-          <a:lstStyle/>
-          <a:p>
-            <a:pPr algn="ctr">
-              <a:lnSpc>
-                <a:spcPct val="115000"/>
-              </a:lnSpc>
-            </a:pPr>
-            <a:r>
-              <a:rPr sz="1100" b="0" i="1">
-                <a:solidFill>
-                  <a:srgbClr val="5A6A7E"/>
-                </a:solidFill>
-                <a:latin typeface="DM Sans"/>
-              </a:rPr>
-              <a:t>[ shot-06-prescription-pdf.png ]</a:t>
-            </a:r>
-          </a:p>
-        </p:txBody>
-      </p:sp>
+      <p:pic>
+        <p:nvPicPr>
+          <p:cNvPr id="21" name="Picture 20" descr="shot-06-prescription-pdf.png"/>
+          <p:cNvPicPr>
+            <a:picLocks noChangeAspect="1"/>
+          </p:cNvPicPr>
+          <p:nvPr/>
+        </p:nvPicPr>
+        <p:blipFill>
+          <a:blip r:embed="rId7"/>
+          <a:stretch>
+            <a:fillRect/>
+          </a:stretch>
+        </p:blipFill>
+        <p:spPr>
+          <a:xfrm>
+            <a:off x="7899400" y="4152900"/>
+            <a:ext cx="3378200" cy="1765300"/>
+          </a:xfrm>
+          <a:prstGeom prst="rect">
+            <a:avLst/>
+          </a:prstGeom>
+        </p:spPr>
+      </p:pic>
       <p:sp>
         <p:nvSpPr>
           <p:cNvPr id="22" name="TextBox 21"/>

--- a/HMS_DApp_Presentation.pptx
+++ b/HMS_DApp_Presentation.pptx
@@ -18,6 +18,7 @@
     <p:sldId id="266" r:id="rId18"/>
     <p:sldId id="267" r:id="rId19"/>
     <p:sldId id="268" r:id="rId20"/>
+    <p:sldId id="269" r:id="rId21"/>
   </p:sldIdLst>
   <p:sldSz cx="12191969" cy="6858000" type="screen4x3"/>
   <p:notesSz cx="6858000" cy="9144000"/>
@@ -736,7 +737,7 @@
               <a:rPr sz="1200">
                 <a:latin typeface="Calibri"/>
               </a:rPr>
-              <a:t>This slide contains the MS Stream link to the recorded demonstration. Access has been granted to all lab tutors. The recording walks through each of the four roles, an end-to-end booking with the transaction hash appearing live in the Blockchain Verification page, a MetaMask-signed payment, and the audit log.</a:t>
+              <a:t>This slide makes the scope of my contribution explicit for the marker. The master branch is the pristine upstream baseline — a backend-only Node, Express, and MongoDB CRUD application with no blockchain, no React frontend, and no role-aware UI. The main branch is the submission: I layered a React 19 single-page app, a Solidity smart contract deployed to Ganache, web3.js integration, MetaMask payments, recharts analytics, jsPDF exports, audit middleware, notifications, and the entire Task 2 presentation bundle on top. The two branches live on the same GitHub repo so the tutor can diff them directly using the compare URL at the bottom of the slide. 112 files changed, roughly 59-thousand lines added.</a:t>
             </a:r>
           </a:p>
         </p:txBody>
@@ -762,6 +763,79 @@
 </file>
 
 <file path=ppt/notesSlides/notesSlide13.xml><?xml version="1.0" encoding="utf-8"?>
+<p:notes xmlns:a="http://schemas.openxmlformats.org/drawingml/2006/main" xmlns:p="http://schemas.openxmlformats.org/presentationml/2006/main" xmlns:r="http://schemas.openxmlformats.org/officeDocument/2006/relationships">
+  <p:cSld>
+    <p:spTree>
+      <p:nvGrpSpPr>
+        <p:cNvPr id="1" name=""/>
+        <p:cNvGrpSpPr/>
+        <p:nvPr/>
+      </p:nvGrpSpPr>
+      <p:grpSpPr>
+        <a:xfrm>
+          <a:off x="0" y="0"/>
+          <a:ext cx="0" cy="0"/>
+          <a:chOff x="0" y="0"/>
+          <a:chExt cx="0" cy="0"/>
+        </a:xfrm>
+      </p:grpSpPr>
+      <p:sp>
+        <p:nvSpPr>
+          <p:cNvPr id="2" name="Slide Image Placeholder 1"/>
+          <p:cNvSpPr>
+            <a:spLocks noGrp="1"/>
+          </p:cNvSpPr>
+          <p:nvPr>
+            <p:ph type="sldImg" idx="2"/>
+          </p:nvPr>
+        </p:nvSpPr>
+        <p:spPr/>
+      </p:sp>
+      <p:sp>
+        <p:nvSpPr>
+          <p:cNvPr id="3" name="Notes Placeholder 2"/>
+          <p:cNvSpPr>
+            <a:spLocks noGrp="1"/>
+          </p:cNvSpPr>
+          <p:nvPr>
+            <p:ph type="body" idx="3" sz="quarter"/>
+          </p:nvPr>
+        </p:nvSpPr>
+        <p:spPr/>
+        <p:txBody>
+          <a:bodyPr/>
+          <a:lstStyle/>
+          <a:p>
+            <a:r>
+              <a:rPr sz="1200">
+                <a:latin typeface="Calibri"/>
+              </a:rPr>
+              <a:t>This slide contains the MS Stream link to the recorded demonstration. Access has been granted to all lab tutors. The recording walks through each of the four roles, an end-to-end booking with the transaction hash appearing live in the Blockchain Verification page, a MetaMask-signed payment, and the audit log.</a:t>
+            </a:r>
+          </a:p>
+        </p:txBody>
+      </p:sp>
+      <p:sp>
+        <p:nvSpPr>
+          <p:cNvPr id="4" name="Slide Number Placeholder 3"/>
+          <p:cNvSpPr>
+            <a:spLocks noGrp="1"/>
+          </p:cNvSpPr>
+          <p:nvPr>
+            <p:ph type="sldNum" idx="5" sz="quarter"/>
+          </p:nvPr>
+        </p:nvSpPr>
+        <p:spPr/>
+      </p:sp>
+    </p:spTree>
+  </p:cSld>
+  <p:clrMapOvr>
+    <a:masterClrMapping/>
+  </p:clrMapOvr>
+</p:notes>
+</file>
+
+<file path=ppt/notesSlides/notesSlide14.xml><?xml version="1.0" encoding="utf-8"?>
 <p:notes xmlns:a="http://schemas.openxmlformats.org/drawingml/2006/main" xmlns:p="http://schemas.openxmlformats.org/presentationml/2006/main" xmlns:r="http://schemas.openxmlformats.org/officeDocument/2006/relationships">
   <p:cSld>
     <p:spTree>
@@ -7324,7 +7398,7 @@
             <a:avLst/>
           </a:prstGeom>
           <a:solidFill>
-            <a:srgbClr val="0D1B2A"/>
+            <a:srgbClr val="F9FAFB"/>
           </a:solidFill>
           <a:ln>
             <a:noFill/>
@@ -7361,21 +7435,21 @@
         </p:nvSpPr>
         <p:spPr>
           <a:xfrm>
-            <a:off x="0" y="1651000"/>
-            <a:ext cx="12191969" cy="215900"/>
-          </a:xfrm>
-          <a:prstGeom prst="rect">
-            <a:avLst/>
-          </a:prstGeom>
-          <a:noFill/>
-        </p:spPr>
-        <p:txBody>
-          <a:bodyPr wrap="square" lIns="0" rIns="0" tIns="0" bIns="0" anchor="t">
-            <a:spAutoFit/>
-          </a:bodyPr>
-          <a:lstStyle/>
-          <a:p>
-            <a:pPr algn="ctr">
+            <a:off x="762000" y="635000"/>
+            <a:ext cx="6350000" cy="215900"/>
+          </a:xfrm>
+          <a:prstGeom prst="rect">
+            <a:avLst/>
+          </a:prstGeom>
+          <a:noFill/>
+        </p:spPr>
+        <p:txBody>
+          <a:bodyPr wrap="square" lIns="0" rIns="0" tIns="0" bIns="0" anchor="t">
+            <a:spAutoFit/>
+          </a:bodyPr>
+          <a:lstStyle/>
+          <a:p>
+            <a:pPr algn="l">
               <a:lnSpc>
                 <a:spcPct val="115000"/>
               </a:lnSpc>
@@ -7383,11 +7457,11 @@
             <a:r>
               <a:rPr sz="1200" b="1" i="0" spc="240">
                 <a:solidFill>
-                  <a:srgbClr val="6CB8DA"/>
-                </a:solidFill>
-                <a:latin typeface="DM Sans"/>
-              </a:rPr>
-              <a:t>11 — DEMONSTRATION</a:t>
+                  <a:srgbClr val="1A8FC2"/>
+                </a:solidFill>
+                <a:latin typeface="DM Sans"/>
+              </a:rPr>
+              <a:t>11 — SCOPE OF CONTRIBUTION</a:t>
             </a:r>
           </a:p>
         </p:txBody>
@@ -7400,60 +7474,56 @@
         </p:nvSpPr>
         <p:spPr>
           <a:xfrm>
-            <a:off x="0" y="2095500"/>
-            <a:ext cx="12191969" cy="762000"/>
-          </a:xfrm>
-          <a:prstGeom prst="rect">
-            <a:avLst/>
-          </a:prstGeom>
-          <a:noFill/>
-        </p:spPr>
-        <p:txBody>
-          <a:bodyPr wrap="square" lIns="0" rIns="0" tIns="0" bIns="0" anchor="t">
-            <a:spAutoFit/>
-          </a:bodyPr>
-          <a:lstStyle/>
-          <a:p>
-            <a:pPr algn="ctr">
-              <a:lnSpc>
-                <a:spcPct val="115000"/>
-              </a:lnSpc>
-            </a:pPr>
-            <a:r>
-              <a:rPr sz="4000" b="1" i="0">
-                <a:solidFill>
-                  <a:srgbClr val="F9FAFB"/>
-                </a:solidFill>
-                <a:latin typeface="DM Sans"/>
-              </a:rPr>
-              <a:t>Video Demonstration</a:t>
-            </a:r>
-          </a:p>
-        </p:txBody>
-      </p:sp>
-      <p:sp>
-        <p:nvSpPr>
-          <p:cNvPr id="5" name="Rounded Rectangle 4"/>
+            <a:off x="762000" y="850900"/>
+            <a:ext cx="10668000" cy="571500"/>
+          </a:xfrm>
+          <a:prstGeom prst="rect">
+            <a:avLst/>
+          </a:prstGeom>
+          <a:noFill/>
+        </p:spPr>
+        <p:txBody>
+          <a:bodyPr wrap="square" lIns="0" rIns="0" tIns="0" bIns="0" anchor="t">
+            <a:spAutoFit/>
+          </a:bodyPr>
+          <a:lstStyle/>
+          <a:p>
+            <a:pPr algn="l">
+              <a:lnSpc>
+                <a:spcPct val="105000"/>
+              </a:lnSpc>
+            </a:pPr>
+            <a:r>
+              <a:rPr sz="3600" b="1" i="0">
+                <a:solidFill>
+                  <a:srgbClr val="0D1B2A"/>
+                </a:solidFill>
+                <a:latin typeface="DM Sans"/>
+              </a:rPr>
+              <a:t>Baseline vs Extension</a:t>
+            </a:r>
+          </a:p>
+        </p:txBody>
+      </p:sp>
+      <p:sp>
+        <p:nvSpPr>
+          <p:cNvPr id="5" name="Rectangle 4"/>
           <p:cNvSpPr/>
           <p:nvPr/>
         </p:nvSpPr>
         <p:spPr>
           <a:xfrm>
-            <a:off x="2285984" y="3365500"/>
-            <a:ext cx="7620000" cy="1397000"/>
-          </a:xfrm>
-          <a:prstGeom prst="roundRect">
-            <a:avLst>
-              <a:gd name="adj" fmla="val 8000"/>
-            </a:avLst>
+            <a:off x="762000" y="1778000"/>
+            <a:ext cx="5207000" cy="50800"/>
+          </a:xfrm>
+          <a:prstGeom prst="rect">
+            <a:avLst/>
           </a:prstGeom>
           <a:solidFill>
-            <a:srgbClr val="182A42"/>
+            <a:srgbClr val="5A6A7E"/>
           </a:solidFill>
-          <a:ln w="25400">
-            <a:solidFill>
-              <a:srgbClr val="244A70"/>
-            </a:solidFill>
+          <a:ln>
+            <a:noFill/>
           </a:ln>
           <a:effectLst/>
         </p:spPr>
@@ -7481,133 +7551,1290 @@
       </p:sp>
       <p:sp>
         <p:nvSpPr>
-          <p:cNvPr id="6" name="TextBox 5"/>
-          <p:cNvSpPr txBox="1"/>
-          <p:nvPr/>
-        </p:nvSpPr>
-        <p:spPr>
-          <a:xfrm>
-            <a:off x="2285984" y="3619500"/>
-            <a:ext cx="7620000" cy="228600"/>
-          </a:xfrm>
-          <a:prstGeom prst="rect">
-            <a:avLst/>
-          </a:prstGeom>
-          <a:noFill/>
-        </p:spPr>
-        <p:txBody>
-          <a:bodyPr wrap="square" lIns="0" rIns="0" tIns="0" bIns="0" anchor="t">
-            <a:spAutoFit/>
-          </a:bodyPr>
-          <a:lstStyle/>
-          <a:p>
-            <a:pPr algn="ctr">
+          <p:cNvPr id="6" name="Rounded Rectangle 5"/>
+          <p:cNvSpPr/>
+          <p:nvPr/>
+        </p:nvSpPr>
+        <p:spPr>
+          <a:xfrm>
+            <a:off x="762000" y="1828800"/>
+            <a:ext cx="5207000" cy="3556000"/>
+          </a:xfrm>
+          <a:prstGeom prst="roundRect">
+            <a:avLst>
+              <a:gd name="adj" fmla="val 3000"/>
+            </a:avLst>
+          </a:prstGeom>
+          <a:solidFill>
+            <a:srgbClr val="FAF3E6"/>
+          </a:solidFill>
+          <a:ln>
+            <a:noFill/>
+          </a:ln>
+          <a:effectLst/>
+        </p:spPr>
+        <p:style>
+          <a:lnRef idx="1">
+            <a:schemeClr val="accent1"/>
+          </a:lnRef>
+          <a:fillRef idx="3">
+            <a:schemeClr val="accent1"/>
+          </a:fillRef>
+          <a:effectRef idx="2">
+            <a:schemeClr val="accent1"/>
+          </a:effectRef>
+          <a:fontRef idx="minor">
+            <a:schemeClr val="lt1"/>
+          </a:fontRef>
+        </p:style>
+        <p:txBody>
+          <a:bodyPr rtlCol="0" anchor="ctr"/>
+          <a:lstStyle/>
+          <a:p>
+            <a:pPr algn="ctr"/>
+          </a:p>
+        </p:txBody>
+      </p:sp>
+      <p:sp>
+        <p:nvSpPr>
+          <p:cNvPr id="7" name="TextBox 6"/>
+          <p:cNvSpPr txBox="1"/>
+          <p:nvPr/>
+        </p:nvSpPr>
+        <p:spPr>
+          <a:xfrm>
+            <a:off x="952500" y="1968500"/>
+            <a:ext cx="4826000" cy="279400"/>
+          </a:xfrm>
+          <a:prstGeom prst="rect">
+            <a:avLst/>
+          </a:prstGeom>
+          <a:noFill/>
+        </p:spPr>
+        <p:txBody>
+          <a:bodyPr wrap="square" lIns="0" rIns="0" tIns="0" bIns="0" anchor="t">
+            <a:spAutoFit/>
+          </a:bodyPr>
+          <a:lstStyle/>
+          <a:p>
+            <a:pPr algn="l">
               <a:lnSpc>
                 <a:spcPct val="115000"/>
               </a:lnSpc>
             </a:pPr>
             <a:r>
-              <a:rPr sz="1200" b="1" i="0" spc="200">
-                <a:solidFill>
-                  <a:srgbClr val="8A94A2"/>
-                </a:solidFill>
-                <a:latin typeface="DM Sans"/>
-              </a:rPr>
-              <a:t>MS STREAM RECORDING</a:t>
-            </a:r>
-          </a:p>
-        </p:txBody>
-      </p:sp>
-      <p:sp>
-        <p:nvSpPr>
-          <p:cNvPr id="7" name="TextBox 6"/>
-          <p:cNvSpPr txBox="1"/>
-          <p:nvPr/>
-        </p:nvSpPr>
-        <p:spPr>
-          <a:xfrm>
-            <a:off x="2539984" y="4000500"/>
-            <a:ext cx="7112000" cy="508000"/>
-          </a:xfrm>
-          <a:prstGeom prst="rect">
-            <a:avLst/>
-          </a:prstGeom>
-          <a:noFill/>
-        </p:spPr>
-        <p:txBody>
-          <a:bodyPr wrap="square" lIns="0" rIns="0" tIns="0" bIns="0" anchor="t">
-            <a:spAutoFit/>
-          </a:bodyPr>
-          <a:lstStyle/>
-          <a:p>
-            <a:pPr algn="ctr">
+              <a:rPr sz="1300" b="1" i="0" spc="200">
+                <a:solidFill>
+                  <a:srgbClr val="5A6A7E"/>
+                </a:solidFill>
+                <a:latin typeface="DM Sans"/>
+              </a:rPr>
+              <a:t>MASTER BRANCH — BASELINE</a:t>
+            </a:r>
+          </a:p>
+        </p:txBody>
+      </p:sp>
+      <p:sp>
+        <p:nvSpPr>
+          <p:cNvPr id="8" name="TextBox 7"/>
+          <p:cNvSpPr txBox="1"/>
+          <p:nvPr/>
+        </p:nvSpPr>
+        <p:spPr>
+          <a:xfrm>
+            <a:off x="952500" y="2349500"/>
+            <a:ext cx="4826000" cy="203200"/>
+          </a:xfrm>
+          <a:prstGeom prst="rect">
+            <a:avLst/>
+          </a:prstGeom>
+          <a:noFill/>
+        </p:spPr>
+        <p:txBody>
+          <a:bodyPr wrap="square" lIns="0" rIns="0" tIns="0" bIns="0" anchor="t">
+            <a:spAutoFit/>
+          </a:bodyPr>
+          <a:lstStyle/>
+          <a:p>
+            <a:pPr algn="l">
               <a:lnSpc>
                 <a:spcPct val="115000"/>
               </a:lnSpc>
             </a:pPr>
             <a:r>
-              <a:rPr sz="1600" b="0" i="0">
-                <a:solidFill>
-                  <a:srgbClr val="6CB8DA"/>
+              <a:rPr sz="1100" b="1" i="0">
+                <a:solidFill>
+                  <a:srgbClr val="0D1B2A"/>
+                </a:solidFill>
+                <a:latin typeface="DM Sans"/>
+              </a:rPr>
+              <a:t>Node.js + Express API</a:t>
+            </a:r>
+          </a:p>
+        </p:txBody>
+      </p:sp>
+      <p:sp>
+        <p:nvSpPr>
+          <p:cNvPr id="9" name="TextBox 8"/>
+          <p:cNvSpPr txBox="1"/>
+          <p:nvPr/>
+        </p:nvSpPr>
+        <p:spPr>
+          <a:xfrm>
+            <a:off x="952500" y="2565400"/>
+            <a:ext cx="4826000" cy="317500"/>
+          </a:xfrm>
+          <a:prstGeom prst="rect">
+            <a:avLst/>
+          </a:prstGeom>
+          <a:noFill/>
+        </p:spPr>
+        <p:txBody>
+          <a:bodyPr wrap="square" lIns="0" rIns="0" tIns="0" bIns="0" anchor="t">
+            <a:spAutoFit/>
+          </a:bodyPr>
+          <a:lstStyle/>
+          <a:p>
+            <a:pPr algn="l">
+              <a:lnSpc>
+                <a:spcPct val="130000"/>
+              </a:lnSpc>
+            </a:pPr>
+            <a:r>
+              <a:rPr sz="900" b="0" i="0">
+                <a:solidFill>
+                  <a:srgbClr val="5A6A7E"/>
+                </a:solidFill>
+                <a:latin typeface="DM Sans"/>
+              </a:rPr>
+              <a:t>Auth, appointments, bills — REST only.</a:t>
+            </a:r>
+          </a:p>
+        </p:txBody>
+      </p:sp>
+      <p:sp>
+        <p:nvSpPr>
+          <p:cNvPr id="10" name="TextBox 9"/>
+          <p:cNvSpPr txBox="1"/>
+          <p:nvPr/>
+        </p:nvSpPr>
+        <p:spPr>
+          <a:xfrm>
+            <a:off x="952500" y="2857500"/>
+            <a:ext cx="4826000" cy="203200"/>
+          </a:xfrm>
+          <a:prstGeom prst="rect">
+            <a:avLst/>
+          </a:prstGeom>
+          <a:noFill/>
+        </p:spPr>
+        <p:txBody>
+          <a:bodyPr wrap="square" lIns="0" rIns="0" tIns="0" bIns="0" anchor="t">
+            <a:spAutoFit/>
+          </a:bodyPr>
+          <a:lstStyle/>
+          <a:p>
+            <a:pPr algn="l">
+              <a:lnSpc>
+                <a:spcPct val="115000"/>
+              </a:lnSpc>
+            </a:pPr>
+            <a:r>
+              <a:rPr sz="1100" b="1" i="0">
+                <a:solidFill>
+                  <a:srgbClr val="0D1B2A"/>
+                </a:solidFill>
+                <a:latin typeface="DM Sans"/>
+              </a:rPr>
+              <a:t>MongoDB + Mongoose</a:t>
+            </a:r>
+          </a:p>
+        </p:txBody>
+      </p:sp>
+      <p:sp>
+        <p:nvSpPr>
+          <p:cNvPr id="11" name="TextBox 10"/>
+          <p:cNvSpPr txBox="1"/>
+          <p:nvPr/>
+        </p:nvSpPr>
+        <p:spPr>
+          <a:xfrm>
+            <a:off x="952500" y="3073400"/>
+            <a:ext cx="4826000" cy="317500"/>
+          </a:xfrm>
+          <a:prstGeom prst="rect">
+            <a:avLst/>
+          </a:prstGeom>
+          <a:noFill/>
+        </p:spPr>
+        <p:txBody>
+          <a:bodyPr wrap="square" lIns="0" rIns="0" tIns="0" bIns="0" anchor="t">
+            <a:spAutoFit/>
+          </a:bodyPr>
+          <a:lstStyle/>
+          <a:p>
+            <a:pPr algn="l">
+              <a:lnSpc>
+                <a:spcPct val="130000"/>
+              </a:lnSpc>
+            </a:pPr>
+            <a:r>
+              <a:rPr sz="900" b="0" i="0">
+                <a:solidFill>
+                  <a:srgbClr val="5A6A7E"/>
+                </a:solidFill>
+                <a:latin typeface="DM Sans"/>
+              </a:rPr>
+              <a:t>Schemas for User, Appointment, Bill, Prescription.</a:t>
+            </a:r>
+          </a:p>
+        </p:txBody>
+      </p:sp>
+      <p:sp>
+        <p:nvSpPr>
+          <p:cNvPr id="12" name="TextBox 11"/>
+          <p:cNvSpPr txBox="1"/>
+          <p:nvPr/>
+        </p:nvSpPr>
+        <p:spPr>
+          <a:xfrm>
+            <a:off x="952500" y="3365500"/>
+            <a:ext cx="4826000" cy="203200"/>
+          </a:xfrm>
+          <a:prstGeom prst="rect">
+            <a:avLst/>
+          </a:prstGeom>
+          <a:noFill/>
+        </p:spPr>
+        <p:txBody>
+          <a:bodyPr wrap="square" lIns="0" rIns="0" tIns="0" bIns="0" anchor="t">
+            <a:spAutoFit/>
+          </a:bodyPr>
+          <a:lstStyle/>
+          <a:p>
+            <a:pPr algn="l">
+              <a:lnSpc>
+                <a:spcPct val="115000"/>
+              </a:lnSpc>
+            </a:pPr>
+            <a:r>
+              <a:rPr sz="1100" b="1" i="0">
+                <a:solidFill>
+                  <a:srgbClr val="0D1B2A"/>
+                </a:solidFill>
+                <a:latin typeface="DM Sans"/>
+              </a:rPr>
+              <a:t>JWT + bcrypt auth</a:t>
+            </a:r>
+          </a:p>
+        </p:txBody>
+      </p:sp>
+      <p:sp>
+        <p:nvSpPr>
+          <p:cNvPr id="13" name="TextBox 12"/>
+          <p:cNvSpPr txBox="1"/>
+          <p:nvPr/>
+        </p:nvSpPr>
+        <p:spPr>
+          <a:xfrm>
+            <a:off x="952500" y="3581400"/>
+            <a:ext cx="4826000" cy="317500"/>
+          </a:xfrm>
+          <a:prstGeom prst="rect">
+            <a:avLst/>
+          </a:prstGeom>
+          <a:noFill/>
+        </p:spPr>
+        <p:txBody>
+          <a:bodyPr wrap="square" lIns="0" rIns="0" tIns="0" bIns="0" anchor="t">
+            <a:spAutoFit/>
+          </a:bodyPr>
+          <a:lstStyle/>
+          <a:p>
+            <a:pPr algn="l">
+              <a:lnSpc>
+                <a:spcPct val="130000"/>
+              </a:lnSpc>
+            </a:pPr>
+            <a:r>
+              <a:rPr sz="900" b="0" i="0">
+                <a:solidFill>
+                  <a:srgbClr val="5A6A7E"/>
+                </a:solidFill>
+                <a:latin typeface="DM Sans"/>
+              </a:rPr>
+              <a:t>Role-agnostic, no doctor-approval flow.</a:t>
+            </a:r>
+          </a:p>
+        </p:txBody>
+      </p:sp>
+      <p:sp>
+        <p:nvSpPr>
+          <p:cNvPr id="14" name="TextBox 13"/>
+          <p:cNvSpPr txBox="1"/>
+          <p:nvPr/>
+        </p:nvSpPr>
+        <p:spPr>
+          <a:xfrm>
+            <a:off x="952500" y="3873500"/>
+            <a:ext cx="4826000" cy="203200"/>
+          </a:xfrm>
+          <a:prstGeom prst="rect">
+            <a:avLst/>
+          </a:prstGeom>
+          <a:noFill/>
+        </p:spPr>
+        <p:txBody>
+          <a:bodyPr wrap="square" lIns="0" rIns="0" tIns="0" bIns="0" anchor="t">
+            <a:spAutoFit/>
+          </a:bodyPr>
+          <a:lstStyle/>
+          <a:p>
+            <a:pPr algn="l">
+              <a:lnSpc>
+                <a:spcPct val="115000"/>
+              </a:lnSpc>
+            </a:pPr>
+            <a:r>
+              <a:rPr sz="1100" b="1" i="0">
+                <a:solidFill>
+                  <a:srgbClr val="0D1B2A"/>
+                </a:solidFill>
+                <a:latin typeface="DM Sans"/>
+              </a:rPr>
+              <a:t>Swagger docs + seed script</a:t>
+            </a:r>
+          </a:p>
+        </p:txBody>
+      </p:sp>
+      <p:sp>
+        <p:nvSpPr>
+          <p:cNvPr id="15" name="TextBox 14"/>
+          <p:cNvSpPr txBox="1"/>
+          <p:nvPr/>
+        </p:nvSpPr>
+        <p:spPr>
+          <a:xfrm>
+            <a:off x="952500" y="4089400"/>
+            <a:ext cx="4826000" cy="317500"/>
+          </a:xfrm>
+          <a:prstGeom prst="rect">
+            <a:avLst/>
+          </a:prstGeom>
+          <a:noFill/>
+        </p:spPr>
+        <p:txBody>
+          <a:bodyPr wrap="square" lIns="0" rIns="0" tIns="0" bIns="0" anchor="t">
+            <a:spAutoFit/>
+          </a:bodyPr>
+          <a:lstStyle/>
+          <a:p>
+            <a:pPr algn="l">
+              <a:lnSpc>
+                <a:spcPct val="130000"/>
+              </a:lnSpc>
+            </a:pPr>
+            <a:r>
+              <a:rPr sz="900" b="0" i="0">
+                <a:solidFill>
+                  <a:srgbClr val="5A6A7E"/>
+                </a:solidFill>
+                <a:latin typeface="DM Sans"/>
+              </a:rPr>
+              <a:t>Basic Postman-style API surface.</a:t>
+            </a:r>
+          </a:p>
+        </p:txBody>
+      </p:sp>
+      <p:sp>
+        <p:nvSpPr>
+          <p:cNvPr id="16" name="TextBox 15"/>
+          <p:cNvSpPr txBox="1"/>
+          <p:nvPr/>
+        </p:nvSpPr>
+        <p:spPr>
+          <a:xfrm>
+            <a:off x="952500" y="4381500"/>
+            <a:ext cx="4826000" cy="203200"/>
+          </a:xfrm>
+          <a:prstGeom prst="rect">
+            <a:avLst/>
+          </a:prstGeom>
+          <a:noFill/>
+        </p:spPr>
+        <p:txBody>
+          <a:bodyPr wrap="square" lIns="0" rIns="0" tIns="0" bIns="0" anchor="t">
+            <a:spAutoFit/>
+          </a:bodyPr>
+          <a:lstStyle/>
+          <a:p>
+            <a:pPr algn="l">
+              <a:lnSpc>
+                <a:spcPct val="115000"/>
+              </a:lnSpc>
+            </a:pPr>
+            <a:r>
+              <a:rPr sz="1100" b="1" i="0">
+                <a:solidFill>
+                  <a:srgbClr val="0D1B2A"/>
+                </a:solidFill>
+                <a:latin typeface="DM Sans"/>
+              </a:rPr>
+              <a:t>No frontend</a:t>
+            </a:r>
+          </a:p>
+        </p:txBody>
+      </p:sp>
+      <p:sp>
+        <p:nvSpPr>
+          <p:cNvPr id="17" name="TextBox 16"/>
+          <p:cNvSpPr txBox="1"/>
+          <p:nvPr/>
+        </p:nvSpPr>
+        <p:spPr>
+          <a:xfrm>
+            <a:off x="952500" y="4597400"/>
+            <a:ext cx="4826000" cy="317500"/>
+          </a:xfrm>
+          <a:prstGeom prst="rect">
+            <a:avLst/>
+          </a:prstGeom>
+          <a:noFill/>
+        </p:spPr>
+        <p:txBody>
+          <a:bodyPr wrap="square" lIns="0" rIns="0" tIns="0" bIns="0" anchor="t">
+            <a:spAutoFit/>
+          </a:bodyPr>
+          <a:lstStyle/>
+          <a:p>
+            <a:pPr algn="l">
+              <a:lnSpc>
+                <a:spcPct val="130000"/>
+              </a:lnSpc>
+            </a:pPr>
+            <a:r>
+              <a:rPr sz="900" b="0" i="0">
+                <a:solidFill>
+                  <a:srgbClr val="5A6A7E"/>
+                </a:solidFill>
+                <a:latin typeface="DM Sans"/>
+              </a:rPr>
+              <a:t>Backend-only — no UI, no dashboards.</a:t>
+            </a:r>
+          </a:p>
+        </p:txBody>
+      </p:sp>
+      <p:sp>
+        <p:nvSpPr>
+          <p:cNvPr id="18" name="TextBox 17"/>
+          <p:cNvSpPr txBox="1"/>
+          <p:nvPr/>
+        </p:nvSpPr>
+        <p:spPr>
+          <a:xfrm>
+            <a:off x="952500" y="4889500"/>
+            <a:ext cx="4826000" cy="203200"/>
+          </a:xfrm>
+          <a:prstGeom prst="rect">
+            <a:avLst/>
+          </a:prstGeom>
+          <a:noFill/>
+        </p:spPr>
+        <p:txBody>
+          <a:bodyPr wrap="square" lIns="0" rIns="0" tIns="0" bIns="0" anchor="t">
+            <a:spAutoFit/>
+          </a:bodyPr>
+          <a:lstStyle/>
+          <a:p>
+            <a:pPr algn="l">
+              <a:lnSpc>
+                <a:spcPct val="115000"/>
+              </a:lnSpc>
+            </a:pPr>
+            <a:r>
+              <a:rPr sz="1100" b="1" i="0">
+                <a:solidFill>
+                  <a:srgbClr val="0D1B2A"/>
+                </a:solidFill>
+                <a:latin typeface="DM Sans"/>
+              </a:rPr>
+              <a:t>No blockchain</a:t>
+            </a:r>
+          </a:p>
+        </p:txBody>
+      </p:sp>
+      <p:sp>
+        <p:nvSpPr>
+          <p:cNvPr id="19" name="TextBox 18"/>
+          <p:cNvSpPr txBox="1"/>
+          <p:nvPr/>
+        </p:nvSpPr>
+        <p:spPr>
+          <a:xfrm>
+            <a:off x="952500" y="5105400"/>
+            <a:ext cx="4826000" cy="317500"/>
+          </a:xfrm>
+          <a:prstGeom prst="rect">
+            <a:avLst/>
+          </a:prstGeom>
+          <a:noFill/>
+        </p:spPr>
+        <p:txBody>
+          <a:bodyPr wrap="square" lIns="0" rIns="0" tIns="0" bIns="0" anchor="t">
+            <a:spAutoFit/>
+          </a:bodyPr>
+          <a:lstStyle/>
+          <a:p>
+            <a:pPr algn="l">
+              <a:lnSpc>
+                <a:spcPct val="130000"/>
+              </a:lnSpc>
+            </a:pPr>
+            <a:r>
+              <a:rPr sz="900" b="0" i="0">
+                <a:solidFill>
+                  <a:srgbClr val="5A6A7E"/>
+                </a:solidFill>
+                <a:latin typeface="DM Sans"/>
+              </a:rPr>
+              <a:t>All trust on the API layer.</a:t>
+            </a:r>
+          </a:p>
+        </p:txBody>
+      </p:sp>
+      <p:sp>
+        <p:nvSpPr>
+          <p:cNvPr id="20" name="Rectangle 19"/>
+          <p:cNvSpPr/>
+          <p:nvPr/>
+        </p:nvSpPr>
+        <p:spPr>
+          <a:xfrm>
+            <a:off x="6223000" y="1778000"/>
+            <a:ext cx="5207000" cy="50800"/>
+          </a:xfrm>
+          <a:prstGeom prst="rect">
+            <a:avLst/>
+          </a:prstGeom>
+          <a:solidFill>
+            <a:srgbClr val="1A8FC2"/>
+          </a:solidFill>
+          <a:ln>
+            <a:noFill/>
+          </a:ln>
+          <a:effectLst/>
+        </p:spPr>
+        <p:style>
+          <a:lnRef idx="1">
+            <a:schemeClr val="accent1"/>
+          </a:lnRef>
+          <a:fillRef idx="3">
+            <a:schemeClr val="accent1"/>
+          </a:fillRef>
+          <a:effectRef idx="2">
+            <a:schemeClr val="accent1"/>
+          </a:effectRef>
+          <a:fontRef idx="minor">
+            <a:schemeClr val="lt1"/>
+          </a:fontRef>
+        </p:style>
+        <p:txBody>
+          <a:bodyPr rtlCol="0" anchor="ctr"/>
+          <a:lstStyle/>
+          <a:p>
+            <a:pPr algn="ctr"/>
+          </a:p>
+        </p:txBody>
+      </p:sp>
+      <p:sp>
+        <p:nvSpPr>
+          <p:cNvPr id="21" name="Rounded Rectangle 20"/>
+          <p:cNvSpPr/>
+          <p:nvPr/>
+        </p:nvSpPr>
+        <p:spPr>
+          <a:xfrm>
+            <a:off x="6223000" y="1828800"/>
+            <a:ext cx="5207000" cy="3556000"/>
+          </a:xfrm>
+          <a:prstGeom prst="roundRect">
+            <a:avLst>
+              <a:gd name="adj" fmla="val 3000"/>
+            </a:avLst>
+          </a:prstGeom>
+          <a:solidFill>
+            <a:srgbClr val="EAF5FC"/>
+          </a:solidFill>
+          <a:ln>
+            <a:noFill/>
+          </a:ln>
+          <a:effectLst/>
+        </p:spPr>
+        <p:style>
+          <a:lnRef idx="1">
+            <a:schemeClr val="accent1"/>
+          </a:lnRef>
+          <a:fillRef idx="3">
+            <a:schemeClr val="accent1"/>
+          </a:fillRef>
+          <a:effectRef idx="2">
+            <a:schemeClr val="accent1"/>
+          </a:effectRef>
+          <a:fontRef idx="minor">
+            <a:schemeClr val="lt1"/>
+          </a:fontRef>
+        </p:style>
+        <p:txBody>
+          <a:bodyPr rtlCol="0" anchor="ctr"/>
+          <a:lstStyle/>
+          <a:p>
+            <a:pPr algn="ctr"/>
+          </a:p>
+        </p:txBody>
+      </p:sp>
+      <p:sp>
+        <p:nvSpPr>
+          <p:cNvPr id="22" name="TextBox 21"/>
+          <p:cNvSpPr txBox="1"/>
+          <p:nvPr/>
+        </p:nvSpPr>
+        <p:spPr>
+          <a:xfrm>
+            <a:off x="6413500" y="1968500"/>
+            <a:ext cx="4826000" cy="279400"/>
+          </a:xfrm>
+          <a:prstGeom prst="rect">
+            <a:avLst/>
+          </a:prstGeom>
+          <a:noFill/>
+        </p:spPr>
+        <p:txBody>
+          <a:bodyPr wrap="square" lIns="0" rIns="0" tIns="0" bIns="0" anchor="t">
+            <a:spAutoFit/>
+          </a:bodyPr>
+          <a:lstStyle/>
+          <a:p>
+            <a:pPr algn="l">
+              <a:lnSpc>
+                <a:spcPct val="115000"/>
+              </a:lnSpc>
+            </a:pPr>
+            <a:r>
+              <a:rPr sz="1300" b="1" i="0" spc="200">
+                <a:solidFill>
+                  <a:srgbClr val="1A8FC2"/>
+                </a:solidFill>
+                <a:latin typeface="DM Sans"/>
+              </a:rPr>
+              <a:t>MAIN BRANCH — SUBMISSION</a:t>
+            </a:r>
+          </a:p>
+        </p:txBody>
+      </p:sp>
+      <p:sp>
+        <p:nvSpPr>
+          <p:cNvPr id="23" name="TextBox 22"/>
+          <p:cNvSpPr txBox="1"/>
+          <p:nvPr/>
+        </p:nvSpPr>
+        <p:spPr>
+          <a:xfrm>
+            <a:off x="6413500" y="2349500"/>
+            <a:ext cx="4826000" cy="203200"/>
+          </a:xfrm>
+          <a:prstGeom prst="rect">
+            <a:avLst/>
+          </a:prstGeom>
+          <a:noFill/>
+        </p:spPr>
+        <p:txBody>
+          <a:bodyPr wrap="square" lIns="0" rIns="0" tIns="0" bIns="0" anchor="t">
+            <a:spAutoFit/>
+          </a:bodyPr>
+          <a:lstStyle/>
+          <a:p>
+            <a:pPr algn="l">
+              <a:lnSpc>
+                <a:spcPct val="115000"/>
+              </a:lnSpc>
+            </a:pPr>
+            <a:r>
+              <a:rPr sz="1100" b="1" i="0">
+                <a:solidFill>
+                  <a:srgbClr val="0D1B2A"/>
+                </a:solidFill>
+                <a:latin typeface="DM Sans"/>
+              </a:rPr>
+              <a:t>React 19 SPA</a:t>
+            </a:r>
+          </a:p>
+        </p:txBody>
+      </p:sp>
+      <p:sp>
+        <p:nvSpPr>
+          <p:cNvPr id="24" name="TextBox 23"/>
+          <p:cNvSpPr txBox="1"/>
+          <p:nvPr/>
+        </p:nvSpPr>
+        <p:spPr>
+          <a:xfrm>
+            <a:off x="6413500" y="2565400"/>
+            <a:ext cx="4826000" cy="317500"/>
+          </a:xfrm>
+          <a:prstGeom prst="rect">
+            <a:avLst/>
+          </a:prstGeom>
+          <a:noFill/>
+        </p:spPr>
+        <p:txBody>
+          <a:bodyPr wrap="square" lIns="0" rIns="0" tIns="0" bIns="0" anchor="t">
+            <a:spAutoFit/>
+          </a:bodyPr>
+          <a:lstStyle/>
+          <a:p>
+            <a:pPr algn="l">
+              <a:lnSpc>
+                <a:spcPct val="130000"/>
+              </a:lnSpc>
+            </a:pPr>
+            <a:r>
+              <a:rPr sz="900" b="0" i="0">
+                <a:solidFill>
+                  <a:srgbClr val="5A6A7E"/>
+                </a:solidFill>
+                <a:latin typeface="DM Sans"/>
+              </a:rPr>
+              <a:t>Role-based dashboards for admin / doctor / patient / receptionist.</a:t>
+            </a:r>
+          </a:p>
+        </p:txBody>
+      </p:sp>
+      <p:sp>
+        <p:nvSpPr>
+          <p:cNvPr id="25" name="TextBox 24"/>
+          <p:cNvSpPr txBox="1"/>
+          <p:nvPr/>
+        </p:nvSpPr>
+        <p:spPr>
+          <a:xfrm>
+            <a:off x="6413500" y="2857500"/>
+            <a:ext cx="4826000" cy="203200"/>
+          </a:xfrm>
+          <a:prstGeom prst="rect">
+            <a:avLst/>
+          </a:prstGeom>
+          <a:noFill/>
+        </p:spPr>
+        <p:txBody>
+          <a:bodyPr wrap="square" lIns="0" rIns="0" tIns="0" bIns="0" anchor="t">
+            <a:spAutoFit/>
+          </a:bodyPr>
+          <a:lstStyle/>
+          <a:p>
+            <a:pPr algn="l">
+              <a:lnSpc>
+                <a:spcPct val="115000"/>
+              </a:lnSpc>
+            </a:pPr>
+            <a:r>
+              <a:rPr sz="1100" b="1" i="0">
+                <a:solidFill>
+                  <a:srgbClr val="0D1B2A"/>
+                </a:solidFill>
+                <a:latin typeface="DM Sans"/>
+              </a:rPr>
+              <a:t>HospitalRecords.sol</a:t>
+            </a:r>
+          </a:p>
+        </p:txBody>
+      </p:sp>
+      <p:sp>
+        <p:nvSpPr>
+          <p:cNvPr id="26" name="TextBox 25"/>
+          <p:cNvSpPr txBox="1"/>
+          <p:nvPr/>
+        </p:nvSpPr>
+        <p:spPr>
+          <a:xfrm>
+            <a:off x="6413500" y="3073400"/>
+            <a:ext cx="4826000" cy="317500"/>
+          </a:xfrm>
+          <a:prstGeom prst="rect">
+            <a:avLst/>
+          </a:prstGeom>
+          <a:noFill/>
+        </p:spPr>
+        <p:txBody>
+          <a:bodyPr wrap="square" lIns="0" rIns="0" tIns="0" bIns="0" anchor="t">
+            <a:spAutoFit/>
+          </a:bodyPr>
+          <a:lstStyle/>
+          <a:p>
+            <a:pPr algn="l">
+              <a:lnSpc>
+                <a:spcPct val="130000"/>
+              </a:lnSpc>
+            </a:pPr>
+            <a:r>
+              <a:rPr sz="900" b="0" i="0">
+                <a:solidFill>
+                  <a:srgbClr val="5A6A7E"/>
+                </a:solidFill>
+                <a:latin typeface="DM Sans"/>
+              </a:rPr>
+              <a:t>Solidity 0.8.19 contract — 4 structs, payBillOnChain payable.</a:t>
+            </a:r>
+          </a:p>
+        </p:txBody>
+      </p:sp>
+      <p:sp>
+        <p:nvSpPr>
+          <p:cNvPr id="27" name="TextBox 26"/>
+          <p:cNvSpPr txBox="1"/>
+          <p:nvPr/>
+        </p:nvSpPr>
+        <p:spPr>
+          <a:xfrm>
+            <a:off x="6413500" y="3365500"/>
+            <a:ext cx="4826000" cy="203200"/>
+          </a:xfrm>
+          <a:prstGeom prst="rect">
+            <a:avLst/>
+          </a:prstGeom>
+          <a:noFill/>
+        </p:spPr>
+        <p:txBody>
+          <a:bodyPr wrap="square" lIns="0" rIns="0" tIns="0" bIns="0" anchor="t">
+            <a:spAutoFit/>
+          </a:bodyPr>
+          <a:lstStyle/>
+          <a:p>
+            <a:pPr algn="l">
+              <a:lnSpc>
+                <a:spcPct val="115000"/>
+              </a:lnSpc>
+            </a:pPr>
+            <a:r>
+              <a:rPr sz="1100" b="1" i="0">
+                <a:solidFill>
+                  <a:srgbClr val="0D1B2A"/>
+                </a:solidFill>
+                <a:latin typeface="DM Sans"/>
+              </a:rPr>
+              <a:t>web3.js + Ganache pipeline</a:t>
+            </a:r>
+          </a:p>
+        </p:txBody>
+      </p:sp>
+      <p:sp>
+        <p:nvSpPr>
+          <p:cNvPr id="28" name="TextBox 27"/>
+          <p:cNvSpPr txBox="1"/>
+          <p:nvPr/>
+        </p:nvSpPr>
+        <p:spPr>
+          <a:xfrm>
+            <a:off x="6413500" y="3581400"/>
+            <a:ext cx="4826000" cy="317500"/>
+          </a:xfrm>
+          <a:prstGeom prst="rect">
+            <a:avLst/>
+          </a:prstGeom>
+          <a:noFill/>
+        </p:spPr>
+        <p:txBody>
+          <a:bodyPr wrap="square" lIns="0" rIns="0" tIns="0" bIns="0" anchor="t">
+            <a:spAutoFit/>
+          </a:bodyPr>
+          <a:lstStyle/>
+          <a:p>
+            <a:pPr algn="l">
+              <a:lnSpc>
+                <a:spcPct val="130000"/>
+              </a:lnSpc>
+            </a:pPr>
+            <a:r>
+              <a:rPr sz="900" b="0" i="0">
+                <a:solidFill>
+                  <a:srgbClr val="5A6A7E"/>
+                </a:solidFill>
+                <a:latin typeface="DM Sans"/>
+              </a:rPr>
+              <a:t>Every mutating write mirrored on-chain; tx hash persisted to Mongo.</a:t>
+            </a:r>
+          </a:p>
+        </p:txBody>
+      </p:sp>
+      <p:sp>
+        <p:nvSpPr>
+          <p:cNvPr id="29" name="TextBox 28"/>
+          <p:cNvSpPr txBox="1"/>
+          <p:nvPr/>
+        </p:nvSpPr>
+        <p:spPr>
+          <a:xfrm>
+            <a:off x="6413500" y="3873500"/>
+            <a:ext cx="4826000" cy="203200"/>
+          </a:xfrm>
+          <a:prstGeom prst="rect">
+            <a:avLst/>
+          </a:prstGeom>
+          <a:noFill/>
+        </p:spPr>
+        <p:txBody>
+          <a:bodyPr wrap="square" lIns="0" rIns="0" tIns="0" bIns="0" anchor="t">
+            <a:spAutoFit/>
+          </a:bodyPr>
+          <a:lstStyle/>
+          <a:p>
+            <a:pPr algn="l">
+              <a:lnSpc>
+                <a:spcPct val="115000"/>
+              </a:lnSpc>
+            </a:pPr>
+            <a:r>
+              <a:rPr sz="1100" b="1" i="0">
+                <a:solidFill>
+                  <a:srgbClr val="0D1B2A"/>
+                </a:solidFill>
+                <a:latin typeface="DM Sans"/>
+              </a:rPr>
+              <a:t>MetaMask integration</a:t>
+            </a:r>
+          </a:p>
+        </p:txBody>
+      </p:sp>
+      <p:sp>
+        <p:nvSpPr>
+          <p:cNvPr id="30" name="TextBox 29"/>
+          <p:cNvSpPr txBox="1"/>
+          <p:nvPr/>
+        </p:nvSpPr>
+        <p:spPr>
+          <a:xfrm>
+            <a:off x="6413500" y="4089400"/>
+            <a:ext cx="4826000" cy="317500"/>
+          </a:xfrm>
+          <a:prstGeom prst="rect">
+            <a:avLst/>
+          </a:prstGeom>
+          <a:noFill/>
+        </p:spPr>
+        <p:txBody>
+          <a:bodyPr wrap="square" lIns="0" rIns="0" tIns="0" bIns="0" anchor="t">
+            <a:spAutoFit/>
+          </a:bodyPr>
+          <a:lstStyle/>
+          <a:p>
+            <a:pPr algn="l">
+              <a:lnSpc>
+                <a:spcPct val="130000"/>
+              </a:lnSpc>
+            </a:pPr>
+            <a:r>
+              <a:rPr sz="900" b="0" i="0">
+                <a:solidFill>
+                  <a:srgbClr val="5A6A7E"/>
+                </a:solidFill>
+                <a:latin typeface="DM Sans"/>
+              </a:rPr>
+              <a:t>Fully decentralised patient payments via window.ethereum.</a:t>
+            </a:r>
+          </a:p>
+        </p:txBody>
+      </p:sp>
+      <p:sp>
+        <p:nvSpPr>
+          <p:cNvPr id="31" name="TextBox 30"/>
+          <p:cNvSpPr txBox="1"/>
+          <p:nvPr/>
+        </p:nvSpPr>
+        <p:spPr>
+          <a:xfrm>
+            <a:off x="6413500" y="4381500"/>
+            <a:ext cx="4826000" cy="203200"/>
+          </a:xfrm>
+          <a:prstGeom prst="rect">
+            <a:avLst/>
+          </a:prstGeom>
+          <a:noFill/>
+        </p:spPr>
+        <p:txBody>
+          <a:bodyPr wrap="square" lIns="0" rIns="0" tIns="0" bIns="0" anchor="t">
+            <a:spAutoFit/>
+          </a:bodyPr>
+          <a:lstStyle/>
+          <a:p>
+            <a:pPr algn="l">
+              <a:lnSpc>
+                <a:spcPct val="115000"/>
+              </a:lnSpc>
+            </a:pPr>
+            <a:r>
+              <a:rPr sz="1100" b="1" i="0">
+                <a:solidFill>
+                  <a:srgbClr val="0D1B2A"/>
+                </a:solidFill>
+                <a:latin typeface="DM Sans"/>
+              </a:rPr>
+              <a:t>recharts analytics + jsPDF</a:t>
+            </a:r>
+          </a:p>
+        </p:txBody>
+      </p:sp>
+      <p:sp>
+        <p:nvSpPr>
+          <p:cNvPr id="32" name="TextBox 31"/>
+          <p:cNvSpPr txBox="1"/>
+          <p:nvPr/>
+        </p:nvSpPr>
+        <p:spPr>
+          <a:xfrm>
+            <a:off x="6413500" y="4597400"/>
+            <a:ext cx="4826000" cy="317500"/>
+          </a:xfrm>
+          <a:prstGeom prst="rect">
+            <a:avLst/>
+          </a:prstGeom>
+          <a:noFill/>
+        </p:spPr>
+        <p:txBody>
+          <a:bodyPr wrap="square" lIns="0" rIns="0" tIns="0" bIns="0" anchor="t">
+            <a:spAutoFit/>
+          </a:bodyPr>
+          <a:lstStyle/>
+          <a:p>
+            <a:pPr algn="l">
+              <a:lnSpc>
+                <a:spcPct val="130000"/>
+              </a:lnSpc>
+            </a:pPr>
+            <a:r>
+              <a:rPr sz="900" b="0" i="0">
+                <a:solidFill>
+                  <a:srgbClr val="5A6A7E"/>
+                </a:solidFill>
+                <a:latin typeface="DM Sans"/>
+              </a:rPr>
+              <a:t>Admin charts, revenue trends, exportable bill/rx PDFs.</a:t>
+            </a:r>
+          </a:p>
+        </p:txBody>
+      </p:sp>
+      <p:sp>
+        <p:nvSpPr>
+          <p:cNvPr id="33" name="TextBox 32"/>
+          <p:cNvSpPr txBox="1"/>
+          <p:nvPr/>
+        </p:nvSpPr>
+        <p:spPr>
+          <a:xfrm>
+            <a:off x="6413500" y="4889500"/>
+            <a:ext cx="4826000" cy="203200"/>
+          </a:xfrm>
+          <a:prstGeom prst="rect">
+            <a:avLst/>
+          </a:prstGeom>
+          <a:noFill/>
+        </p:spPr>
+        <p:txBody>
+          <a:bodyPr wrap="square" lIns="0" rIns="0" tIns="0" bIns="0" anchor="t">
+            <a:spAutoFit/>
+          </a:bodyPr>
+          <a:lstStyle/>
+          <a:p>
+            <a:pPr algn="l">
+              <a:lnSpc>
+                <a:spcPct val="115000"/>
+              </a:lnSpc>
+            </a:pPr>
+            <a:r>
+              <a:rPr sz="1100" b="1" i="0">
+                <a:solidFill>
+                  <a:srgbClr val="0D1B2A"/>
+                </a:solidFill>
+                <a:latin typeface="DM Sans"/>
+              </a:rPr>
+              <a:t>Audit log, notifications, tests</a:t>
+            </a:r>
+          </a:p>
+        </p:txBody>
+      </p:sp>
+      <p:sp>
+        <p:nvSpPr>
+          <p:cNvPr id="34" name="TextBox 33"/>
+          <p:cNvSpPr txBox="1"/>
+          <p:nvPr/>
+        </p:nvSpPr>
+        <p:spPr>
+          <a:xfrm>
+            <a:off x="6413500" y="5105400"/>
+            <a:ext cx="4826000" cy="317500"/>
+          </a:xfrm>
+          <a:prstGeom prst="rect">
+            <a:avLst/>
+          </a:prstGeom>
+          <a:noFill/>
+        </p:spPr>
+        <p:txBody>
+          <a:bodyPr wrap="square" lIns="0" rIns="0" tIns="0" bIns="0" anchor="t">
+            <a:spAutoFit/>
+          </a:bodyPr>
+          <a:lstStyle/>
+          <a:p>
+            <a:pPr algn="l">
+              <a:lnSpc>
+                <a:spcPct val="130000"/>
+              </a:lnSpc>
+            </a:pPr>
+            <a:r>
+              <a:rPr sz="900" b="0" i="0">
+                <a:solidFill>
+                  <a:srgbClr val="5A6A7E"/>
+                </a:solidFill>
+                <a:latin typeface="DM Sans"/>
+              </a:rPr>
+              <a:t>Mutation middleware, bell polling, Jest suites, RBAC fixes.</a:t>
+            </a:r>
+          </a:p>
+        </p:txBody>
+      </p:sp>
+      <p:sp>
+        <p:nvSpPr>
+          <p:cNvPr id="35" name="Rounded Rectangle 34"/>
+          <p:cNvSpPr/>
+          <p:nvPr/>
+        </p:nvSpPr>
+        <p:spPr>
+          <a:xfrm>
+            <a:off x="762000" y="5588000"/>
+            <a:ext cx="10667969" cy="571500"/>
+          </a:xfrm>
+          <a:prstGeom prst="roundRect">
+            <a:avLst>
+              <a:gd name="adj" fmla="val 4000"/>
+            </a:avLst>
+          </a:prstGeom>
+          <a:solidFill>
+            <a:srgbClr val="F2F5FA"/>
+          </a:solidFill>
+          <a:ln>
+            <a:noFill/>
+          </a:ln>
+          <a:effectLst/>
+        </p:spPr>
+        <p:style>
+          <a:lnRef idx="1">
+            <a:schemeClr val="accent1"/>
+          </a:lnRef>
+          <a:fillRef idx="3">
+            <a:schemeClr val="accent1"/>
+          </a:fillRef>
+          <a:effectRef idx="2">
+            <a:schemeClr val="accent1"/>
+          </a:effectRef>
+          <a:fontRef idx="minor">
+            <a:schemeClr val="lt1"/>
+          </a:fontRef>
+        </p:style>
+        <p:txBody>
+          <a:bodyPr rtlCol="0" anchor="ctr"/>
+          <a:lstStyle/>
+          <a:p>
+            <a:pPr algn="ctr"/>
+          </a:p>
+        </p:txBody>
+      </p:sp>
+      <p:sp>
+        <p:nvSpPr>
+          <p:cNvPr id="36" name="TextBox 35"/>
+          <p:cNvSpPr txBox="1"/>
+          <p:nvPr/>
+        </p:nvSpPr>
+        <p:spPr>
+          <a:xfrm>
+            <a:off x="889000" y="5664200"/>
+            <a:ext cx="10413969" cy="177800"/>
+          </a:xfrm>
+          <a:prstGeom prst="rect">
+            <a:avLst/>
+          </a:prstGeom>
+          <a:noFill/>
+        </p:spPr>
+        <p:txBody>
+          <a:bodyPr wrap="square" lIns="0" rIns="0" tIns="0" bIns="0" anchor="t">
+            <a:spAutoFit/>
+          </a:bodyPr>
+          <a:lstStyle/>
+          <a:p>
+            <a:pPr algn="l">
+              <a:lnSpc>
+                <a:spcPct val="115000"/>
+              </a:lnSpc>
+            </a:pPr>
+            <a:r>
+              <a:rPr sz="900" b="1" i="0" spc="200">
+                <a:solidFill>
+                  <a:srgbClr val="1A8FC2"/>
+                </a:solidFill>
+                <a:latin typeface="DM Sans"/>
+              </a:rPr>
+              <a:t>REPO LINKS</a:t>
+            </a:r>
+          </a:p>
+        </p:txBody>
+      </p:sp>
+      <p:sp>
+        <p:nvSpPr>
+          <p:cNvPr id="37" name="TextBox 36"/>
+          <p:cNvSpPr txBox="1"/>
+          <p:nvPr/>
+        </p:nvSpPr>
+        <p:spPr>
+          <a:xfrm>
+            <a:off x="889000" y="5842000"/>
+            <a:ext cx="10413969" cy="279400"/>
+          </a:xfrm>
+          <a:prstGeom prst="rect">
+            <a:avLst/>
+          </a:prstGeom>
+          <a:noFill/>
+        </p:spPr>
+        <p:txBody>
+          <a:bodyPr wrap="square" lIns="0" rIns="0" tIns="0" bIns="0" anchor="t">
+            <a:spAutoFit/>
+          </a:bodyPr>
+          <a:lstStyle/>
+          <a:p>
+            <a:pPr algn="l">
+              <a:lnSpc>
+                <a:spcPct val="140000"/>
+              </a:lnSpc>
+            </a:pPr>
+            <a:r>
+              <a:rPr sz="800" b="0" i="0">
+                <a:solidFill>
+                  <a:srgbClr val="0D1B2A"/>
                 </a:solidFill>
                 <a:latin typeface="DM Mono"/>
               </a:rPr>
-              <a:t>[ Insert MS Stream link here ]</a:t>
-            </a:r>
-          </a:p>
-        </p:txBody>
-      </p:sp>
-      <p:sp>
-        <p:nvSpPr>
-          <p:cNvPr id="8" name="TextBox 7"/>
-          <p:cNvSpPr txBox="1"/>
-          <p:nvPr/>
-        </p:nvSpPr>
-        <p:spPr>
-          <a:xfrm>
-            <a:off x="1270000" y="5143500"/>
-            <a:ext cx="9651969" cy="825500"/>
-          </a:xfrm>
-          <a:prstGeom prst="rect">
-            <a:avLst/>
-          </a:prstGeom>
-          <a:noFill/>
-        </p:spPr>
-        <p:txBody>
-          <a:bodyPr wrap="square" lIns="0" rIns="0" tIns="0" bIns="0" anchor="t">
-            <a:spAutoFit/>
-          </a:bodyPr>
-          <a:lstStyle/>
-          <a:p>
-            <a:pPr algn="ctr">
-              <a:lnSpc>
-                <a:spcPct val="160000"/>
-              </a:lnSpc>
-            </a:pPr>
-            <a:r>
-              <a:rPr sz="1200" b="0" i="0">
-                <a:solidFill>
-                  <a:srgbClr val="8A94A2"/>
-                </a:solidFill>
-                <a:latin typeface="DM Sans"/>
-              </a:rPr>
-              <a:t>Access has been granted to all lab tutors.</a:t>
-            </a:r>
-          </a:p>
-          <a:p>
-            <a:pPr algn="ctr">
-              <a:lnSpc>
-                <a:spcPct val="160000"/>
-              </a:lnSpc>
-            </a:pPr>
-            <a:r>
-              <a:rPr sz="1200" b="0" i="0">
-                <a:solidFill>
-                  <a:srgbClr val="8A94A2"/>
-                </a:solidFill>
-                <a:latin typeface="DM Sans"/>
-              </a:rPr>
-              <a:t>The recording covers login as each role · appointment booking · on-chain transaction logging · MetaMask bill payment · blockchain verification.</a:t>
+              <a:t>Submission (main):  github.com/rahmane001/hospital-system/tree/main</a:t>
+            </a:r>
+          </a:p>
+          <a:p>
+            <a:pPr algn="l">
+              <a:lnSpc>
+                <a:spcPct val="140000"/>
+              </a:lnSpc>
+            </a:pPr>
+            <a:r>
+              <a:rPr sz="800" b="0" i="0">
+                <a:solidFill>
+                  <a:srgbClr val="0D1B2A"/>
+                </a:solidFill>
+                <a:latin typeface="DM Mono"/>
+              </a:rPr>
+              <a:t>Baseline (master): github.com/rahmane001/hospital-system/tree/master   ·   Diff: github.com/rahmane001/hospital-system/compare/master...main</a:t>
             </a:r>
           </a:p>
         </p:txBody>
@@ -7645,6 +8872,327 @@
             <a:avLst/>
           </a:prstGeom>
           <a:solidFill>
+            <a:srgbClr val="0D1B2A"/>
+          </a:solidFill>
+          <a:ln>
+            <a:noFill/>
+          </a:ln>
+          <a:effectLst/>
+        </p:spPr>
+        <p:style>
+          <a:lnRef idx="1">
+            <a:schemeClr val="accent1"/>
+          </a:lnRef>
+          <a:fillRef idx="3">
+            <a:schemeClr val="accent1"/>
+          </a:fillRef>
+          <a:effectRef idx="2">
+            <a:schemeClr val="accent1"/>
+          </a:effectRef>
+          <a:fontRef idx="minor">
+            <a:schemeClr val="lt1"/>
+          </a:fontRef>
+        </p:style>
+        <p:txBody>
+          <a:bodyPr rtlCol="0" anchor="ctr"/>
+          <a:lstStyle/>
+          <a:p>
+            <a:pPr algn="ctr"/>
+          </a:p>
+        </p:txBody>
+      </p:sp>
+      <p:sp>
+        <p:nvSpPr>
+          <p:cNvPr id="3" name="TextBox 2"/>
+          <p:cNvSpPr txBox="1"/>
+          <p:nvPr/>
+        </p:nvSpPr>
+        <p:spPr>
+          <a:xfrm>
+            <a:off x="0" y="1651000"/>
+            <a:ext cx="12191969" cy="215900"/>
+          </a:xfrm>
+          <a:prstGeom prst="rect">
+            <a:avLst/>
+          </a:prstGeom>
+          <a:noFill/>
+        </p:spPr>
+        <p:txBody>
+          <a:bodyPr wrap="square" lIns="0" rIns="0" tIns="0" bIns="0" anchor="t">
+            <a:spAutoFit/>
+          </a:bodyPr>
+          <a:lstStyle/>
+          <a:p>
+            <a:pPr algn="ctr">
+              <a:lnSpc>
+                <a:spcPct val="115000"/>
+              </a:lnSpc>
+            </a:pPr>
+            <a:r>
+              <a:rPr sz="1200" b="1" i="0" spc="240">
+                <a:solidFill>
+                  <a:srgbClr val="6CB8DA"/>
+                </a:solidFill>
+                <a:latin typeface="DM Sans"/>
+              </a:rPr>
+              <a:t>12 — DEMONSTRATION</a:t>
+            </a:r>
+          </a:p>
+        </p:txBody>
+      </p:sp>
+      <p:sp>
+        <p:nvSpPr>
+          <p:cNvPr id="4" name="TextBox 3"/>
+          <p:cNvSpPr txBox="1"/>
+          <p:nvPr/>
+        </p:nvSpPr>
+        <p:spPr>
+          <a:xfrm>
+            <a:off x="0" y="2095500"/>
+            <a:ext cx="12191969" cy="762000"/>
+          </a:xfrm>
+          <a:prstGeom prst="rect">
+            <a:avLst/>
+          </a:prstGeom>
+          <a:noFill/>
+        </p:spPr>
+        <p:txBody>
+          <a:bodyPr wrap="square" lIns="0" rIns="0" tIns="0" bIns="0" anchor="t">
+            <a:spAutoFit/>
+          </a:bodyPr>
+          <a:lstStyle/>
+          <a:p>
+            <a:pPr algn="ctr">
+              <a:lnSpc>
+                <a:spcPct val="115000"/>
+              </a:lnSpc>
+            </a:pPr>
+            <a:r>
+              <a:rPr sz="4000" b="1" i="0">
+                <a:solidFill>
+                  <a:srgbClr val="F9FAFB"/>
+                </a:solidFill>
+                <a:latin typeface="DM Sans"/>
+              </a:rPr>
+              <a:t>Video Demonstration</a:t>
+            </a:r>
+          </a:p>
+        </p:txBody>
+      </p:sp>
+      <p:sp>
+        <p:nvSpPr>
+          <p:cNvPr id="5" name="Rounded Rectangle 4"/>
+          <p:cNvSpPr/>
+          <p:nvPr/>
+        </p:nvSpPr>
+        <p:spPr>
+          <a:xfrm>
+            <a:off x="2285984" y="3365500"/>
+            <a:ext cx="7620000" cy="1397000"/>
+          </a:xfrm>
+          <a:prstGeom prst="roundRect">
+            <a:avLst>
+              <a:gd name="adj" fmla="val 8000"/>
+            </a:avLst>
+          </a:prstGeom>
+          <a:solidFill>
+            <a:srgbClr val="182A42"/>
+          </a:solidFill>
+          <a:ln w="25400">
+            <a:solidFill>
+              <a:srgbClr val="244A70"/>
+            </a:solidFill>
+          </a:ln>
+          <a:effectLst/>
+        </p:spPr>
+        <p:style>
+          <a:lnRef idx="1">
+            <a:schemeClr val="accent1"/>
+          </a:lnRef>
+          <a:fillRef idx="3">
+            <a:schemeClr val="accent1"/>
+          </a:fillRef>
+          <a:effectRef idx="2">
+            <a:schemeClr val="accent1"/>
+          </a:effectRef>
+          <a:fontRef idx="minor">
+            <a:schemeClr val="lt1"/>
+          </a:fontRef>
+        </p:style>
+        <p:txBody>
+          <a:bodyPr rtlCol="0" anchor="ctr"/>
+          <a:lstStyle/>
+          <a:p>
+            <a:pPr algn="ctr"/>
+          </a:p>
+        </p:txBody>
+      </p:sp>
+      <p:sp>
+        <p:nvSpPr>
+          <p:cNvPr id="6" name="TextBox 5"/>
+          <p:cNvSpPr txBox="1"/>
+          <p:nvPr/>
+        </p:nvSpPr>
+        <p:spPr>
+          <a:xfrm>
+            <a:off x="2285984" y="3619500"/>
+            <a:ext cx="7620000" cy="228600"/>
+          </a:xfrm>
+          <a:prstGeom prst="rect">
+            <a:avLst/>
+          </a:prstGeom>
+          <a:noFill/>
+        </p:spPr>
+        <p:txBody>
+          <a:bodyPr wrap="square" lIns="0" rIns="0" tIns="0" bIns="0" anchor="t">
+            <a:spAutoFit/>
+          </a:bodyPr>
+          <a:lstStyle/>
+          <a:p>
+            <a:pPr algn="ctr">
+              <a:lnSpc>
+                <a:spcPct val="115000"/>
+              </a:lnSpc>
+            </a:pPr>
+            <a:r>
+              <a:rPr sz="1200" b="1" i="0" spc="200">
+                <a:solidFill>
+                  <a:srgbClr val="8A94A2"/>
+                </a:solidFill>
+                <a:latin typeface="DM Sans"/>
+              </a:rPr>
+              <a:t>MS STREAM RECORDING</a:t>
+            </a:r>
+          </a:p>
+        </p:txBody>
+      </p:sp>
+      <p:sp>
+        <p:nvSpPr>
+          <p:cNvPr id="7" name="TextBox 6"/>
+          <p:cNvSpPr txBox="1"/>
+          <p:nvPr/>
+        </p:nvSpPr>
+        <p:spPr>
+          <a:xfrm>
+            <a:off x="2539984" y="4000500"/>
+            <a:ext cx="7112000" cy="508000"/>
+          </a:xfrm>
+          <a:prstGeom prst="rect">
+            <a:avLst/>
+          </a:prstGeom>
+          <a:noFill/>
+        </p:spPr>
+        <p:txBody>
+          <a:bodyPr wrap="square" lIns="0" rIns="0" tIns="0" bIns="0" anchor="t">
+            <a:spAutoFit/>
+          </a:bodyPr>
+          <a:lstStyle/>
+          <a:p>
+            <a:pPr algn="ctr">
+              <a:lnSpc>
+                <a:spcPct val="115000"/>
+              </a:lnSpc>
+            </a:pPr>
+            <a:r>
+              <a:rPr sz="1600" b="0" i="0">
+                <a:solidFill>
+                  <a:srgbClr val="6CB8DA"/>
+                </a:solidFill>
+                <a:latin typeface="DM Mono"/>
+              </a:rPr>
+              <a:t>[ Insert MS Stream link here ]</a:t>
+            </a:r>
+          </a:p>
+        </p:txBody>
+      </p:sp>
+      <p:sp>
+        <p:nvSpPr>
+          <p:cNvPr id="8" name="TextBox 7"/>
+          <p:cNvSpPr txBox="1"/>
+          <p:nvPr/>
+        </p:nvSpPr>
+        <p:spPr>
+          <a:xfrm>
+            <a:off x="1270000" y="5143500"/>
+            <a:ext cx="9651969" cy="825500"/>
+          </a:xfrm>
+          <a:prstGeom prst="rect">
+            <a:avLst/>
+          </a:prstGeom>
+          <a:noFill/>
+        </p:spPr>
+        <p:txBody>
+          <a:bodyPr wrap="square" lIns="0" rIns="0" tIns="0" bIns="0" anchor="t">
+            <a:spAutoFit/>
+          </a:bodyPr>
+          <a:lstStyle/>
+          <a:p>
+            <a:pPr algn="ctr">
+              <a:lnSpc>
+                <a:spcPct val="160000"/>
+              </a:lnSpc>
+            </a:pPr>
+            <a:r>
+              <a:rPr sz="1200" b="0" i="0">
+                <a:solidFill>
+                  <a:srgbClr val="8A94A2"/>
+                </a:solidFill>
+                <a:latin typeface="DM Sans"/>
+              </a:rPr>
+              <a:t>Access has been granted to all lab tutors.</a:t>
+            </a:r>
+          </a:p>
+          <a:p>
+            <a:pPr algn="ctr">
+              <a:lnSpc>
+                <a:spcPct val="160000"/>
+              </a:lnSpc>
+            </a:pPr>
+            <a:r>
+              <a:rPr sz="1200" b="0" i="0">
+                <a:solidFill>
+                  <a:srgbClr val="8A94A2"/>
+                </a:solidFill>
+                <a:latin typeface="DM Sans"/>
+              </a:rPr>
+              <a:t>The recording covers login as each role · appointment booking · on-chain transaction logging · MetaMask bill payment · blockchain verification.</a:t>
+            </a:r>
+          </a:p>
+        </p:txBody>
+      </p:sp>
+    </p:spTree>
+  </p:cSld>
+  <p:clrMapOvr>
+    <a:masterClrMapping/>
+  </p:clrMapOvr>
+</p:sld>
+</file>
+
+<file path=ppt/slides/slide14.xml><?xml version="1.0" encoding="utf-8"?>
+<p:sld xmlns:a="http://schemas.openxmlformats.org/drawingml/2006/main" xmlns:p="http://schemas.openxmlformats.org/presentationml/2006/main" xmlns:r="http://schemas.openxmlformats.org/officeDocument/2006/relationships">
+  <p:cSld>
+    <p:spTree>
+      <p:nvGrpSpPr>
+        <p:cNvPr id="1" name=""/>
+        <p:cNvGrpSpPr/>
+        <p:nvPr/>
+      </p:nvGrpSpPr>
+      <p:grpSpPr/>
+      <p:sp>
+        <p:nvSpPr>
+          <p:cNvPr id="2" name="Rectangle 1"/>
+          <p:cNvSpPr/>
+          <p:nvPr/>
+        </p:nvSpPr>
+        <p:spPr>
+          <a:xfrm>
+            <a:off x="0" y="0"/>
+            <a:ext cx="12191969" cy="6858000"/>
+          </a:xfrm>
+          <a:prstGeom prst="rect">
+            <a:avLst/>
+          </a:prstGeom>
+          <a:solidFill>
             <a:srgbClr val="F9FAFB"/>
           </a:solidFill>
           <a:ln>
@@ -7708,7 +9256,7 @@
                 </a:solidFill>
                 <a:latin typeface="DM Sans"/>
               </a:rPr>
-              <a:t>12 — REFERENCES</a:t>
+              <a:t>13 — REFERENCES</a:t>
             </a:r>
           </a:p>
         </p:txBody>

--- a/HMS_DApp_Presentation.pptx
+++ b/HMS_DApp_Presentation.pptx
@@ -4,23 +4,26 @@
   <p:sldMasterIdLst>
     <p:sldMasterId id="2147483648" r:id="rId1"/>
   </p:sldMasterIdLst>
+  <p:notesMasterIdLst>
+    <p:notesMasterId r:id="rId16"/>
+  </p:notesMasterIdLst>
   <p:sldIdLst>
-    <p:sldId id="256" r:id="rId7"/>
-    <p:sldId id="257" r:id="rId9"/>
-    <p:sldId id="258" r:id="rId10"/>
-    <p:sldId id="259" r:id="rId11"/>
-    <p:sldId id="260" r:id="rId12"/>
-    <p:sldId id="261" r:id="rId13"/>
-    <p:sldId id="262" r:id="rId14"/>
-    <p:sldId id="263" r:id="rId15"/>
-    <p:sldId id="264" r:id="rId16"/>
-    <p:sldId id="265" r:id="rId17"/>
-    <p:sldId id="266" r:id="rId18"/>
-    <p:sldId id="267" r:id="rId19"/>
-    <p:sldId id="268" r:id="rId20"/>
-    <p:sldId id="269" r:id="rId21"/>
+    <p:sldId id="256" r:id="rId2"/>
+    <p:sldId id="257" r:id="rId3"/>
+    <p:sldId id="258" r:id="rId4"/>
+    <p:sldId id="259" r:id="rId5"/>
+    <p:sldId id="260" r:id="rId6"/>
+    <p:sldId id="261" r:id="rId7"/>
+    <p:sldId id="262" r:id="rId8"/>
+    <p:sldId id="263" r:id="rId9"/>
+    <p:sldId id="264" r:id="rId10"/>
+    <p:sldId id="265" r:id="rId11"/>
+    <p:sldId id="266" r:id="rId12"/>
+    <p:sldId id="267" r:id="rId13"/>
+    <p:sldId id="268" r:id="rId14"/>
+    <p:sldId id="269" r:id="rId15"/>
   </p:sldIdLst>
-  <p:sldSz cx="12191969" cy="6858000" type="screen4x3"/>
+  <p:sldSz cx="12192000" cy="6858000"/>
   <p:notesSz cx="6858000" cy="9144000"/>
   <p:defaultTextStyle>
     <a:defPPr>
@@ -117,11 +120,27 @@
       </a:defRPr>
     </a:lvl9pPr>
   </p:defaultTextStyle>
+  <p:extLst>
+    <p:ext uri="{EFAFB233-063F-42B5-8137-9DF3F51BA10A}">
+      <p15:sldGuideLst xmlns:p15="http://schemas.microsoft.com/office/powerpoint/2012/main">
+        <p15:guide id="1" orient="horz" pos="2160">
+          <p15:clr>
+            <a:srgbClr val="A4A3A4"/>
+          </p15:clr>
+        </p15:guide>
+        <p15:guide id="2" pos="2880">
+          <p15:clr>
+            <a:srgbClr val="A4A3A4"/>
+          </p15:clr>
+        </p15:guide>
+      </p15:sldGuideLst>
+    </p:ext>
+  </p:extLst>
 </p:presentation>
 </file>
 
 <file path=ppt/notesMasters/notesMaster1.xml><?xml version="1.0" encoding="utf-8"?>
-<p:notesMaster xmlns:a="http://schemas.openxmlformats.org/drawingml/2006/main" xmlns:p="http://schemas.openxmlformats.org/presentationml/2006/main" xmlns:r="http://schemas.openxmlformats.org/officeDocument/2006/relationships">
+<p:notesMaster xmlns:a="http://schemas.openxmlformats.org/drawingml/2006/main" xmlns:r="http://schemas.openxmlformats.org/officeDocument/2006/relationships" xmlns:p="http://schemas.openxmlformats.org/presentationml/2006/main">
   <p:cSld>
     <p:bg>
       <p:bgRef idx="1001">
@@ -142,241 +161,16 @@
           <a:chExt cx="0" cy="0"/>
         </a:xfrm>
       </p:grpSpPr>
-      <p:sp>
-        <p:nvSpPr>
-          <p:cNvPr id="2" name="Header Placeholder 1"/>
-          <p:cNvSpPr>
-            <a:spLocks noGrp="1"/>
-          </p:cNvSpPr>
-          <p:nvPr>
-            <p:ph type="hdr" sz="quarter"/>
-          </p:nvPr>
-        </p:nvSpPr>
-        <p:spPr>
-          <a:xfrm>
-            <a:off x="0" y="0"/>
-            <a:ext cx="2971800" cy="457200"/>
-          </a:xfrm>
-          <a:prstGeom prst="rect">
-            <a:avLst/>
-          </a:prstGeom>
-        </p:spPr>
-        <p:txBody>
-          <a:bodyPr vert="horz" lIns="91440" tIns="45720" rIns="91440" bIns="45720" rtlCol="0"/>
-          <a:lstStyle>
-            <a:lvl1pPr algn="l">
-              <a:defRPr sz="1200"/>
-            </a:lvl1pPr>
-          </a:lstStyle>
-          <a:p>
-            <a:endParaRPr lang="en-US"/>
-          </a:p>
-        </p:txBody>
-      </p:sp>
-      <p:sp>
-        <p:nvSpPr>
-          <p:cNvPr id="3" name="Date Placeholder 2"/>
-          <p:cNvSpPr>
-            <a:spLocks noGrp="1"/>
-          </p:cNvSpPr>
-          <p:nvPr>
-            <p:ph type="dt" idx="1"/>
-          </p:nvPr>
-        </p:nvSpPr>
-        <p:spPr>
-          <a:xfrm>
-            <a:off x="3884613" y="0"/>
-            <a:ext cx="2971800" cy="457200"/>
-          </a:xfrm>
-          <a:prstGeom prst="rect">
-            <a:avLst/>
-          </a:prstGeom>
-        </p:spPr>
-        <p:txBody>
-          <a:bodyPr vert="horz" lIns="91440" tIns="45720" rIns="91440" bIns="45720" rtlCol="0"/>
-          <a:lstStyle>
-            <a:lvl1pPr algn="r">
-              <a:defRPr sz="1200"/>
-            </a:lvl1pPr>
-          </a:lstStyle>
-          <a:p>
-            <a:fld id="{0F89C1C7-3DCD-1040-A9CF-14679D8B5DDD}" type="datetimeFigureOut">
-              <a:rPr lang="en-US" smtClean="0"/>
-              <a:t>10/17/16</a:t>
-            </a:fld>
-            <a:endParaRPr lang="en-US"/>
-          </a:p>
-        </p:txBody>
-      </p:sp>
-      <p:sp>
-        <p:nvSpPr>
-          <p:cNvPr id="4" name="Slide Image Placeholder 3"/>
-          <p:cNvSpPr>
-            <a:spLocks noGrp="1" noRot="1" noChangeAspect="1"/>
-          </p:cNvSpPr>
-          <p:nvPr>
-            <p:ph type="sldImg" idx="2"/>
-          </p:nvPr>
-        </p:nvSpPr>
-        <p:spPr>
-          <a:xfrm>
-            <a:off x="1143000" y="685800"/>
-            <a:ext cx="4572000" cy="3429000"/>
-          </a:xfrm>
-          <a:prstGeom prst="rect">
-            <a:avLst/>
-          </a:prstGeom>
-          <a:noFill/>
-          <a:ln w="12700">
-            <a:solidFill>
-              <a:prstClr val="black"/>
-            </a:solidFill>
-          </a:ln>
-        </p:spPr>
-        <p:txBody>
-          <a:bodyPr vert="horz" lIns="91440" tIns="45720" rIns="91440" bIns="45720" rtlCol="0" anchor="ctr"/>
-          <a:lstStyle/>
-          <a:p>
-            <a:endParaRPr lang="en-US"/>
-          </a:p>
-        </p:txBody>
-      </p:sp>
-      <p:sp>
-        <p:nvSpPr>
-          <p:cNvPr id="5" name="Notes Placeholder 4"/>
-          <p:cNvSpPr>
-            <a:spLocks noGrp="1"/>
-          </p:cNvSpPr>
-          <p:nvPr>
-            <p:ph type="body" sz="quarter" idx="3"/>
-          </p:nvPr>
-        </p:nvSpPr>
-        <p:spPr>
-          <a:xfrm>
-            <a:off x="685800" y="4343400"/>
-            <a:ext cx="5486400" cy="4114800"/>
-          </a:xfrm>
-          <a:prstGeom prst="rect">
-            <a:avLst/>
-          </a:prstGeom>
-        </p:spPr>
-        <p:txBody>
-          <a:bodyPr vert="horz" lIns="91440" tIns="45720" rIns="91440" bIns="45720" rtlCol="0"/>
-          <a:lstStyle/>
-          <a:p>
-            <a:pPr lvl="0"/>
-            <a:r>
-              <a:rPr lang="en-US" smtClean="0"/>
-              <a:t>Click to edit Master text styles</a:t>
-            </a:r>
-          </a:p>
-          <a:p>
-            <a:pPr lvl="1"/>
-            <a:r>
-              <a:rPr lang="en-US" smtClean="0"/>
-              <a:t>Second level</a:t>
-            </a:r>
-          </a:p>
-          <a:p>
-            <a:pPr lvl="2"/>
-            <a:r>
-              <a:rPr lang="en-US" smtClean="0"/>
-              <a:t>Third level</a:t>
-            </a:r>
-          </a:p>
-          <a:p>
-            <a:pPr lvl="3"/>
-            <a:r>
-              <a:rPr lang="en-US" smtClean="0"/>
-              <a:t>Fourth level</a:t>
-            </a:r>
-          </a:p>
-          <a:p>
-            <a:pPr lvl="4"/>
-            <a:r>
-              <a:rPr lang="en-US" smtClean="0"/>
-              <a:t>Fifth level</a:t>
-            </a:r>
-            <a:endParaRPr lang="en-US"/>
-          </a:p>
-        </p:txBody>
-      </p:sp>
-      <p:sp>
-        <p:nvSpPr>
-          <p:cNvPr id="6" name="Footer Placeholder 5"/>
-          <p:cNvSpPr>
-            <a:spLocks noGrp="1"/>
-          </p:cNvSpPr>
-          <p:nvPr>
-            <p:ph type="ftr" sz="quarter" idx="4"/>
-          </p:nvPr>
-        </p:nvSpPr>
-        <p:spPr>
-          <a:xfrm>
-            <a:off x="0" y="8685213"/>
-            <a:ext cx="2971800" cy="457200"/>
-          </a:xfrm>
-          <a:prstGeom prst="rect">
-            <a:avLst/>
-          </a:prstGeom>
-        </p:spPr>
-        <p:txBody>
-          <a:bodyPr vert="horz" lIns="91440" tIns="45720" rIns="91440" bIns="45720" rtlCol="0" anchor="b"/>
-          <a:lstStyle>
-            <a:lvl1pPr algn="l">
-              <a:defRPr sz="1200"/>
-            </a:lvl1pPr>
-          </a:lstStyle>
-          <a:p>
-            <a:endParaRPr lang="en-US"/>
-          </a:p>
-        </p:txBody>
-      </p:sp>
-      <p:sp>
-        <p:nvSpPr>
-          <p:cNvPr id="7" name="Slide Number Placeholder 6"/>
-          <p:cNvSpPr>
-            <a:spLocks noGrp="1"/>
-          </p:cNvSpPr>
-          <p:nvPr>
-            <p:ph type="sldNum" sz="quarter" idx="5"/>
-          </p:nvPr>
-        </p:nvSpPr>
-        <p:spPr>
-          <a:xfrm>
-            <a:off x="3884613" y="8685213"/>
-            <a:ext cx="2971800" cy="457200"/>
-          </a:xfrm>
-          <a:prstGeom prst="rect">
-            <a:avLst/>
-          </a:prstGeom>
-        </p:spPr>
-        <p:txBody>
-          <a:bodyPr vert="horz" lIns="91440" tIns="45720" rIns="91440" bIns="45720" rtlCol="0" anchor="b"/>
-          <a:lstStyle>
-            <a:lvl1pPr algn="r">
-              <a:defRPr sz="1200"/>
-            </a:lvl1pPr>
-          </a:lstStyle>
-          <a:p>
-            <a:fld id="{BB5E49A5-4136-284D-997B-48E1D791AD67}" type="slidenum">
-              <a:rPr lang="en-US" smtClean="0"/>
-              <a:t>‹#›</a:t>
-            </a:fld>
-            <a:endParaRPr lang="en-US"/>
-          </a:p>
-        </p:txBody>
-      </p:sp>
     </p:spTree>
     <p:extLst>
       <p:ext uri="{BB962C8B-B14F-4D97-AF65-F5344CB8AC3E}">
-        <p14:creationId xmlns:p14="http://schemas.microsoft.com/office/powerpoint/2010/main" val="2623252185"/>
+        <p14:creationId xmlns:p14="http://schemas.microsoft.com/office/powerpoint/2010/main" val="321331365"/>
       </p:ext>
     </p:extLst>
   </p:cSld>
   <p:clrMap bg1="lt1" tx1="dk1" bg2="lt2" tx2="dk2" accent1="accent1" accent2="accent2" accent3="accent3" accent4="accent4" accent5="accent5" accent6="accent6" hlink="hlink" folHlink="folHlink"/>
   <p:notesStyle>
-    <a:lvl1pPr marL="0" algn="l" defTabSz="457200" rtl="0" eaLnBrk="1" latinLnBrk="0" hangingPunct="1">
+    <a:lvl1pPr marL="0" algn="l" defTabSz="914400" rtl="0" eaLnBrk="1" latinLnBrk="0" hangingPunct="1">
       <a:defRPr sz="1200" kern="1200">
         <a:solidFill>
           <a:schemeClr val="tx1"/>
@@ -386,7 +180,7 @@
         <a:cs typeface="+mn-cs"/>
       </a:defRPr>
     </a:lvl1pPr>
-    <a:lvl2pPr marL="457200" algn="l" defTabSz="457200" rtl="0" eaLnBrk="1" latinLnBrk="0" hangingPunct="1">
+    <a:lvl2pPr marL="457200" algn="l" defTabSz="914400" rtl="0" eaLnBrk="1" latinLnBrk="0" hangingPunct="1">
       <a:defRPr sz="1200" kern="1200">
         <a:solidFill>
           <a:schemeClr val="tx1"/>
@@ -396,7 +190,7 @@
         <a:cs typeface="+mn-cs"/>
       </a:defRPr>
     </a:lvl2pPr>
-    <a:lvl3pPr marL="914400" algn="l" defTabSz="457200" rtl="0" eaLnBrk="1" latinLnBrk="0" hangingPunct="1">
+    <a:lvl3pPr marL="914400" algn="l" defTabSz="914400" rtl="0" eaLnBrk="1" latinLnBrk="0" hangingPunct="1">
       <a:defRPr sz="1200" kern="1200">
         <a:solidFill>
           <a:schemeClr val="tx1"/>
@@ -406,7 +200,7 @@
         <a:cs typeface="+mn-cs"/>
       </a:defRPr>
     </a:lvl3pPr>
-    <a:lvl4pPr marL="1371600" algn="l" defTabSz="457200" rtl="0" eaLnBrk="1" latinLnBrk="0" hangingPunct="1">
+    <a:lvl4pPr marL="1371600" algn="l" defTabSz="914400" rtl="0" eaLnBrk="1" latinLnBrk="0" hangingPunct="1">
       <a:defRPr sz="1200" kern="1200">
         <a:solidFill>
           <a:schemeClr val="tx1"/>
@@ -416,7 +210,7 @@
         <a:cs typeface="+mn-cs"/>
       </a:defRPr>
     </a:lvl4pPr>
-    <a:lvl5pPr marL="1828800" algn="l" defTabSz="457200" rtl="0" eaLnBrk="1" latinLnBrk="0" hangingPunct="1">
+    <a:lvl5pPr marL="1828800" algn="l" defTabSz="914400" rtl="0" eaLnBrk="1" latinLnBrk="0" hangingPunct="1">
       <a:defRPr sz="1200" kern="1200">
         <a:solidFill>
           <a:schemeClr val="tx1"/>
@@ -426,7 +220,7 @@
         <a:cs typeface="+mn-cs"/>
       </a:defRPr>
     </a:lvl5pPr>
-    <a:lvl6pPr marL="2286000" algn="l" defTabSz="457200" rtl="0" eaLnBrk="1" latinLnBrk="0" hangingPunct="1">
+    <a:lvl6pPr marL="2286000" algn="l" defTabSz="914400" rtl="0" eaLnBrk="1" latinLnBrk="0" hangingPunct="1">
       <a:defRPr sz="1200" kern="1200">
         <a:solidFill>
           <a:schemeClr val="tx1"/>
@@ -436,7 +230,7 @@
         <a:cs typeface="+mn-cs"/>
       </a:defRPr>
     </a:lvl6pPr>
-    <a:lvl7pPr marL="2743200" algn="l" defTabSz="457200" rtl="0" eaLnBrk="1" latinLnBrk="0" hangingPunct="1">
+    <a:lvl7pPr marL="2743200" algn="l" defTabSz="914400" rtl="0" eaLnBrk="1" latinLnBrk="0" hangingPunct="1">
       <a:defRPr sz="1200" kern="1200">
         <a:solidFill>
           <a:schemeClr val="tx1"/>
@@ -446,7 +240,7 @@
         <a:cs typeface="+mn-cs"/>
       </a:defRPr>
     </a:lvl7pPr>
-    <a:lvl8pPr marL="3200400" algn="l" defTabSz="457200" rtl="0" eaLnBrk="1" latinLnBrk="0" hangingPunct="1">
+    <a:lvl8pPr marL="3200400" algn="l" defTabSz="914400" rtl="0" eaLnBrk="1" latinLnBrk="0" hangingPunct="1">
       <a:defRPr sz="1200" kern="1200">
         <a:solidFill>
           <a:schemeClr val="tx1"/>
@@ -456,7 +250,7 @@
         <a:cs typeface="+mn-cs"/>
       </a:defRPr>
     </a:lvl8pPr>
-    <a:lvl9pPr marL="3657600" algn="l" defTabSz="457200" rtl="0" eaLnBrk="1" latinLnBrk="0" hangingPunct="1">
+    <a:lvl9pPr marL="3657600" algn="l" defTabSz="914400" rtl="0" eaLnBrk="1" latinLnBrk="0" hangingPunct="1">
       <a:defRPr sz="1200" kern="1200">
         <a:solidFill>
           <a:schemeClr val="tx1"/>
@@ -471,7 +265,7 @@
 </file>
 
 <file path=ppt/notesSlides/notesSlide1.xml><?xml version="1.0" encoding="utf-8"?>
-<p:notes xmlns:a="http://schemas.openxmlformats.org/drawingml/2006/main" xmlns:p="http://schemas.openxmlformats.org/presentationml/2006/main" xmlns:r="http://schemas.openxmlformats.org/officeDocument/2006/relationships">
+<p:notes xmlns:a="http://schemas.openxmlformats.org/drawingml/2006/main" xmlns:r="http://schemas.openxmlformats.org/officeDocument/2006/relationships" xmlns:p="http://schemas.openxmlformats.org/presentationml/2006/main">
   <p:cSld>
     <p:spTree>
       <p:nvGrpSpPr>
@@ -491,7 +285,7 @@
         <p:nvSpPr>
           <p:cNvPr id="2" name="Slide Image Placeholder 1"/>
           <p:cNvSpPr>
-            <a:spLocks noGrp="1"/>
+            <a:spLocks noGrp="1" noRot="1" noChangeAspect="1"/>
           </p:cNvSpPr>
           <p:nvPr>
             <p:ph type="sldImg" idx="2"/>
@@ -506,7 +300,7 @@
             <a:spLocks noGrp="1"/>
           </p:cNvSpPr>
           <p:nvPr>
-            <p:ph type="body" idx="3" sz="quarter"/>
+            <p:ph type="body" sz="quarter" idx="3"/>
           </p:nvPr>
         </p:nvSpPr>
         <p:spPr/>
@@ -530,7 +324,7 @@
             <a:spLocks noGrp="1"/>
           </p:cNvSpPr>
           <p:nvPr>
-            <p:ph type="sldNum" idx="5" sz="quarter"/>
+            <p:ph type="sldNum" sz="quarter" idx="5"/>
           </p:nvPr>
         </p:nvSpPr>
         <p:spPr/>
@@ -544,7 +338,7 @@
 </file>
 
 <file path=ppt/notesSlides/notesSlide10.xml><?xml version="1.0" encoding="utf-8"?>
-<p:notes xmlns:a="http://schemas.openxmlformats.org/drawingml/2006/main" xmlns:p="http://schemas.openxmlformats.org/presentationml/2006/main" xmlns:r="http://schemas.openxmlformats.org/officeDocument/2006/relationships">
+<p:notes xmlns:a="http://schemas.openxmlformats.org/drawingml/2006/main" xmlns:r="http://schemas.openxmlformats.org/officeDocument/2006/relationships" xmlns:p="http://schemas.openxmlformats.org/presentationml/2006/main">
   <p:cSld>
     <p:spTree>
       <p:nvGrpSpPr>
@@ -564,7 +358,7 @@
         <p:nvSpPr>
           <p:cNvPr id="2" name="Slide Image Placeholder 1"/>
           <p:cNvSpPr>
-            <a:spLocks noGrp="1"/>
+            <a:spLocks noGrp="1" noRot="1" noChangeAspect="1"/>
           </p:cNvSpPr>
           <p:nvPr>
             <p:ph type="sldImg" idx="2"/>
@@ -579,7 +373,7 @@
             <a:spLocks noGrp="1"/>
           </p:cNvSpPr>
           <p:nvPr>
-            <p:ph type="body" idx="3" sz="quarter"/>
+            <p:ph type="body" sz="quarter" idx="3"/>
           </p:nvPr>
         </p:nvSpPr>
         <p:spPr/>
@@ -603,7 +397,7 @@
             <a:spLocks noGrp="1"/>
           </p:cNvSpPr>
           <p:nvPr>
-            <p:ph type="sldNum" idx="5" sz="quarter"/>
+            <p:ph type="sldNum" sz="quarter" idx="5"/>
           </p:nvPr>
         </p:nvSpPr>
         <p:spPr/>
@@ -617,7 +411,7 @@
 </file>
 
 <file path=ppt/notesSlides/notesSlide11.xml><?xml version="1.0" encoding="utf-8"?>
-<p:notes xmlns:a="http://schemas.openxmlformats.org/drawingml/2006/main" xmlns:p="http://schemas.openxmlformats.org/presentationml/2006/main" xmlns:r="http://schemas.openxmlformats.org/officeDocument/2006/relationships">
+<p:notes xmlns:a="http://schemas.openxmlformats.org/drawingml/2006/main" xmlns:r="http://schemas.openxmlformats.org/officeDocument/2006/relationships" xmlns:p="http://schemas.openxmlformats.org/presentationml/2006/main">
   <p:cSld>
     <p:spTree>
       <p:nvGrpSpPr>
@@ -637,7 +431,7 @@
         <p:nvSpPr>
           <p:cNvPr id="2" name="Slide Image Placeholder 1"/>
           <p:cNvSpPr>
-            <a:spLocks noGrp="1"/>
+            <a:spLocks noGrp="1" noRot="1" noChangeAspect="1"/>
           </p:cNvSpPr>
           <p:nvPr>
             <p:ph type="sldImg" idx="2"/>
@@ -652,7 +446,7 @@
             <a:spLocks noGrp="1"/>
           </p:cNvSpPr>
           <p:nvPr>
-            <p:ph type="body" idx="3" sz="quarter"/>
+            <p:ph type="body" sz="quarter" idx="3"/>
           </p:nvPr>
         </p:nvSpPr>
         <p:spPr/>
@@ -676,7 +470,7 @@
             <a:spLocks noGrp="1"/>
           </p:cNvSpPr>
           <p:nvPr>
-            <p:ph type="sldNum" idx="5" sz="quarter"/>
+            <p:ph type="sldNum" sz="quarter" idx="5"/>
           </p:nvPr>
         </p:nvSpPr>
         <p:spPr/>
@@ -690,7 +484,7 @@
 </file>
 
 <file path=ppt/notesSlides/notesSlide12.xml><?xml version="1.0" encoding="utf-8"?>
-<p:notes xmlns:a="http://schemas.openxmlformats.org/drawingml/2006/main" xmlns:p="http://schemas.openxmlformats.org/presentationml/2006/main" xmlns:r="http://schemas.openxmlformats.org/officeDocument/2006/relationships">
+<p:notes xmlns:a="http://schemas.openxmlformats.org/drawingml/2006/main" xmlns:r="http://schemas.openxmlformats.org/officeDocument/2006/relationships" xmlns:p="http://schemas.openxmlformats.org/presentationml/2006/main">
   <p:cSld>
     <p:spTree>
       <p:nvGrpSpPr>
@@ -710,7 +504,7 @@
         <p:nvSpPr>
           <p:cNvPr id="2" name="Slide Image Placeholder 1"/>
           <p:cNvSpPr>
-            <a:spLocks noGrp="1"/>
+            <a:spLocks noGrp="1" noRot="1" noChangeAspect="1"/>
           </p:cNvSpPr>
           <p:nvPr>
             <p:ph type="sldImg" idx="2"/>
@@ -725,7 +519,7 @@
             <a:spLocks noGrp="1"/>
           </p:cNvSpPr>
           <p:nvPr>
-            <p:ph type="body" idx="3" sz="quarter"/>
+            <p:ph type="body" sz="quarter" idx="3"/>
           </p:nvPr>
         </p:nvSpPr>
         <p:spPr/>
@@ -749,7 +543,7 @@
             <a:spLocks noGrp="1"/>
           </p:cNvSpPr>
           <p:nvPr>
-            <p:ph type="sldNum" idx="5" sz="quarter"/>
+            <p:ph type="sldNum" sz="quarter" idx="5"/>
           </p:nvPr>
         </p:nvSpPr>
         <p:spPr/>
@@ -763,7 +557,7 @@
 </file>
 
 <file path=ppt/notesSlides/notesSlide13.xml><?xml version="1.0" encoding="utf-8"?>
-<p:notes xmlns:a="http://schemas.openxmlformats.org/drawingml/2006/main" xmlns:p="http://schemas.openxmlformats.org/presentationml/2006/main" xmlns:r="http://schemas.openxmlformats.org/officeDocument/2006/relationships">
+<p:notes xmlns:a="http://schemas.openxmlformats.org/drawingml/2006/main" xmlns:r="http://schemas.openxmlformats.org/officeDocument/2006/relationships" xmlns:p="http://schemas.openxmlformats.org/presentationml/2006/main">
   <p:cSld>
     <p:spTree>
       <p:nvGrpSpPr>
@@ -783,7 +577,7 @@
         <p:nvSpPr>
           <p:cNvPr id="2" name="Slide Image Placeholder 1"/>
           <p:cNvSpPr>
-            <a:spLocks noGrp="1"/>
+            <a:spLocks noGrp="1" noRot="1" noChangeAspect="1"/>
           </p:cNvSpPr>
           <p:nvPr>
             <p:ph type="sldImg" idx="2"/>
@@ -798,7 +592,7 @@
             <a:spLocks noGrp="1"/>
           </p:cNvSpPr>
           <p:nvPr>
-            <p:ph type="body" idx="3" sz="quarter"/>
+            <p:ph type="body" sz="quarter" idx="3"/>
           </p:nvPr>
         </p:nvSpPr>
         <p:spPr/>
@@ -822,7 +616,7 @@
             <a:spLocks noGrp="1"/>
           </p:cNvSpPr>
           <p:nvPr>
-            <p:ph type="sldNum" idx="5" sz="quarter"/>
+            <p:ph type="sldNum" sz="quarter" idx="5"/>
           </p:nvPr>
         </p:nvSpPr>
         <p:spPr/>
@@ -836,7 +630,7 @@
 </file>
 
 <file path=ppt/notesSlides/notesSlide14.xml><?xml version="1.0" encoding="utf-8"?>
-<p:notes xmlns:a="http://schemas.openxmlformats.org/drawingml/2006/main" xmlns:p="http://schemas.openxmlformats.org/presentationml/2006/main" xmlns:r="http://schemas.openxmlformats.org/officeDocument/2006/relationships">
+<p:notes xmlns:a="http://schemas.openxmlformats.org/drawingml/2006/main" xmlns:r="http://schemas.openxmlformats.org/officeDocument/2006/relationships" xmlns:p="http://schemas.openxmlformats.org/presentationml/2006/main">
   <p:cSld>
     <p:spTree>
       <p:nvGrpSpPr>
@@ -856,7 +650,7 @@
         <p:nvSpPr>
           <p:cNvPr id="2" name="Slide Image Placeholder 1"/>
           <p:cNvSpPr>
-            <a:spLocks noGrp="1"/>
+            <a:spLocks noGrp="1" noRot="1" noChangeAspect="1"/>
           </p:cNvSpPr>
           <p:nvPr>
             <p:ph type="sldImg" idx="2"/>
@@ -871,7 +665,7 @@
             <a:spLocks noGrp="1"/>
           </p:cNvSpPr>
           <p:nvPr>
-            <p:ph type="body" idx="3" sz="quarter"/>
+            <p:ph type="body" sz="quarter" idx="3"/>
           </p:nvPr>
         </p:nvSpPr>
         <p:spPr/>
@@ -895,7 +689,7 @@
             <a:spLocks noGrp="1"/>
           </p:cNvSpPr>
           <p:nvPr>
-            <p:ph type="sldNum" idx="5" sz="quarter"/>
+            <p:ph type="sldNum" sz="quarter" idx="5"/>
           </p:nvPr>
         </p:nvSpPr>
         <p:spPr/>
@@ -909,7 +703,7 @@
 </file>
 
 <file path=ppt/notesSlides/notesSlide2.xml><?xml version="1.0" encoding="utf-8"?>
-<p:notes xmlns:a="http://schemas.openxmlformats.org/drawingml/2006/main" xmlns:p="http://schemas.openxmlformats.org/presentationml/2006/main" xmlns:r="http://schemas.openxmlformats.org/officeDocument/2006/relationships">
+<p:notes xmlns:a="http://schemas.openxmlformats.org/drawingml/2006/main" xmlns:r="http://schemas.openxmlformats.org/officeDocument/2006/relationships" xmlns:p="http://schemas.openxmlformats.org/presentationml/2006/main">
   <p:cSld>
     <p:spTree>
       <p:nvGrpSpPr>
@@ -929,7 +723,7 @@
         <p:nvSpPr>
           <p:cNvPr id="2" name="Slide Image Placeholder 1"/>
           <p:cNvSpPr>
-            <a:spLocks noGrp="1"/>
+            <a:spLocks noGrp="1" noRot="1" noChangeAspect="1"/>
           </p:cNvSpPr>
           <p:nvPr>
             <p:ph type="sldImg" idx="2"/>
@@ -944,7 +738,7 @@
             <a:spLocks noGrp="1"/>
           </p:cNvSpPr>
           <p:nvPr>
-            <p:ph type="body" idx="3" sz="quarter"/>
+            <p:ph type="body" sz="quarter" idx="3"/>
           </p:nvPr>
         </p:nvSpPr>
         <p:spPr/>
@@ -968,7 +762,7 @@
             <a:spLocks noGrp="1"/>
           </p:cNvSpPr>
           <p:nvPr>
-            <p:ph type="sldNum" idx="5" sz="quarter"/>
+            <p:ph type="sldNum" sz="quarter" idx="5"/>
           </p:nvPr>
         </p:nvSpPr>
         <p:spPr/>
@@ -982,7 +776,7 @@
 </file>
 
 <file path=ppt/notesSlides/notesSlide3.xml><?xml version="1.0" encoding="utf-8"?>
-<p:notes xmlns:a="http://schemas.openxmlformats.org/drawingml/2006/main" xmlns:p="http://schemas.openxmlformats.org/presentationml/2006/main" xmlns:r="http://schemas.openxmlformats.org/officeDocument/2006/relationships">
+<p:notes xmlns:a="http://schemas.openxmlformats.org/drawingml/2006/main" xmlns:r="http://schemas.openxmlformats.org/officeDocument/2006/relationships" xmlns:p="http://schemas.openxmlformats.org/presentationml/2006/main">
   <p:cSld>
     <p:spTree>
       <p:nvGrpSpPr>
@@ -1002,7 +796,7 @@
         <p:nvSpPr>
           <p:cNvPr id="2" name="Slide Image Placeholder 1"/>
           <p:cNvSpPr>
-            <a:spLocks noGrp="1"/>
+            <a:spLocks noGrp="1" noRot="1" noChangeAspect="1"/>
           </p:cNvSpPr>
           <p:nvPr>
             <p:ph type="sldImg" idx="2"/>
@@ -1017,7 +811,7 @@
             <a:spLocks noGrp="1"/>
           </p:cNvSpPr>
           <p:nvPr>
-            <p:ph type="body" idx="3" sz="quarter"/>
+            <p:ph type="body" sz="quarter" idx="3"/>
           </p:nvPr>
         </p:nvSpPr>
         <p:spPr/>
@@ -1041,7 +835,7 @@
             <a:spLocks noGrp="1"/>
           </p:cNvSpPr>
           <p:nvPr>
-            <p:ph type="sldNum" idx="5" sz="quarter"/>
+            <p:ph type="sldNum" sz="quarter" idx="5"/>
           </p:nvPr>
         </p:nvSpPr>
         <p:spPr/>
@@ -1055,7 +849,7 @@
 </file>
 
 <file path=ppt/notesSlides/notesSlide4.xml><?xml version="1.0" encoding="utf-8"?>
-<p:notes xmlns:a="http://schemas.openxmlformats.org/drawingml/2006/main" xmlns:p="http://schemas.openxmlformats.org/presentationml/2006/main" xmlns:r="http://schemas.openxmlformats.org/officeDocument/2006/relationships">
+<p:notes xmlns:a="http://schemas.openxmlformats.org/drawingml/2006/main" xmlns:r="http://schemas.openxmlformats.org/officeDocument/2006/relationships" xmlns:p="http://schemas.openxmlformats.org/presentationml/2006/main">
   <p:cSld>
     <p:spTree>
       <p:nvGrpSpPr>
@@ -1075,7 +869,7 @@
         <p:nvSpPr>
           <p:cNvPr id="2" name="Slide Image Placeholder 1"/>
           <p:cNvSpPr>
-            <a:spLocks noGrp="1"/>
+            <a:spLocks noGrp="1" noRot="1" noChangeAspect="1"/>
           </p:cNvSpPr>
           <p:nvPr>
             <p:ph type="sldImg" idx="2"/>
@@ -1090,7 +884,7 @@
             <a:spLocks noGrp="1"/>
           </p:cNvSpPr>
           <p:nvPr>
-            <p:ph type="body" idx="3" sz="quarter"/>
+            <p:ph type="body" sz="quarter" idx="3"/>
           </p:nvPr>
         </p:nvSpPr>
         <p:spPr/>
@@ -1114,7 +908,7 @@
             <a:spLocks noGrp="1"/>
           </p:cNvSpPr>
           <p:nvPr>
-            <p:ph type="sldNum" idx="5" sz="quarter"/>
+            <p:ph type="sldNum" sz="quarter" idx="5"/>
           </p:nvPr>
         </p:nvSpPr>
         <p:spPr/>
@@ -1128,7 +922,7 @@
 </file>
 
 <file path=ppt/notesSlides/notesSlide5.xml><?xml version="1.0" encoding="utf-8"?>
-<p:notes xmlns:a="http://schemas.openxmlformats.org/drawingml/2006/main" xmlns:p="http://schemas.openxmlformats.org/presentationml/2006/main" xmlns:r="http://schemas.openxmlformats.org/officeDocument/2006/relationships">
+<p:notes xmlns:a="http://schemas.openxmlformats.org/drawingml/2006/main" xmlns:r="http://schemas.openxmlformats.org/officeDocument/2006/relationships" xmlns:p="http://schemas.openxmlformats.org/presentationml/2006/main">
   <p:cSld>
     <p:spTree>
       <p:nvGrpSpPr>
@@ -1148,7 +942,7 @@
         <p:nvSpPr>
           <p:cNvPr id="2" name="Slide Image Placeholder 1"/>
           <p:cNvSpPr>
-            <a:spLocks noGrp="1"/>
+            <a:spLocks noGrp="1" noRot="1" noChangeAspect="1"/>
           </p:cNvSpPr>
           <p:nvPr>
             <p:ph type="sldImg" idx="2"/>
@@ -1163,7 +957,7 @@
             <a:spLocks noGrp="1"/>
           </p:cNvSpPr>
           <p:nvPr>
-            <p:ph type="body" idx="3" sz="quarter"/>
+            <p:ph type="body" sz="quarter" idx="3"/>
           </p:nvPr>
         </p:nvSpPr>
         <p:spPr/>
@@ -1187,7 +981,7 @@
             <a:spLocks noGrp="1"/>
           </p:cNvSpPr>
           <p:nvPr>
-            <p:ph type="sldNum" idx="5" sz="quarter"/>
+            <p:ph type="sldNum" sz="quarter" idx="5"/>
           </p:nvPr>
         </p:nvSpPr>
         <p:spPr/>
@@ -1201,7 +995,7 @@
 </file>
 
 <file path=ppt/notesSlides/notesSlide6.xml><?xml version="1.0" encoding="utf-8"?>
-<p:notes xmlns:a="http://schemas.openxmlformats.org/drawingml/2006/main" xmlns:p="http://schemas.openxmlformats.org/presentationml/2006/main" xmlns:r="http://schemas.openxmlformats.org/officeDocument/2006/relationships">
+<p:notes xmlns:a="http://schemas.openxmlformats.org/drawingml/2006/main" xmlns:r="http://schemas.openxmlformats.org/officeDocument/2006/relationships" xmlns:p="http://schemas.openxmlformats.org/presentationml/2006/main">
   <p:cSld>
     <p:spTree>
       <p:nvGrpSpPr>
@@ -1221,7 +1015,7 @@
         <p:nvSpPr>
           <p:cNvPr id="2" name="Slide Image Placeholder 1"/>
           <p:cNvSpPr>
-            <a:spLocks noGrp="1"/>
+            <a:spLocks noGrp="1" noRot="1" noChangeAspect="1"/>
           </p:cNvSpPr>
           <p:nvPr>
             <p:ph type="sldImg" idx="2"/>
@@ -1236,7 +1030,7 @@
             <a:spLocks noGrp="1"/>
           </p:cNvSpPr>
           <p:nvPr>
-            <p:ph type="body" idx="3" sz="quarter"/>
+            <p:ph type="body" sz="quarter" idx="3"/>
           </p:nvPr>
         </p:nvSpPr>
         <p:spPr/>
@@ -1260,7 +1054,7 @@
             <a:spLocks noGrp="1"/>
           </p:cNvSpPr>
           <p:nvPr>
-            <p:ph type="sldNum" idx="5" sz="quarter"/>
+            <p:ph type="sldNum" sz="quarter" idx="5"/>
           </p:nvPr>
         </p:nvSpPr>
         <p:spPr/>
@@ -1274,7 +1068,7 @@
 </file>
 
 <file path=ppt/notesSlides/notesSlide7.xml><?xml version="1.0" encoding="utf-8"?>
-<p:notes xmlns:a="http://schemas.openxmlformats.org/drawingml/2006/main" xmlns:p="http://schemas.openxmlformats.org/presentationml/2006/main" xmlns:r="http://schemas.openxmlformats.org/officeDocument/2006/relationships">
+<p:notes xmlns:a="http://schemas.openxmlformats.org/drawingml/2006/main" xmlns:r="http://schemas.openxmlformats.org/officeDocument/2006/relationships" xmlns:p="http://schemas.openxmlformats.org/presentationml/2006/main">
   <p:cSld>
     <p:spTree>
       <p:nvGrpSpPr>
@@ -1294,7 +1088,7 @@
         <p:nvSpPr>
           <p:cNvPr id="2" name="Slide Image Placeholder 1"/>
           <p:cNvSpPr>
-            <a:spLocks noGrp="1"/>
+            <a:spLocks noGrp="1" noRot="1" noChangeAspect="1"/>
           </p:cNvSpPr>
           <p:nvPr>
             <p:ph type="sldImg" idx="2"/>
@@ -1309,7 +1103,7 @@
             <a:spLocks noGrp="1"/>
           </p:cNvSpPr>
           <p:nvPr>
-            <p:ph type="body" idx="3" sz="quarter"/>
+            <p:ph type="body" sz="quarter" idx="3"/>
           </p:nvPr>
         </p:nvSpPr>
         <p:spPr/>
@@ -1333,7 +1127,7 @@
             <a:spLocks noGrp="1"/>
           </p:cNvSpPr>
           <p:nvPr>
-            <p:ph type="sldNum" idx="5" sz="quarter"/>
+            <p:ph type="sldNum" sz="quarter" idx="5"/>
           </p:nvPr>
         </p:nvSpPr>
         <p:spPr/>
@@ -1347,7 +1141,7 @@
 </file>
 
 <file path=ppt/notesSlides/notesSlide8.xml><?xml version="1.0" encoding="utf-8"?>
-<p:notes xmlns:a="http://schemas.openxmlformats.org/drawingml/2006/main" xmlns:p="http://schemas.openxmlformats.org/presentationml/2006/main" xmlns:r="http://schemas.openxmlformats.org/officeDocument/2006/relationships">
+<p:notes xmlns:a="http://schemas.openxmlformats.org/drawingml/2006/main" xmlns:r="http://schemas.openxmlformats.org/officeDocument/2006/relationships" xmlns:p="http://schemas.openxmlformats.org/presentationml/2006/main">
   <p:cSld>
     <p:spTree>
       <p:nvGrpSpPr>
@@ -1367,7 +1161,7 @@
         <p:nvSpPr>
           <p:cNvPr id="2" name="Slide Image Placeholder 1"/>
           <p:cNvSpPr>
-            <a:spLocks noGrp="1"/>
+            <a:spLocks noGrp="1" noRot="1" noChangeAspect="1"/>
           </p:cNvSpPr>
           <p:nvPr>
             <p:ph type="sldImg" idx="2"/>
@@ -1382,7 +1176,7 @@
             <a:spLocks noGrp="1"/>
           </p:cNvSpPr>
           <p:nvPr>
-            <p:ph type="body" idx="3" sz="quarter"/>
+            <p:ph type="body" sz="quarter" idx="3"/>
           </p:nvPr>
         </p:nvSpPr>
         <p:spPr/>
@@ -1406,7 +1200,7 @@
             <a:spLocks noGrp="1"/>
           </p:cNvSpPr>
           <p:nvPr>
-            <p:ph type="sldNum" idx="5" sz="quarter"/>
+            <p:ph type="sldNum" sz="quarter" idx="5"/>
           </p:nvPr>
         </p:nvSpPr>
         <p:spPr/>
@@ -1420,7 +1214,7 @@
 </file>
 
 <file path=ppt/notesSlides/notesSlide9.xml><?xml version="1.0" encoding="utf-8"?>
-<p:notes xmlns:a="http://schemas.openxmlformats.org/drawingml/2006/main" xmlns:p="http://schemas.openxmlformats.org/presentationml/2006/main" xmlns:r="http://schemas.openxmlformats.org/officeDocument/2006/relationships">
+<p:notes xmlns:a="http://schemas.openxmlformats.org/drawingml/2006/main" xmlns:r="http://schemas.openxmlformats.org/officeDocument/2006/relationships" xmlns:p="http://schemas.openxmlformats.org/presentationml/2006/main">
   <p:cSld>
     <p:spTree>
       <p:nvGrpSpPr>
@@ -1440,7 +1234,7 @@
         <p:nvSpPr>
           <p:cNvPr id="2" name="Slide Image Placeholder 1"/>
           <p:cNvSpPr>
-            <a:spLocks noGrp="1"/>
+            <a:spLocks noGrp="1" noRot="1" noChangeAspect="1"/>
           </p:cNvSpPr>
           <p:nvPr>
             <p:ph type="sldImg" idx="2"/>
@@ -1455,7 +1249,7 @@
             <a:spLocks noGrp="1"/>
           </p:cNvSpPr>
           <p:nvPr>
-            <p:ph type="body" idx="3" sz="quarter"/>
+            <p:ph type="body" sz="quarter" idx="3"/>
           </p:nvPr>
         </p:nvSpPr>
         <p:spPr/>
@@ -1479,7 +1273,7 @@
             <a:spLocks noGrp="1"/>
           </p:cNvSpPr>
           <p:nvPr>
-            <p:ph type="sldNum" idx="5" sz="quarter"/>
+            <p:ph type="sldNum" sz="quarter" idx="5"/>
           </p:nvPr>
         </p:nvSpPr>
         <p:spPr/>
@@ -1530,10 +1324,9 @@
           <a:lstStyle/>
           <a:p>
             <a:r>
-              <a:rPr lang="en-US" smtClean="0"/>
+              <a:rPr lang="en-US"/>
               <a:t>Click to edit Master title style</a:t>
             </a:r>
-            <a:endParaRPr lang="en-US"/>
           </a:p>
         </p:txBody>
       </p:sp>
@@ -1649,10 +1442,9 @@
           </a:lstStyle>
           <a:p>
             <a:r>
-              <a:rPr lang="en-US" smtClean="0"/>
+              <a:rPr lang="en-US"/>
               <a:t>Click to edit Master subtitle style</a:t>
             </a:r>
-            <a:endParaRPr lang="en-US"/>
           </a:p>
         </p:txBody>
       </p:sp>
@@ -1673,7 +1465,7 @@
           <a:p>
             <a:fld id="{5BCAD085-E8A6-8845-BD4E-CB4CCA059FC4}" type="datetimeFigureOut">
               <a:rPr lang="en-US" smtClean="0"/>
-              <a:t>1/27/13</a:t>
+              <a:t>4/23/26</a:t>
             </a:fld>
             <a:endParaRPr lang="en-US"/>
           </a:p>
@@ -1767,10 +1559,9 @@
           <a:lstStyle/>
           <a:p>
             <a:r>
-              <a:rPr lang="en-US" smtClean="0"/>
+              <a:rPr lang="en-US"/>
               <a:t>Click to edit Master title style</a:t>
             </a:r>
-            <a:endParaRPr lang="en-US"/>
           </a:p>
         </p:txBody>
       </p:sp>
@@ -1791,38 +1582,37 @@
           <a:p>
             <a:pPr lvl="0"/>
             <a:r>
-              <a:rPr lang="en-US" smtClean="0"/>
+              <a:rPr lang="en-US"/>
               <a:t>Click to edit Master text styles</a:t>
             </a:r>
           </a:p>
           <a:p>
             <a:pPr lvl="1"/>
             <a:r>
-              <a:rPr lang="en-US" smtClean="0"/>
+              <a:rPr lang="en-US"/>
               <a:t>Second level</a:t>
             </a:r>
           </a:p>
           <a:p>
             <a:pPr lvl="2"/>
             <a:r>
-              <a:rPr lang="en-US" smtClean="0"/>
+              <a:rPr lang="en-US"/>
               <a:t>Third level</a:t>
             </a:r>
           </a:p>
           <a:p>
             <a:pPr lvl="3"/>
             <a:r>
-              <a:rPr lang="en-US" smtClean="0"/>
+              <a:rPr lang="en-US"/>
               <a:t>Fourth level</a:t>
             </a:r>
           </a:p>
           <a:p>
             <a:pPr lvl="4"/>
             <a:r>
-              <a:rPr lang="en-US" smtClean="0"/>
+              <a:rPr lang="en-US"/>
               <a:t>Fifth level</a:t>
             </a:r>
-            <a:endParaRPr lang="en-US"/>
           </a:p>
         </p:txBody>
       </p:sp>
@@ -1843,7 +1633,7 @@
           <a:p>
             <a:fld id="{5BCAD085-E8A6-8845-BD4E-CB4CCA059FC4}" type="datetimeFigureOut">
               <a:rPr lang="en-US" smtClean="0"/>
-              <a:t>1/27/13</a:t>
+              <a:t>4/23/26</a:t>
             </a:fld>
             <a:endParaRPr lang="en-US"/>
           </a:p>
@@ -1942,10 +1732,9 @@
           <a:lstStyle/>
           <a:p>
             <a:r>
-              <a:rPr lang="en-US" smtClean="0"/>
+              <a:rPr lang="en-US"/>
               <a:t>Click to edit Master title style</a:t>
             </a:r>
-            <a:endParaRPr lang="en-US"/>
           </a:p>
         </p:txBody>
       </p:sp>
@@ -1971,38 +1760,37 @@
           <a:p>
             <a:pPr lvl="0"/>
             <a:r>
-              <a:rPr lang="en-US" smtClean="0"/>
+              <a:rPr lang="en-US"/>
               <a:t>Click to edit Master text styles</a:t>
             </a:r>
           </a:p>
           <a:p>
             <a:pPr lvl="1"/>
             <a:r>
-              <a:rPr lang="en-US" smtClean="0"/>
+              <a:rPr lang="en-US"/>
               <a:t>Second level</a:t>
             </a:r>
           </a:p>
           <a:p>
             <a:pPr lvl="2"/>
             <a:r>
-              <a:rPr lang="en-US" smtClean="0"/>
+              <a:rPr lang="en-US"/>
               <a:t>Third level</a:t>
             </a:r>
           </a:p>
           <a:p>
             <a:pPr lvl="3"/>
             <a:r>
-              <a:rPr lang="en-US" smtClean="0"/>
+              <a:rPr lang="en-US"/>
               <a:t>Fourth level</a:t>
             </a:r>
           </a:p>
           <a:p>
             <a:pPr lvl="4"/>
             <a:r>
-              <a:rPr lang="en-US" smtClean="0"/>
+              <a:rPr lang="en-US"/>
               <a:t>Fifth level</a:t>
             </a:r>
-            <a:endParaRPr lang="en-US"/>
           </a:p>
         </p:txBody>
       </p:sp>
@@ -2023,7 +1811,7 @@
           <a:p>
             <a:fld id="{5BCAD085-E8A6-8845-BD4E-CB4CCA059FC4}" type="datetimeFigureOut">
               <a:rPr lang="en-US" smtClean="0"/>
-              <a:t>1/27/13</a:t>
+              <a:t>4/23/26</a:t>
             </a:fld>
             <a:endParaRPr lang="en-US"/>
           </a:p>
@@ -2117,10 +1905,9 @@
           <a:lstStyle/>
           <a:p>
             <a:r>
-              <a:rPr lang="en-US" smtClean="0"/>
+              <a:rPr lang="en-US"/>
               <a:t>Click to edit Master title style</a:t>
             </a:r>
-            <a:endParaRPr lang="en-US"/>
           </a:p>
         </p:txBody>
       </p:sp>
@@ -2141,38 +1928,37 @@
           <a:p>
             <a:pPr lvl="0"/>
             <a:r>
-              <a:rPr lang="en-US" smtClean="0"/>
+              <a:rPr lang="en-US"/>
               <a:t>Click to edit Master text styles</a:t>
             </a:r>
           </a:p>
           <a:p>
             <a:pPr lvl="1"/>
             <a:r>
-              <a:rPr lang="en-US" smtClean="0"/>
+              <a:rPr lang="en-US"/>
               <a:t>Second level</a:t>
             </a:r>
           </a:p>
           <a:p>
             <a:pPr lvl="2"/>
             <a:r>
-              <a:rPr lang="en-US" smtClean="0"/>
+              <a:rPr lang="en-US"/>
               <a:t>Third level</a:t>
             </a:r>
           </a:p>
           <a:p>
             <a:pPr lvl="3"/>
             <a:r>
-              <a:rPr lang="en-US" smtClean="0"/>
+              <a:rPr lang="en-US"/>
               <a:t>Fourth level</a:t>
             </a:r>
           </a:p>
           <a:p>
             <a:pPr lvl="4"/>
             <a:r>
-              <a:rPr lang="en-US" smtClean="0"/>
+              <a:rPr lang="en-US"/>
               <a:t>Fifth level</a:t>
             </a:r>
-            <a:endParaRPr lang="en-US"/>
           </a:p>
         </p:txBody>
       </p:sp>
@@ -2193,7 +1979,7 @@
           <a:p>
             <a:fld id="{5BCAD085-E8A6-8845-BD4E-CB4CCA059FC4}" type="datetimeFigureOut">
               <a:rPr lang="en-US" smtClean="0"/>
-              <a:t>1/27/13</a:t>
+              <a:t>4/23/26</a:t>
             </a:fld>
             <a:endParaRPr lang="en-US"/>
           </a:p>
@@ -2296,10 +2082,9 @@
           </a:lstStyle>
           <a:p>
             <a:r>
-              <a:rPr lang="en-US" smtClean="0"/>
+              <a:rPr lang="en-US"/>
               <a:t>Click to edit Master title style</a:t>
             </a:r>
-            <a:endParaRPr lang="en-US"/>
           </a:p>
         </p:txBody>
       </p:sp>
@@ -2416,7 +2201,7 @@
           <a:p>
             <a:pPr lvl="0"/>
             <a:r>
-              <a:rPr lang="en-US" smtClean="0"/>
+              <a:rPr lang="en-US"/>
               <a:t>Click to edit Master text styles</a:t>
             </a:r>
           </a:p>
@@ -2439,7 +2224,7 @@
           <a:p>
             <a:fld id="{5BCAD085-E8A6-8845-BD4E-CB4CCA059FC4}" type="datetimeFigureOut">
               <a:rPr lang="en-US" smtClean="0"/>
-              <a:t>1/27/13</a:t>
+              <a:t>4/23/26</a:t>
             </a:fld>
             <a:endParaRPr lang="en-US"/>
           </a:p>
@@ -2533,10 +2318,9 @@
           <a:lstStyle/>
           <a:p>
             <a:r>
-              <a:rPr lang="en-US" smtClean="0"/>
+              <a:rPr lang="en-US"/>
               <a:t>Click to edit Master title style</a:t>
             </a:r>
-            <a:endParaRPr lang="en-US"/>
           </a:p>
         </p:txBody>
       </p:sp>
@@ -2590,38 +2374,37 @@
           <a:p>
             <a:pPr lvl="0"/>
             <a:r>
-              <a:rPr lang="en-US" smtClean="0"/>
+              <a:rPr lang="en-US"/>
               <a:t>Click to edit Master text styles</a:t>
             </a:r>
           </a:p>
           <a:p>
             <a:pPr lvl="1"/>
             <a:r>
-              <a:rPr lang="en-US" smtClean="0"/>
+              <a:rPr lang="en-US"/>
               <a:t>Second level</a:t>
             </a:r>
           </a:p>
           <a:p>
             <a:pPr lvl="2"/>
             <a:r>
-              <a:rPr lang="en-US" smtClean="0"/>
+              <a:rPr lang="en-US"/>
               <a:t>Third level</a:t>
             </a:r>
           </a:p>
           <a:p>
             <a:pPr lvl="3"/>
             <a:r>
-              <a:rPr lang="en-US" smtClean="0"/>
+              <a:rPr lang="en-US"/>
               <a:t>Fourth level</a:t>
             </a:r>
           </a:p>
           <a:p>
             <a:pPr lvl="4"/>
             <a:r>
-              <a:rPr lang="en-US" smtClean="0"/>
+              <a:rPr lang="en-US"/>
               <a:t>Fifth level</a:t>
             </a:r>
-            <a:endParaRPr lang="en-US"/>
           </a:p>
         </p:txBody>
       </p:sp>
@@ -2675,38 +2458,37 @@
           <a:p>
             <a:pPr lvl="0"/>
             <a:r>
-              <a:rPr lang="en-US" smtClean="0"/>
+              <a:rPr lang="en-US"/>
               <a:t>Click to edit Master text styles</a:t>
             </a:r>
           </a:p>
           <a:p>
             <a:pPr lvl="1"/>
             <a:r>
-              <a:rPr lang="en-US" smtClean="0"/>
+              <a:rPr lang="en-US"/>
               <a:t>Second level</a:t>
             </a:r>
           </a:p>
           <a:p>
             <a:pPr lvl="2"/>
             <a:r>
-              <a:rPr lang="en-US" smtClean="0"/>
+              <a:rPr lang="en-US"/>
               <a:t>Third level</a:t>
             </a:r>
           </a:p>
           <a:p>
             <a:pPr lvl="3"/>
             <a:r>
-              <a:rPr lang="en-US" smtClean="0"/>
+              <a:rPr lang="en-US"/>
               <a:t>Fourth level</a:t>
             </a:r>
           </a:p>
           <a:p>
             <a:pPr lvl="4"/>
             <a:r>
-              <a:rPr lang="en-US" smtClean="0"/>
+              <a:rPr lang="en-US"/>
               <a:t>Fifth level</a:t>
             </a:r>
-            <a:endParaRPr lang="en-US"/>
           </a:p>
         </p:txBody>
       </p:sp>
@@ -2727,7 +2509,7 @@
           <a:p>
             <a:fld id="{5BCAD085-E8A6-8845-BD4E-CB4CCA059FC4}" type="datetimeFigureOut">
               <a:rPr lang="en-US" smtClean="0"/>
-              <a:t>1/27/13</a:t>
+              <a:t>4/23/26</a:t>
             </a:fld>
             <a:endParaRPr lang="en-US"/>
           </a:p>
@@ -2825,10 +2607,9 @@
           </a:lstStyle>
           <a:p>
             <a:r>
-              <a:rPr lang="en-US" smtClean="0"/>
+              <a:rPr lang="en-US"/>
               <a:t>Click to edit Master title style</a:t>
             </a:r>
-            <a:endParaRPr lang="en-US"/>
           </a:p>
         </p:txBody>
       </p:sp>
@@ -2891,7 +2672,7 @@
           <a:p>
             <a:pPr lvl="0"/>
             <a:r>
-              <a:rPr lang="en-US" smtClean="0"/>
+              <a:rPr lang="en-US"/>
               <a:t>Click to edit Master text styles</a:t>
             </a:r>
           </a:p>
@@ -2947,38 +2728,37 @@
           <a:p>
             <a:pPr lvl="0"/>
             <a:r>
-              <a:rPr lang="en-US" smtClean="0"/>
+              <a:rPr lang="en-US"/>
               <a:t>Click to edit Master text styles</a:t>
             </a:r>
           </a:p>
           <a:p>
             <a:pPr lvl="1"/>
             <a:r>
-              <a:rPr lang="en-US" smtClean="0"/>
+              <a:rPr lang="en-US"/>
               <a:t>Second level</a:t>
             </a:r>
           </a:p>
           <a:p>
             <a:pPr lvl="2"/>
             <a:r>
-              <a:rPr lang="en-US" smtClean="0"/>
+              <a:rPr lang="en-US"/>
               <a:t>Third level</a:t>
             </a:r>
           </a:p>
           <a:p>
             <a:pPr lvl="3"/>
             <a:r>
-              <a:rPr lang="en-US" smtClean="0"/>
+              <a:rPr lang="en-US"/>
               <a:t>Fourth level</a:t>
             </a:r>
           </a:p>
           <a:p>
             <a:pPr lvl="4"/>
             <a:r>
-              <a:rPr lang="en-US" smtClean="0"/>
+              <a:rPr lang="en-US"/>
               <a:t>Fifth level</a:t>
             </a:r>
-            <a:endParaRPr lang="en-US"/>
           </a:p>
         </p:txBody>
       </p:sp>
@@ -3041,7 +2821,7 @@
           <a:p>
             <a:pPr lvl="0"/>
             <a:r>
-              <a:rPr lang="en-US" smtClean="0"/>
+              <a:rPr lang="en-US"/>
               <a:t>Click to edit Master text styles</a:t>
             </a:r>
           </a:p>
@@ -3097,38 +2877,37 @@
           <a:p>
             <a:pPr lvl="0"/>
             <a:r>
-              <a:rPr lang="en-US" smtClean="0"/>
+              <a:rPr lang="en-US"/>
               <a:t>Click to edit Master text styles</a:t>
             </a:r>
           </a:p>
           <a:p>
             <a:pPr lvl="1"/>
             <a:r>
-              <a:rPr lang="en-US" smtClean="0"/>
+              <a:rPr lang="en-US"/>
               <a:t>Second level</a:t>
             </a:r>
           </a:p>
           <a:p>
             <a:pPr lvl="2"/>
             <a:r>
-              <a:rPr lang="en-US" smtClean="0"/>
+              <a:rPr lang="en-US"/>
               <a:t>Third level</a:t>
             </a:r>
           </a:p>
           <a:p>
             <a:pPr lvl="3"/>
             <a:r>
-              <a:rPr lang="en-US" smtClean="0"/>
+              <a:rPr lang="en-US"/>
               <a:t>Fourth level</a:t>
             </a:r>
           </a:p>
           <a:p>
             <a:pPr lvl="4"/>
             <a:r>
-              <a:rPr lang="en-US" smtClean="0"/>
+              <a:rPr lang="en-US"/>
               <a:t>Fifth level</a:t>
             </a:r>
-            <a:endParaRPr lang="en-US"/>
           </a:p>
         </p:txBody>
       </p:sp>
@@ -3149,7 +2928,7 @@
           <a:p>
             <a:fld id="{5BCAD085-E8A6-8845-BD4E-CB4CCA059FC4}" type="datetimeFigureOut">
               <a:rPr lang="en-US" smtClean="0"/>
-              <a:t>1/27/13</a:t>
+              <a:t>4/23/26</a:t>
             </a:fld>
             <a:endParaRPr lang="en-US"/>
           </a:p>
@@ -3243,10 +3022,9 @@
           <a:lstStyle/>
           <a:p>
             <a:r>
-              <a:rPr lang="en-US" smtClean="0"/>
+              <a:rPr lang="en-US"/>
               <a:t>Click to edit Master title style</a:t>
             </a:r>
-            <a:endParaRPr lang="en-US"/>
           </a:p>
         </p:txBody>
       </p:sp>
@@ -3267,7 +3045,7 @@
           <a:p>
             <a:fld id="{5BCAD085-E8A6-8845-BD4E-CB4CCA059FC4}" type="datetimeFigureOut">
               <a:rPr lang="en-US" smtClean="0"/>
-              <a:t>1/27/13</a:t>
+              <a:t>4/23/26</a:t>
             </a:fld>
             <a:endParaRPr lang="en-US"/>
           </a:p>
@@ -3362,7 +3140,7 @@
           <a:p>
             <a:fld id="{5BCAD085-E8A6-8845-BD4E-CB4CCA059FC4}" type="datetimeFigureOut">
               <a:rPr lang="en-US" smtClean="0"/>
-              <a:t>1/27/13</a:t>
+              <a:t>4/23/26</a:t>
             </a:fld>
             <a:endParaRPr lang="en-US"/>
           </a:p>
@@ -3465,10 +3243,9 @@
           </a:lstStyle>
           <a:p>
             <a:r>
-              <a:rPr lang="en-US" smtClean="0"/>
+              <a:rPr lang="en-US"/>
               <a:t>Click to edit Master title style</a:t>
             </a:r>
-            <a:endParaRPr lang="en-US"/>
           </a:p>
         </p:txBody>
       </p:sp>
@@ -3522,38 +3299,37 @@
           <a:p>
             <a:pPr lvl="0"/>
             <a:r>
-              <a:rPr lang="en-US" smtClean="0"/>
+              <a:rPr lang="en-US"/>
               <a:t>Click to edit Master text styles</a:t>
             </a:r>
           </a:p>
           <a:p>
             <a:pPr lvl="1"/>
             <a:r>
-              <a:rPr lang="en-US" smtClean="0"/>
+              <a:rPr lang="en-US"/>
               <a:t>Second level</a:t>
             </a:r>
           </a:p>
           <a:p>
             <a:pPr lvl="2"/>
             <a:r>
-              <a:rPr lang="en-US" smtClean="0"/>
+              <a:rPr lang="en-US"/>
               <a:t>Third level</a:t>
             </a:r>
           </a:p>
           <a:p>
             <a:pPr lvl="3"/>
             <a:r>
-              <a:rPr lang="en-US" smtClean="0"/>
+              <a:rPr lang="en-US"/>
               <a:t>Fourth level</a:t>
             </a:r>
           </a:p>
           <a:p>
             <a:pPr lvl="4"/>
             <a:r>
-              <a:rPr lang="en-US" smtClean="0"/>
+              <a:rPr lang="en-US"/>
               <a:t>Fifth level</a:t>
             </a:r>
-            <a:endParaRPr lang="en-US"/>
           </a:p>
         </p:txBody>
       </p:sp>
@@ -3616,7 +3392,7 @@
           <a:p>
             <a:pPr lvl="0"/>
             <a:r>
-              <a:rPr lang="en-US" smtClean="0"/>
+              <a:rPr lang="en-US"/>
               <a:t>Click to edit Master text styles</a:t>
             </a:r>
           </a:p>
@@ -3639,7 +3415,7 @@
           <a:p>
             <a:fld id="{5BCAD085-E8A6-8845-BD4E-CB4CCA059FC4}" type="datetimeFigureOut">
               <a:rPr lang="en-US" smtClean="0"/>
-              <a:t>1/27/13</a:t>
+              <a:t>4/23/26</a:t>
             </a:fld>
             <a:endParaRPr lang="en-US"/>
           </a:p>
@@ -3742,10 +3518,9 @@
           </a:lstStyle>
           <a:p>
             <a:r>
-              <a:rPr lang="en-US" smtClean="0"/>
+              <a:rPr lang="en-US"/>
               <a:t>Click to edit Master title style</a:t>
             </a:r>
-            <a:endParaRPr lang="en-US"/>
           </a:p>
         </p:txBody>
       </p:sp>
@@ -3869,7 +3644,7 @@
           <a:p>
             <a:pPr lvl="0"/>
             <a:r>
-              <a:rPr lang="en-US" smtClean="0"/>
+              <a:rPr lang="en-US"/>
               <a:t>Click to edit Master text styles</a:t>
             </a:r>
           </a:p>
@@ -3892,7 +3667,7 @@
           <a:p>
             <a:fld id="{5BCAD085-E8A6-8845-BD4E-CB4CCA059FC4}" type="datetimeFigureOut">
               <a:rPr lang="en-US" smtClean="0"/>
-              <a:t>1/27/13</a:t>
+              <a:t>4/23/26</a:t>
             </a:fld>
             <a:endParaRPr lang="en-US"/>
           </a:p>
@@ -4001,10 +3776,9 @@
           <a:lstStyle/>
           <a:p>
             <a:r>
-              <a:rPr lang="en-US" smtClean="0"/>
+              <a:rPr lang="en-US"/>
               <a:t>Click to edit Master title style</a:t>
             </a:r>
-            <a:endParaRPr lang="en-US"/>
           </a:p>
         </p:txBody>
       </p:sp>
@@ -4035,38 +3809,37 @@
           <a:p>
             <a:pPr lvl="0"/>
             <a:r>
-              <a:rPr lang="en-US" smtClean="0"/>
+              <a:rPr lang="en-US"/>
               <a:t>Click to edit Master text styles</a:t>
             </a:r>
           </a:p>
           <a:p>
             <a:pPr lvl="1"/>
             <a:r>
-              <a:rPr lang="en-US" smtClean="0"/>
+              <a:rPr lang="en-US"/>
               <a:t>Second level</a:t>
             </a:r>
           </a:p>
           <a:p>
             <a:pPr lvl="2"/>
             <a:r>
-              <a:rPr lang="en-US" smtClean="0"/>
+              <a:rPr lang="en-US"/>
               <a:t>Third level</a:t>
             </a:r>
           </a:p>
           <a:p>
             <a:pPr lvl="3"/>
             <a:r>
-              <a:rPr lang="en-US" smtClean="0"/>
+              <a:rPr lang="en-US"/>
               <a:t>Fourth level</a:t>
             </a:r>
           </a:p>
           <a:p>
             <a:pPr lvl="4"/>
             <a:r>
-              <a:rPr lang="en-US" smtClean="0"/>
+              <a:rPr lang="en-US"/>
               <a:t>Fifth level</a:t>
             </a:r>
-            <a:endParaRPr lang="en-US"/>
           </a:p>
         </p:txBody>
       </p:sp>
@@ -4105,7 +3878,7 @@
           <a:p>
             <a:fld id="{5BCAD085-E8A6-8845-BD4E-CB4CCA059FC4}" type="datetimeFigureOut">
               <a:rPr lang="en-US" smtClean="0"/>
-              <a:t>1/27/13</a:t>
+              <a:t>4/23/26</a:t>
             </a:fld>
             <a:endParaRPr lang="en-US"/>
           </a:p>
@@ -4464,7 +4237,7 @@
 </file>
 
 <file path=ppt/slides/slide1.xml><?xml version="1.0" encoding="utf-8"?>
-<p:sld xmlns:a="http://schemas.openxmlformats.org/drawingml/2006/main" xmlns:p="http://schemas.openxmlformats.org/presentationml/2006/main" xmlns:r="http://schemas.openxmlformats.org/officeDocument/2006/relationships">
+<p:sld xmlns:a="http://schemas.openxmlformats.org/drawingml/2006/main" xmlns:r="http://schemas.openxmlformats.org/officeDocument/2006/relationships" xmlns:p="http://schemas.openxmlformats.org/presentationml/2006/main">
   <p:cSld>
     <p:spTree>
       <p:nvGrpSpPr>
@@ -4472,7 +4245,14 @@
         <p:cNvGrpSpPr/>
         <p:nvPr/>
       </p:nvGrpSpPr>
-      <p:grpSpPr/>
+      <p:grpSpPr>
+        <a:xfrm>
+          <a:off x="0" y="0"/>
+          <a:ext cx="0" cy="0"/>
+          <a:chOff x="0" y="0"/>
+          <a:chExt cx="0" cy="0"/>
+        </a:xfrm>
+      </p:grpSpPr>
       <p:sp>
         <p:nvSpPr>
           <p:cNvPr id="2" name="Rectangle 1"/>
@@ -4514,6 +4294,7 @@
           <a:lstStyle/>
           <a:p>
             <a:pPr algn="ctr"/>
+            <a:endParaRPr/>
           </a:p>
         </p:txBody>
       </p:sp>
@@ -4558,6 +4339,7 @@
           <a:lstStyle/>
           <a:p>
             <a:pPr algn="ctr"/>
+            <a:endParaRPr/>
           </a:p>
         </p:txBody>
       </p:sp>
@@ -4578,7 +4360,7 @@
           <a:noFill/>
         </p:spPr>
         <p:txBody>
-          <a:bodyPr wrap="square" lIns="0" rIns="0" tIns="0" bIns="0" anchor="t">
+          <a:bodyPr wrap="square" lIns="0" tIns="0" rIns="0" bIns="0" anchor="t">
             <a:spAutoFit/>
           </a:bodyPr>
           <a:lstStyle/>
@@ -4617,7 +4399,7 @@
           <a:noFill/>
         </p:spPr>
         <p:txBody>
-          <a:bodyPr wrap="square" lIns="0" rIns="0" tIns="0" bIns="0" anchor="t">
+          <a:bodyPr wrap="square" lIns="0" tIns="0" rIns="0" bIns="0" anchor="t">
             <a:spAutoFit/>
           </a:bodyPr>
           <a:lstStyle/>
@@ -4665,7 +4447,7 @@
           <a:noFill/>
         </p:spPr>
         <p:txBody>
-          <a:bodyPr wrap="square" lIns="0" rIns="0" tIns="0" bIns="0" anchor="t">
+          <a:bodyPr wrap="square" lIns="0" tIns="0" rIns="0" bIns="0" anchor="t">
             <a:spAutoFit/>
           </a:bodyPr>
           <a:lstStyle/>
@@ -4704,7 +4486,7 @@
           <a:noFill/>
         </p:spPr>
         <p:txBody>
-          <a:bodyPr wrap="square" lIns="0" rIns="0" tIns="0" bIns="0" anchor="t">
+          <a:bodyPr wrap="square" lIns="0" tIns="0" rIns="0" bIns="0" anchor="t">
             <a:spAutoFit/>
           </a:bodyPr>
           <a:lstStyle/>
@@ -4751,7 +4533,7 @@
 </file>
 
 <file path=ppt/slides/slide10.xml><?xml version="1.0" encoding="utf-8"?>
-<p:sld xmlns:a="http://schemas.openxmlformats.org/drawingml/2006/main" xmlns:p="http://schemas.openxmlformats.org/presentationml/2006/main" xmlns:r="http://schemas.openxmlformats.org/officeDocument/2006/relationships">
+<p:sld xmlns:a="http://schemas.openxmlformats.org/drawingml/2006/main" xmlns:r="http://schemas.openxmlformats.org/officeDocument/2006/relationships" xmlns:p="http://schemas.openxmlformats.org/presentationml/2006/main">
   <p:cSld>
     <p:spTree>
       <p:nvGrpSpPr>
@@ -4759,7 +4541,14 @@
         <p:cNvGrpSpPr/>
         <p:nvPr/>
       </p:nvGrpSpPr>
-      <p:grpSpPr/>
+      <p:grpSpPr>
+        <a:xfrm>
+          <a:off x="0" y="0"/>
+          <a:ext cx="0" cy="0"/>
+          <a:chOff x="0" y="0"/>
+          <a:chExt cx="0" cy="0"/>
+        </a:xfrm>
+      </p:grpSpPr>
       <p:sp>
         <p:nvSpPr>
           <p:cNvPr id="2" name="Rectangle 1"/>
@@ -4801,6 +4590,7 @@
           <a:lstStyle/>
           <a:p>
             <a:pPr algn="ctr"/>
+            <a:endParaRPr/>
           </a:p>
         </p:txBody>
       </p:sp>
@@ -4821,7 +4611,7 @@
           <a:noFill/>
         </p:spPr>
         <p:txBody>
-          <a:bodyPr wrap="square" lIns="0" rIns="0" tIns="0" bIns="0" anchor="t">
+          <a:bodyPr wrap="square" lIns="0" tIns="0" rIns="0" bIns="0" anchor="t">
             <a:spAutoFit/>
           </a:bodyPr>
           <a:lstStyle/>
@@ -4860,7 +4650,7 @@
           <a:noFill/>
         </p:spPr>
         <p:txBody>
-          <a:bodyPr wrap="square" lIns="0" rIns="0" tIns="0" bIns="0" anchor="t">
+          <a:bodyPr wrap="square" lIns="0" tIns="0" rIns="0" bIns="0" anchor="t">
             <a:spAutoFit/>
           </a:bodyPr>
           <a:lstStyle/>
@@ -4927,6 +4717,7 @@
           <a:lstStyle/>
           <a:p>
             <a:pPr algn="ctr"/>
+            <a:endParaRPr/>
           </a:p>
         </p:txBody>
       </p:sp>
@@ -4971,6 +4762,7 @@
           <a:lstStyle/>
           <a:p>
             <a:pPr algn="ctr"/>
+            <a:endParaRPr/>
           </a:p>
         </p:txBody>
       </p:sp>
@@ -4991,7 +4783,7 @@
           <a:noFill/>
         </p:spPr>
         <p:txBody>
-          <a:bodyPr wrap="square" lIns="0" rIns="0" tIns="0" bIns="0" anchor="t">
+          <a:bodyPr wrap="square" lIns="0" tIns="0" rIns="0" bIns="0" anchor="t">
             <a:spAutoFit/>
           </a:bodyPr>
           <a:lstStyle/>
@@ -5030,7 +4822,7 @@
           <a:noFill/>
         </p:spPr>
         <p:txBody>
-          <a:bodyPr wrap="square" lIns="0" rIns="0" tIns="0" bIns="0" anchor="t">
+          <a:bodyPr wrap="square" lIns="0" tIns="0" rIns="0" bIns="0" anchor="t">
             <a:spAutoFit/>
           </a:bodyPr>
           <a:lstStyle/>
@@ -5097,6 +4889,7 @@
           <a:lstStyle/>
           <a:p>
             <a:pPr algn="ctr"/>
+            <a:endParaRPr/>
           </a:p>
         </p:txBody>
       </p:sp>
@@ -5141,6 +4934,7 @@
           <a:lstStyle/>
           <a:p>
             <a:pPr algn="ctr"/>
+            <a:endParaRPr/>
           </a:p>
         </p:txBody>
       </p:sp>
@@ -5161,7 +4955,7 @@
           <a:noFill/>
         </p:spPr>
         <p:txBody>
-          <a:bodyPr wrap="square" lIns="0" rIns="0" tIns="0" bIns="0" anchor="t">
+          <a:bodyPr wrap="square" lIns="0" tIns="0" rIns="0" bIns="0" anchor="t">
             <a:spAutoFit/>
           </a:bodyPr>
           <a:lstStyle/>
@@ -5200,7 +4994,7 @@
           <a:noFill/>
         </p:spPr>
         <p:txBody>
-          <a:bodyPr wrap="square" lIns="0" rIns="0" tIns="0" bIns="0" anchor="t">
+          <a:bodyPr wrap="square" lIns="0" tIns="0" rIns="0" bIns="0" anchor="t">
             <a:spAutoFit/>
           </a:bodyPr>
           <a:lstStyle/>
@@ -5267,6 +5061,7 @@
           <a:lstStyle/>
           <a:p>
             <a:pPr algn="ctr"/>
+            <a:endParaRPr/>
           </a:p>
         </p:txBody>
       </p:sp>
@@ -5311,6 +5106,7 @@
           <a:lstStyle/>
           <a:p>
             <a:pPr algn="ctr"/>
+            <a:endParaRPr/>
           </a:p>
         </p:txBody>
       </p:sp>
@@ -5331,7 +5127,7 @@
           <a:noFill/>
         </p:spPr>
         <p:txBody>
-          <a:bodyPr wrap="square" lIns="0" rIns="0" tIns="0" bIns="0" anchor="t">
+          <a:bodyPr wrap="square" lIns="0" tIns="0" rIns="0" bIns="0" anchor="t">
             <a:spAutoFit/>
           </a:bodyPr>
           <a:lstStyle/>
@@ -5370,7 +5166,7 @@
           <a:noFill/>
         </p:spPr>
         <p:txBody>
-          <a:bodyPr wrap="square" lIns="0" rIns="0" tIns="0" bIns="0" anchor="t">
+          <a:bodyPr wrap="square" lIns="0" tIns="0" rIns="0" bIns="0" anchor="t">
             <a:spAutoFit/>
           </a:bodyPr>
           <a:lstStyle/>
@@ -5437,6 +5233,7 @@
           <a:lstStyle/>
           <a:p>
             <a:pPr algn="ctr"/>
+            <a:endParaRPr/>
           </a:p>
         </p:txBody>
       </p:sp>
@@ -5481,6 +5278,7 @@
           <a:lstStyle/>
           <a:p>
             <a:pPr algn="ctr"/>
+            <a:endParaRPr/>
           </a:p>
         </p:txBody>
       </p:sp>
@@ -5501,7 +5299,7 @@
           <a:noFill/>
         </p:spPr>
         <p:txBody>
-          <a:bodyPr wrap="square" lIns="0" rIns="0" tIns="0" bIns="0" anchor="t">
+          <a:bodyPr wrap="square" lIns="0" tIns="0" rIns="0" bIns="0" anchor="t">
             <a:spAutoFit/>
           </a:bodyPr>
           <a:lstStyle/>
@@ -5540,7 +5338,7 @@
           <a:noFill/>
         </p:spPr>
         <p:txBody>
-          <a:bodyPr wrap="square" lIns="0" rIns="0" tIns="0" bIns="0" anchor="t">
+          <a:bodyPr wrap="square" lIns="0" tIns="0" rIns="0" bIns="0" anchor="t">
             <a:spAutoFit/>
           </a:bodyPr>
           <a:lstStyle/>
@@ -5607,6 +5405,7 @@
           <a:lstStyle/>
           <a:p>
             <a:pPr algn="ctr"/>
+            <a:endParaRPr/>
           </a:p>
         </p:txBody>
       </p:sp>
@@ -5651,6 +5450,7 @@
           <a:lstStyle/>
           <a:p>
             <a:pPr algn="ctr"/>
+            <a:endParaRPr/>
           </a:p>
         </p:txBody>
       </p:sp>
@@ -5671,7 +5471,7 @@
           <a:noFill/>
         </p:spPr>
         <p:txBody>
-          <a:bodyPr wrap="square" lIns="0" rIns="0" tIns="0" bIns="0" anchor="t">
+          <a:bodyPr wrap="square" lIns="0" tIns="0" rIns="0" bIns="0" anchor="t">
             <a:spAutoFit/>
           </a:bodyPr>
           <a:lstStyle/>
@@ -5710,7 +5510,7 @@
           <a:noFill/>
         </p:spPr>
         <p:txBody>
-          <a:bodyPr wrap="square" lIns="0" rIns="0" tIns="0" bIns="0" anchor="t">
+          <a:bodyPr wrap="square" lIns="0" tIns="0" rIns="0" bIns="0" anchor="t">
             <a:spAutoFit/>
           </a:bodyPr>
           <a:lstStyle/>
@@ -5777,6 +5577,7 @@
           <a:lstStyle/>
           <a:p>
             <a:pPr algn="ctr"/>
+            <a:endParaRPr/>
           </a:p>
         </p:txBody>
       </p:sp>
@@ -5821,6 +5622,7 @@
           <a:lstStyle/>
           <a:p>
             <a:pPr algn="ctr"/>
+            <a:endParaRPr/>
           </a:p>
         </p:txBody>
       </p:sp>
@@ -5841,7 +5643,7 @@
           <a:noFill/>
         </p:spPr>
         <p:txBody>
-          <a:bodyPr wrap="square" lIns="0" rIns="0" tIns="0" bIns="0" anchor="t">
+          <a:bodyPr wrap="square" lIns="0" tIns="0" rIns="0" bIns="0" anchor="t">
             <a:spAutoFit/>
           </a:bodyPr>
           <a:lstStyle/>
@@ -5880,7 +5682,7 @@
           <a:noFill/>
         </p:spPr>
         <p:txBody>
-          <a:bodyPr wrap="square" lIns="0" rIns="0" tIns="0" bIns="0" anchor="t">
+          <a:bodyPr wrap="square" lIns="0" tIns="0" rIns="0" bIns="0" anchor="t">
             <a:spAutoFit/>
           </a:bodyPr>
           <a:lstStyle/>
@@ -5911,7 +5713,7 @@
 </file>
 
 <file path=ppt/slides/slide11.xml><?xml version="1.0" encoding="utf-8"?>
-<p:sld xmlns:a="http://schemas.openxmlformats.org/drawingml/2006/main" xmlns:p="http://schemas.openxmlformats.org/presentationml/2006/main" xmlns:r="http://schemas.openxmlformats.org/officeDocument/2006/relationships">
+<p:sld xmlns:a="http://schemas.openxmlformats.org/drawingml/2006/main" xmlns:r="http://schemas.openxmlformats.org/officeDocument/2006/relationships" xmlns:p="http://schemas.openxmlformats.org/presentationml/2006/main">
   <p:cSld>
     <p:spTree>
       <p:nvGrpSpPr>
@@ -5919,7 +5721,14 @@
         <p:cNvGrpSpPr/>
         <p:nvPr/>
       </p:nvGrpSpPr>
-      <p:grpSpPr/>
+      <p:grpSpPr>
+        <a:xfrm>
+          <a:off x="0" y="0"/>
+          <a:ext cx="0" cy="0"/>
+          <a:chOff x="0" y="0"/>
+          <a:chExt cx="0" cy="0"/>
+        </a:xfrm>
+      </p:grpSpPr>
       <p:sp>
         <p:nvSpPr>
           <p:cNvPr id="2" name="Rectangle 1"/>
@@ -5961,6 +5770,7 @@
           <a:lstStyle/>
           <a:p>
             <a:pPr algn="ctr"/>
+            <a:endParaRPr/>
           </a:p>
         </p:txBody>
       </p:sp>
@@ -5981,7 +5791,7 @@
           <a:noFill/>
         </p:spPr>
         <p:txBody>
-          <a:bodyPr wrap="square" lIns="0" rIns="0" tIns="0" bIns="0" anchor="t">
+          <a:bodyPr wrap="square" lIns="0" tIns="0" rIns="0" bIns="0" anchor="t">
             <a:spAutoFit/>
           </a:bodyPr>
           <a:lstStyle/>
@@ -6020,7 +5830,7 @@
           <a:noFill/>
         </p:spPr>
         <p:txBody>
-          <a:bodyPr wrap="square" lIns="0" rIns="0" tIns="0" bIns="0" anchor="t">
+          <a:bodyPr wrap="square" lIns="0" tIns="0" rIns="0" bIns="0" anchor="t">
             <a:spAutoFit/>
           </a:bodyPr>
           <a:lstStyle/>
@@ -6083,6 +5893,7 @@
           <a:lstStyle/>
           <a:p>
             <a:pPr algn="ctr"/>
+            <a:endParaRPr/>
           </a:p>
         </p:txBody>
       </p:sp>
@@ -6129,6 +5940,7 @@
           <a:lstStyle/>
           <a:p>
             <a:pPr algn="ctr"/>
+            <a:endParaRPr/>
           </a:p>
         </p:txBody>
       </p:sp>
@@ -6149,7 +5961,7 @@
           <a:noFill/>
         </p:spPr>
         <p:txBody>
-          <a:bodyPr wrap="square" lIns="0" rIns="0" tIns="0" bIns="0" anchor="t">
+          <a:bodyPr wrap="square" lIns="0" tIns="0" rIns="0" bIns="0" anchor="t">
             <a:spAutoFit/>
           </a:bodyPr>
           <a:lstStyle/>
@@ -6188,7 +6000,7 @@
           <a:noFill/>
         </p:spPr>
         <p:txBody>
-          <a:bodyPr wrap="square" lIns="0" rIns="0" tIns="0" bIns="0" anchor="t">
+          <a:bodyPr wrap="square" lIns="0" tIns="0" rIns="0" bIns="0" anchor="t">
             <a:spAutoFit/>
           </a:bodyPr>
           <a:lstStyle/>
@@ -6227,7 +6039,7 @@
           <a:noFill/>
         </p:spPr>
         <p:txBody>
-          <a:bodyPr wrap="square" lIns="0" rIns="0" tIns="0" bIns="0" anchor="t">
+          <a:bodyPr wrap="square" lIns="0" tIns="0" rIns="0" bIns="0" anchor="t">
             <a:spAutoFit/>
           </a:bodyPr>
           <a:lstStyle/>
@@ -6266,7 +6078,7 @@
           <a:noFill/>
         </p:spPr>
         <p:txBody>
-          <a:bodyPr wrap="square" lIns="0" rIns="0" tIns="0" bIns="0" anchor="t">
+          <a:bodyPr wrap="square" lIns="0" tIns="0" rIns="0" bIns="0" anchor="t">
             <a:spAutoFit/>
           </a:bodyPr>
           <a:lstStyle/>
@@ -6305,7 +6117,7 @@
           <a:noFill/>
         </p:spPr>
         <p:txBody>
-          <a:bodyPr wrap="square" lIns="0" rIns="0" tIns="0" bIns="0" anchor="t">
+          <a:bodyPr wrap="square" lIns="0" tIns="0" rIns="0" bIns="0" anchor="t">
             <a:spAutoFit/>
           </a:bodyPr>
           <a:lstStyle/>
@@ -6344,7 +6156,7 @@
           <a:noFill/>
         </p:spPr>
         <p:txBody>
-          <a:bodyPr wrap="square" lIns="0" rIns="0" tIns="0" bIns="0" anchor="t">
+          <a:bodyPr wrap="square" lIns="0" tIns="0" rIns="0" bIns="0" anchor="t">
             <a:spAutoFit/>
           </a:bodyPr>
           <a:lstStyle/>
@@ -6383,7 +6195,7 @@
           <a:noFill/>
         </p:spPr>
         <p:txBody>
-          <a:bodyPr wrap="square" lIns="0" rIns="0" tIns="0" bIns="0" anchor="t">
+          <a:bodyPr wrap="square" lIns="0" tIns="0" rIns="0" bIns="0" anchor="t">
             <a:spAutoFit/>
           </a:bodyPr>
           <a:lstStyle/>
@@ -6422,7 +6234,7 @@
           <a:noFill/>
         </p:spPr>
         <p:txBody>
-          <a:bodyPr wrap="square" lIns="0" rIns="0" tIns="0" bIns="0" anchor="t">
+          <a:bodyPr wrap="square" lIns="0" tIns="0" rIns="0" bIns="0" anchor="t">
             <a:spAutoFit/>
           </a:bodyPr>
           <a:lstStyle/>
@@ -6461,7 +6273,7 @@
           <a:noFill/>
         </p:spPr>
         <p:txBody>
-          <a:bodyPr wrap="square" lIns="0" rIns="0" tIns="0" bIns="0" anchor="t">
+          <a:bodyPr wrap="square" lIns="0" tIns="0" rIns="0" bIns="0" anchor="t">
             <a:spAutoFit/>
           </a:bodyPr>
           <a:lstStyle/>
@@ -6524,6 +6336,7 @@
           <a:lstStyle/>
           <a:p>
             <a:pPr algn="ctr"/>
+            <a:endParaRPr/>
           </a:p>
         </p:txBody>
       </p:sp>
@@ -6570,6 +6383,7 @@
           <a:lstStyle/>
           <a:p>
             <a:pPr algn="ctr"/>
+            <a:endParaRPr/>
           </a:p>
         </p:txBody>
       </p:sp>
@@ -6590,7 +6404,7 @@
           <a:noFill/>
         </p:spPr>
         <p:txBody>
-          <a:bodyPr wrap="square" lIns="0" rIns="0" tIns="0" bIns="0" anchor="t">
+          <a:bodyPr wrap="square" lIns="0" tIns="0" rIns="0" bIns="0" anchor="t">
             <a:spAutoFit/>
           </a:bodyPr>
           <a:lstStyle/>
@@ -6629,7 +6443,7 @@
           <a:noFill/>
         </p:spPr>
         <p:txBody>
-          <a:bodyPr wrap="square" lIns="0" rIns="0" tIns="0" bIns="0" anchor="t">
+          <a:bodyPr wrap="square" lIns="0" tIns="0" rIns="0" bIns="0" anchor="t">
             <a:spAutoFit/>
           </a:bodyPr>
           <a:lstStyle/>
@@ -6668,7 +6482,7 @@
           <a:noFill/>
         </p:spPr>
         <p:txBody>
-          <a:bodyPr wrap="square" lIns="0" rIns="0" tIns="0" bIns="0" anchor="t">
+          <a:bodyPr wrap="square" lIns="0" tIns="0" rIns="0" bIns="0" anchor="t">
             <a:spAutoFit/>
           </a:bodyPr>
           <a:lstStyle/>
@@ -6707,7 +6521,7 @@
           <a:noFill/>
         </p:spPr>
         <p:txBody>
-          <a:bodyPr wrap="square" lIns="0" rIns="0" tIns="0" bIns="0" anchor="t">
+          <a:bodyPr wrap="square" lIns="0" tIns="0" rIns="0" bIns="0" anchor="t">
             <a:spAutoFit/>
           </a:bodyPr>
           <a:lstStyle/>
@@ -6746,7 +6560,7 @@
           <a:noFill/>
         </p:spPr>
         <p:txBody>
-          <a:bodyPr wrap="square" lIns="0" rIns="0" tIns="0" bIns="0" anchor="t">
+          <a:bodyPr wrap="square" lIns="0" tIns="0" rIns="0" bIns="0" anchor="t">
             <a:spAutoFit/>
           </a:bodyPr>
           <a:lstStyle/>
@@ -6785,7 +6599,7 @@
           <a:noFill/>
         </p:spPr>
         <p:txBody>
-          <a:bodyPr wrap="square" lIns="0" rIns="0" tIns="0" bIns="0" anchor="t">
+          <a:bodyPr wrap="square" lIns="0" tIns="0" rIns="0" bIns="0" anchor="t">
             <a:spAutoFit/>
           </a:bodyPr>
           <a:lstStyle/>
@@ -6824,7 +6638,7 @@
           <a:noFill/>
         </p:spPr>
         <p:txBody>
-          <a:bodyPr wrap="square" lIns="0" rIns="0" tIns="0" bIns="0" anchor="t">
+          <a:bodyPr wrap="square" lIns="0" tIns="0" rIns="0" bIns="0" anchor="t">
             <a:spAutoFit/>
           </a:bodyPr>
           <a:lstStyle/>
@@ -6863,7 +6677,7 @@
           <a:noFill/>
         </p:spPr>
         <p:txBody>
-          <a:bodyPr wrap="square" lIns="0" rIns="0" tIns="0" bIns="0" anchor="t">
+          <a:bodyPr wrap="square" lIns="0" tIns="0" rIns="0" bIns="0" anchor="t">
             <a:spAutoFit/>
           </a:bodyPr>
           <a:lstStyle/>
@@ -6902,7 +6716,7 @@
           <a:noFill/>
         </p:spPr>
         <p:txBody>
-          <a:bodyPr wrap="square" lIns="0" rIns="0" tIns="0" bIns="0" anchor="t">
+          <a:bodyPr wrap="square" lIns="0" tIns="0" rIns="0" bIns="0" anchor="t">
             <a:spAutoFit/>
           </a:bodyPr>
           <a:lstStyle/>
@@ -6965,6 +6779,7 @@
           <a:lstStyle/>
           <a:p>
             <a:pPr algn="ctr"/>
+            <a:endParaRPr/>
           </a:p>
         </p:txBody>
       </p:sp>
@@ -7011,6 +6826,7 @@
           <a:lstStyle/>
           <a:p>
             <a:pPr algn="ctr"/>
+            <a:endParaRPr/>
           </a:p>
         </p:txBody>
       </p:sp>
@@ -7031,7 +6847,7 @@
           <a:noFill/>
         </p:spPr>
         <p:txBody>
-          <a:bodyPr wrap="square" lIns="0" rIns="0" tIns="0" bIns="0" anchor="t">
+          <a:bodyPr wrap="square" lIns="0" tIns="0" rIns="0" bIns="0" anchor="t">
             <a:spAutoFit/>
           </a:bodyPr>
           <a:lstStyle/>
@@ -7070,7 +6886,7 @@
           <a:noFill/>
         </p:spPr>
         <p:txBody>
-          <a:bodyPr wrap="square" lIns="0" rIns="0" tIns="0" bIns="0" anchor="t">
+          <a:bodyPr wrap="square" lIns="0" tIns="0" rIns="0" bIns="0" anchor="t">
             <a:spAutoFit/>
           </a:bodyPr>
           <a:lstStyle/>
@@ -7109,7 +6925,7 @@
           <a:noFill/>
         </p:spPr>
         <p:txBody>
-          <a:bodyPr wrap="square" lIns="0" rIns="0" tIns="0" bIns="0" anchor="t">
+          <a:bodyPr wrap="square" lIns="0" tIns="0" rIns="0" bIns="0" anchor="t">
             <a:spAutoFit/>
           </a:bodyPr>
           <a:lstStyle/>
@@ -7148,7 +6964,7 @@
           <a:noFill/>
         </p:spPr>
         <p:txBody>
-          <a:bodyPr wrap="square" lIns="0" rIns="0" tIns="0" bIns="0" anchor="t">
+          <a:bodyPr wrap="square" lIns="0" tIns="0" rIns="0" bIns="0" anchor="t">
             <a:spAutoFit/>
           </a:bodyPr>
           <a:lstStyle/>
@@ -7187,7 +7003,7 @@
           <a:noFill/>
         </p:spPr>
         <p:txBody>
-          <a:bodyPr wrap="square" lIns="0" rIns="0" tIns="0" bIns="0" anchor="t">
+          <a:bodyPr wrap="square" lIns="0" tIns="0" rIns="0" bIns="0" anchor="t">
             <a:spAutoFit/>
           </a:bodyPr>
           <a:lstStyle/>
@@ -7226,7 +7042,7 @@
           <a:noFill/>
         </p:spPr>
         <p:txBody>
-          <a:bodyPr wrap="square" lIns="0" rIns="0" tIns="0" bIns="0" anchor="t">
+          <a:bodyPr wrap="square" lIns="0" tIns="0" rIns="0" bIns="0" anchor="t">
             <a:spAutoFit/>
           </a:bodyPr>
           <a:lstStyle/>
@@ -7265,7 +7081,7 @@
           <a:noFill/>
         </p:spPr>
         <p:txBody>
-          <a:bodyPr wrap="square" lIns="0" rIns="0" tIns="0" bIns="0" anchor="t">
+          <a:bodyPr wrap="square" lIns="0" tIns="0" rIns="0" bIns="0" anchor="t">
             <a:spAutoFit/>
           </a:bodyPr>
           <a:lstStyle/>
@@ -7304,7 +7120,7 @@
           <a:noFill/>
         </p:spPr>
         <p:txBody>
-          <a:bodyPr wrap="square" lIns="0" rIns="0" tIns="0" bIns="0" anchor="t">
+          <a:bodyPr wrap="square" lIns="0" tIns="0" rIns="0" bIns="0" anchor="t">
             <a:spAutoFit/>
           </a:bodyPr>
           <a:lstStyle/>
@@ -7343,7 +7159,7 @@
           <a:noFill/>
         </p:spPr>
         <p:txBody>
-          <a:bodyPr wrap="square" lIns="0" rIns="0" tIns="0" bIns="0" anchor="t">
+          <a:bodyPr wrap="square" lIns="0" tIns="0" rIns="0" bIns="0" anchor="t">
             <a:spAutoFit/>
           </a:bodyPr>
           <a:lstStyle/>
@@ -7374,7 +7190,7 @@
 </file>
 
 <file path=ppt/slides/slide12.xml><?xml version="1.0" encoding="utf-8"?>
-<p:sld xmlns:a="http://schemas.openxmlformats.org/drawingml/2006/main" xmlns:p="http://schemas.openxmlformats.org/presentationml/2006/main" xmlns:r="http://schemas.openxmlformats.org/officeDocument/2006/relationships">
+<p:sld xmlns:a="http://schemas.openxmlformats.org/drawingml/2006/main" xmlns:r="http://schemas.openxmlformats.org/officeDocument/2006/relationships" xmlns:p="http://schemas.openxmlformats.org/presentationml/2006/main">
   <p:cSld>
     <p:spTree>
       <p:nvGrpSpPr>
@@ -7382,7 +7198,14 @@
         <p:cNvGrpSpPr/>
         <p:nvPr/>
       </p:nvGrpSpPr>
-      <p:grpSpPr/>
+      <p:grpSpPr>
+        <a:xfrm>
+          <a:off x="0" y="0"/>
+          <a:ext cx="0" cy="0"/>
+          <a:chOff x="0" y="0"/>
+          <a:chExt cx="0" cy="0"/>
+        </a:xfrm>
+      </p:grpSpPr>
       <p:sp>
         <p:nvSpPr>
           <p:cNvPr id="2" name="Rectangle 1"/>
@@ -7424,6 +7247,7 @@
           <a:lstStyle/>
           <a:p>
             <a:pPr algn="ctr"/>
+            <a:endParaRPr/>
           </a:p>
         </p:txBody>
       </p:sp>
@@ -7444,7 +7268,7 @@
           <a:noFill/>
         </p:spPr>
         <p:txBody>
-          <a:bodyPr wrap="square" lIns="0" rIns="0" tIns="0" bIns="0" anchor="t">
+          <a:bodyPr wrap="square" lIns="0" tIns="0" rIns="0" bIns="0" anchor="t">
             <a:spAutoFit/>
           </a:bodyPr>
           <a:lstStyle/>
@@ -7483,7 +7307,7 @@
           <a:noFill/>
         </p:spPr>
         <p:txBody>
-          <a:bodyPr wrap="square" lIns="0" rIns="0" tIns="0" bIns="0" anchor="t">
+          <a:bodyPr wrap="square" lIns="0" tIns="0" rIns="0" bIns="0" anchor="t">
             <a:spAutoFit/>
           </a:bodyPr>
           <a:lstStyle/>
@@ -7546,6 +7370,7 @@
           <a:lstStyle/>
           <a:p>
             <a:pPr algn="ctr"/>
+            <a:endParaRPr/>
           </a:p>
         </p:txBody>
       </p:sp>
@@ -7592,6 +7417,7 @@
           <a:lstStyle/>
           <a:p>
             <a:pPr algn="ctr"/>
+            <a:endParaRPr/>
           </a:p>
         </p:txBody>
       </p:sp>
@@ -7612,7 +7438,7 @@
           <a:noFill/>
         </p:spPr>
         <p:txBody>
-          <a:bodyPr wrap="square" lIns="0" rIns="0" tIns="0" bIns="0" anchor="t">
+          <a:bodyPr wrap="square" lIns="0" tIns="0" rIns="0" bIns="0" anchor="t">
             <a:spAutoFit/>
           </a:bodyPr>
           <a:lstStyle/>
@@ -7651,7 +7477,7 @@
           <a:noFill/>
         </p:spPr>
         <p:txBody>
-          <a:bodyPr wrap="square" lIns="0" rIns="0" tIns="0" bIns="0" anchor="t">
+          <a:bodyPr wrap="square" lIns="0" tIns="0" rIns="0" bIns="0" anchor="t">
             <a:spAutoFit/>
           </a:bodyPr>
           <a:lstStyle/>
@@ -7690,7 +7516,7 @@
           <a:noFill/>
         </p:spPr>
         <p:txBody>
-          <a:bodyPr wrap="square" lIns="0" rIns="0" tIns="0" bIns="0" anchor="t">
+          <a:bodyPr wrap="square" lIns="0" tIns="0" rIns="0" bIns="0" anchor="t">
             <a:spAutoFit/>
           </a:bodyPr>
           <a:lstStyle/>
@@ -7729,7 +7555,7 @@
           <a:noFill/>
         </p:spPr>
         <p:txBody>
-          <a:bodyPr wrap="square" lIns="0" rIns="0" tIns="0" bIns="0" anchor="t">
+          <a:bodyPr wrap="square" lIns="0" tIns="0" rIns="0" bIns="0" anchor="t">
             <a:spAutoFit/>
           </a:bodyPr>
           <a:lstStyle/>
@@ -7768,7 +7594,7 @@
           <a:noFill/>
         </p:spPr>
         <p:txBody>
-          <a:bodyPr wrap="square" lIns="0" rIns="0" tIns="0" bIns="0" anchor="t">
+          <a:bodyPr wrap="square" lIns="0" tIns="0" rIns="0" bIns="0" anchor="t">
             <a:spAutoFit/>
           </a:bodyPr>
           <a:lstStyle/>
@@ -7807,7 +7633,7 @@
           <a:noFill/>
         </p:spPr>
         <p:txBody>
-          <a:bodyPr wrap="square" lIns="0" rIns="0" tIns="0" bIns="0" anchor="t">
+          <a:bodyPr wrap="square" lIns="0" tIns="0" rIns="0" bIns="0" anchor="t">
             <a:spAutoFit/>
           </a:bodyPr>
           <a:lstStyle/>
@@ -7846,7 +7672,7 @@
           <a:noFill/>
         </p:spPr>
         <p:txBody>
-          <a:bodyPr wrap="square" lIns="0" rIns="0" tIns="0" bIns="0" anchor="t">
+          <a:bodyPr wrap="square" lIns="0" tIns="0" rIns="0" bIns="0" anchor="t">
             <a:spAutoFit/>
           </a:bodyPr>
           <a:lstStyle/>
@@ -7885,7 +7711,7 @@
           <a:noFill/>
         </p:spPr>
         <p:txBody>
-          <a:bodyPr wrap="square" lIns="0" rIns="0" tIns="0" bIns="0" anchor="t">
+          <a:bodyPr wrap="square" lIns="0" tIns="0" rIns="0" bIns="0" anchor="t">
             <a:spAutoFit/>
           </a:bodyPr>
           <a:lstStyle/>
@@ -7924,7 +7750,7 @@
           <a:noFill/>
         </p:spPr>
         <p:txBody>
-          <a:bodyPr wrap="square" lIns="0" rIns="0" tIns="0" bIns="0" anchor="t">
+          <a:bodyPr wrap="square" lIns="0" tIns="0" rIns="0" bIns="0" anchor="t">
             <a:spAutoFit/>
           </a:bodyPr>
           <a:lstStyle/>
@@ -7963,7 +7789,7 @@
           <a:noFill/>
         </p:spPr>
         <p:txBody>
-          <a:bodyPr wrap="square" lIns="0" rIns="0" tIns="0" bIns="0" anchor="t">
+          <a:bodyPr wrap="square" lIns="0" tIns="0" rIns="0" bIns="0" anchor="t">
             <a:spAutoFit/>
           </a:bodyPr>
           <a:lstStyle/>
@@ -8002,7 +7828,7 @@
           <a:noFill/>
         </p:spPr>
         <p:txBody>
-          <a:bodyPr wrap="square" lIns="0" rIns="0" tIns="0" bIns="0" anchor="t">
+          <a:bodyPr wrap="square" lIns="0" tIns="0" rIns="0" bIns="0" anchor="t">
             <a:spAutoFit/>
           </a:bodyPr>
           <a:lstStyle/>
@@ -8041,7 +7867,7 @@
           <a:noFill/>
         </p:spPr>
         <p:txBody>
-          <a:bodyPr wrap="square" lIns="0" rIns="0" tIns="0" bIns="0" anchor="t">
+          <a:bodyPr wrap="square" lIns="0" tIns="0" rIns="0" bIns="0" anchor="t">
             <a:spAutoFit/>
           </a:bodyPr>
           <a:lstStyle/>
@@ -8080,7 +7906,7 @@
           <a:noFill/>
         </p:spPr>
         <p:txBody>
-          <a:bodyPr wrap="square" lIns="0" rIns="0" tIns="0" bIns="0" anchor="t">
+          <a:bodyPr wrap="square" lIns="0" tIns="0" rIns="0" bIns="0" anchor="t">
             <a:spAutoFit/>
           </a:bodyPr>
           <a:lstStyle/>
@@ -8143,6 +7969,7 @@
           <a:lstStyle/>
           <a:p>
             <a:pPr algn="ctr"/>
+            <a:endParaRPr/>
           </a:p>
         </p:txBody>
       </p:sp>
@@ -8189,6 +8016,7 @@
           <a:lstStyle/>
           <a:p>
             <a:pPr algn="ctr"/>
+            <a:endParaRPr/>
           </a:p>
         </p:txBody>
       </p:sp>
@@ -8209,7 +8037,7 @@
           <a:noFill/>
         </p:spPr>
         <p:txBody>
-          <a:bodyPr wrap="square" lIns="0" rIns="0" tIns="0" bIns="0" anchor="t">
+          <a:bodyPr wrap="square" lIns="0" tIns="0" rIns="0" bIns="0" anchor="t">
             <a:spAutoFit/>
           </a:bodyPr>
           <a:lstStyle/>
@@ -8248,7 +8076,7 @@
           <a:noFill/>
         </p:spPr>
         <p:txBody>
-          <a:bodyPr wrap="square" lIns="0" rIns="0" tIns="0" bIns="0" anchor="t">
+          <a:bodyPr wrap="square" lIns="0" tIns="0" rIns="0" bIns="0" anchor="t">
             <a:spAutoFit/>
           </a:bodyPr>
           <a:lstStyle/>
@@ -8287,7 +8115,7 @@
           <a:noFill/>
         </p:spPr>
         <p:txBody>
-          <a:bodyPr wrap="square" lIns="0" rIns="0" tIns="0" bIns="0" anchor="t">
+          <a:bodyPr wrap="square" lIns="0" tIns="0" rIns="0" bIns="0" anchor="t">
             <a:spAutoFit/>
           </a:bodyPr>
           <a:lstStyle/>
@@ -8326,7 +8154,7 @@
           <a:noFill/>
         </p:spPr>
         <p:txBody>
-          <a:bodyPr wrap="square" lIns="0" rIns="0" tIns="0" bIns="0" anchor="t">
+          <a:bodyPr wrap="square" lIns="0" tIns="0" rIns="0" bIns="0" anchor="t">
             <a:spAutoFit/>
           </a:bodyPr>
           <a:lstStyle/>
@@ -8365,7 +8193,7 @@
           <a:noFill/>
         </p:spPr>
         <p:txBody>
-          <a:bodyPr wrap="square" lIns="0" rIns="0" tIns="0" bIns="0" anchor="t">
+          <a:bodyPr wrap="square" lIns="0" tIns="0" rIns="0" bIns="0" anchor="t">
             <a:spAutoFit/>
           </a:bodyPr>
           <a:lstStyle/>
@@ -8404,7 +8232,7 @@
           <a:noFill/>
         </p:spPr>
         <p:txBody>
-          <a:bodyPr wrap="square" lIns="0" rIns="0" tIns="0" bIns="0" anchor="t">
+          <a:bodyPr wrap="square" lIns="0" tIns="0" rIns="0" bIns="0" anchor="t">
             <a:spAutoFit/>
           </a:bodyPr>
           <a:lstStyle/>
@@ -8443,7 +8271,7 @@
           <a:noFill/>
         </p:spPr>
         <p:txBody>
-          <a:bodyPr wrap="square" lIns="0" rIns="0" tIns="0" bIns="0" anchor="t">
+          <a:bodyPr wrap="square" lIns="0" tIns="0" rIns="0" bIns="0" anchor="t">
             <a:spAutoFit/>
           </a:bodyPr>
           <a:lstStyle/>
@@ -8482,7 +8310,7 @@
           <a:noFill/>
         </p:spPr>
         <p:txBody>
-          <a:bodyPr wrap="square" lIns="0" rIns="0" tIns="0" bIns="0" anchor="t">
+          <a:bodyPr wrap="square" lIns="0" tIns="0" rIns="0" bIns="0" anchor="t">
             <a:spAutoFit/>
           </a:bodyPr>
           <a:lstStyle/>
@@ -8521,7 +8349,7 @@
           <a:noFill/>
         </p:spPr>
         <p:txBody>
-          <a:bodyPr wrap="square" lIns="0" rIns="0" tIns="0" bIns="0" anchor="t">
+          <a:bodyPr wrap="square" lIns="0" tIns="0" rIns="0" bIns="0" anchor="t">
             <a:spAutoFit/>
           </a:bodyPr>
           <a:lstStyle/>
@@ -8560,7 +8388,7 @@
           <a:noFill/>
         </p:spPr>
         <p:txBody>
-          <a:bodyPr wrap="square" lIns="0" rIns="0" tIns="0" bIns="0" anchor="t">
+          <a:bodyPr wrap="square" lIns="0" tIns="0" rIns="0" bIns="0" anchor="t">
             <a:spAutoFit/>
           </a:bodyPr>
           <a:lstStyle/>
@@ -8599,7 +8427,7 @@
           <a:noFill/>
         </p:spPr>
         <p:txBody>
-          <a:bodyPr wrap="square" lIns="0" rIns="0" tIns="0" bIns="0" anchor="t">
+          <a:bodyPr wrap="square" lIns="0" tIns="0" rIns="0" bIns="0" anchor="t">
             <a:spAutoFit/>
           </a:bodyPr>
           <a:lstStyle/>
@@ -8638,7 +8466,7 @@
           <a:noFill/>
         </p:spPr>
         <p:txBody>
-          <a:bodyPr wrap="square" lIns="0" rIns="0" tIns="0" bIns="0" anchor="t">
+          <a:bodyPr wrap="square" lIns="0" tIns="0" rIns="0" bIns="0" anchor="t">
             <a:spAutoFit/>
           </a:bodyPr>
           <a:lstStyle/>
@@ -8677,7 +8505,7 @@
           <a:noFill/>
         </p:spPr>
         <p:txBody>
-          <a:bodyPr wrap="square" lIns="0" rIns="0" tIns="0" bIns="0" anchor="t">
+          <a:bodyPr wrap="square" lIns="0" tIns="0" rIns="0" bIns="0" anchor="t">
             <a:spAutoFit/>
           </a:bodyPr>
           <a:lstStyle/>
@@ -8742,6 +8570,7 @@
           <a:lstStyle/>
           <a:p>
             <a:pPr algn="ctr"/>
+            <a:endParaRPr/>
           </a:p>
         </p:txBody>
       </p:sp>
@@ -8762,7 +8591,7 @@
           <a:noFill/>
         </p:spPr>
         <p:txBody>
-          <a:bodyPr wrap="square" lIns="0" rIns="0" tIns="0" bIns="0" anchor="t">
+          <a:bodyPr wrap="square" lIns="0" tIns="0" rIns="0" bIns="0" anchor="t">
             <a:spAutoFit/>
           </a:bodyPr>
           <a:lstStyle/>
@@ -8801,7 +8630,7 @@
           <a:noFill/>
         </p:spPr>
         <p:txBody>
-          <a:bodyPr wrap="square" lIns="0" rIns="0" tIns="0" bIns="0" anchor="t">
+          <a:bodyPr wrap="square" lIns="0" tIns="0" rIns="0" bIns="0" anchor="t">
             <a:spAutoFit/>
           </a:bodyPr>
           <a:lstStyle/>
@@ -8848,7 +8677,7 @@
 </file>
 
 <file path=ppt/slides/slide13.xml><?xml version="1.0" encoding="utf-8"?>
-<p:sld xmlns:a="http://schemas.openxmlformats.org/drawingml/2006/main" xmlns:p="http://schemas.openxmlformats.org/presentationml/2006/main" xmlns:r="http://schemas.openxmlformats.org/officeDocument/2006/relationships">
+<p:sld xmlns:a="http://schemas.openxmlformats.org/drawingml/2006/main" xmlns:r="http://schemas.openxmlformats.org/officeDocument/2006/relationships" xmlns:p="http://schemas.openxmlformats.org/presentationml/2006/main">
   <p:cSld>
     <p:spTree>
       <p:nvGrpSpPr>
@@ -8856,7 +8685,14 @@
         <p:cNvGrpSpPr/>
         <p:nvPr/>
       </p:nvGrpSpPr>
-      <p:grpSpPr/>
+      <p:grpSpPr>
+        <a:xfrm>
+          <a:off x="0" y="0"/>
+          <a:ext cx="0" cy="0"/>
+          <a:chOff x="0" y="0"/>
+          <a:chExt cx="0" cy="0"/>
+        </a:xfrm>
+      </p:grpSpPr>
       <p:sp>
         <p:nvSpPr>
           <p:cNvPr id="2" name="Rectangle 1"/>
@@ -8898,6 +8734,7 @@
           <a:lstStyle/>
           <a:p>
             <a:pPr algn="ctr"/>
+            <a:endParaRPr/>
           </a:p>
         </p:txBody>
       </p:sp>
@@ -8918,7 +8755,7 @@
           <a:noFill/>
         </p:spPr>
         <p:txBody>
-          <a:bodyPr wrap="square" lIns="0" rIns="0" tIns="0" bIns="0" anchor="t">
+          <a:bodyPr wrap="square" lIns="0" tIns="0" rIns="0" bIns="0" anchor="t">
             <a:spAutoFit/>
           </a:bodyPr>
           <a:lstStyle/>
@@ -8957,7 +8794,7 @@
           <a:noFill/>
         </p:spPr>
         <p:txBody>
-          <a:bodyPr wrap="square" lIns="0" rIns="0" tIns="0" bIns="0" anchor="t">
+          <a:bodyPr wrap="square" lIns="0" tIns="0" rIns="0" bIns="0" anchor="t">
             <a:spAutoFit/>
           </a:bodyPr>
           <a:lstStyle/>
@@ -9024,6 +8861,7 @@
           <a:lstStyle/>
           <a:p>
             <a:pPr algn="ctr"/>
+            <a:endParaRPr/>
           </a:p>
         </p:txBody>
       </p:sp>
@@ -9044,7 +8882,7 @@
           <a:noFill/>
         </p:spPr>
         <p:txBody>
-          <a:bodyPr wrap="square" lIns="0" rIns="0" tIns="0" bIns="0" anchor="t">
+          <a:bodyPr wrap="square" lIns="0" tIns="0" rIns="0" bIns="0" anchor="t">
             <a:spAutoFit/>
           </a:bodyPr>
           <a:lstStyle/>
@@ -9083,7 +8921,7 @@
           <a:noFill/>
         </p:spPr>
         <p:txBody>
-          <a:bodyPr wrap="square" lIns="0" rIns="0" tIns="0" bIns="0" anchor="t">
+          <a:bodyPr wrap="square" lIns="0" tIns="0" rIns="0" bIns="0" anchor="t">
             <a:spAutoFit/>
           </a:bodyPr>
           <a:lstStyle/>
@@ -9122,7 +8960,7 @@
           <a:noFill/>
         </p:spPr>
         <p:txBody>
-          <a:bodyPr wrap="square" lIns="0" rIns="0" tIns="0" bIns="0" anchor="t">
+          <a:bodyPr wrap="square" lIns="0" tIns="0" rIns="0" bIns="0" anchor="t">
             <a:spAutoFit/>
           </a:bodyPr>
           <a:lstStyle/>
@@ -9169,7 +9007,7 @@
 </file>
 
 <file path=ppt/slides/slide14.xml><?xml version="1.0" encoding="utf-8"?>
-<p:sld xmlns:a="http://schemas.openxmlformats.org/drawingml/2006/main" xmlns:p="http://schemas.openxmlformats.org/presentationml/2006/main" xmlns:r="http://schemas.openxmlformats.org/officeDocument/2006/relationships">
+<p:sld xmlns:a="http://schemas.openxmlformats.org/drawingml/2006/main" xmlns:r="http://schemas.openxmlformats.org/officeDocument/2006/relationships" xmlns:p="http://schemas.openxmlformats.org/presentationml/2006/main">
   <p:cSld>
     <p:spTree>
       <p:nvGrpSpPr>
@@ -9177,7 +9015,14 @@
         <p:cNvGrpSpPr/>
         <p:nvPr/>
       </p:nvGrpSpPr>
-      <p:grpSpPr/>
+      <p:grpSpPr>
+        <a:xfrm>
+          <a:off x="0" y="0"/>
+          <a:ext cx="0" cy="0"/>
+          <a:chOff x="0" y="0"/>
+          <a:chExt cx="0" cy="0"/>
+        </a:xfrm>
+      </p:grpSpPr>
       <p:sp>
         <p:nvSpPr>
           <p:cNvPr id="2" name="Rectangle 1"/>
@@ -9219,6 +9064,7 @@
           <a:lstStyle/>
           <a:p>
             <a:pPr algn="ctr"/>
+            <a:endParaRPr/>
           </a:p>
         </p:txBody>
       </p:sp>
@@ -9239,7 +9085,7 @@
           <a:noFill/>
         </p:spPr>
         <p:txBody>
-          <a:bodyPr wrap="square" lIns="0" rIns="0" tIns="0" bIns="0" anchor="t">
+          <a:bodyPr wrap="square" lIns="0" tIns="0" rIns="0" bIns="0" anchor="t">
             <a:spAutoFit/>
           </a:bodyPr>
           <a:lstStyle/>
@@ -9278,7 +9124,7 @@
           <a:noFill/>
         </p:spPr>
         <p:txBody>
-          <a:bodyPr wrap="square" lIns="0" rIns="0" tIns="0" bIns="0" anchor="t">
+          <a:bodyPr wrap="square" lIns="0" tIns="0" rIns="0" bIns="0" anchor="t">
             <a:spAutoFit/>
           </a:bodyPr>
           <a:lstStyle/>
@@ -9341,6 +9187,7 @@
           <a:lstStyle/>
           <a:p>
             <a:pPr algn="ctr"/>
+            <a:endParaRPr/>
           </a:p>
         </p:txBody>
       </p:sp>
@@ -9361,7 +9208,7 @@
           <a:noFill/>
         </p:spPr>
         <p:txBody>
-          <a:bodyPr wrap="square" lIns="0" rIns="0" tIns="0" bIns="0" anchor="t">
+          <a:bodyPr wrap="square" lIns="0" tIns="0" rIns="0" bIns="0" anchor="t">
             <a:spAutoFit/>
           </a:bodyPr>
           <a:lstStyle/>
@@ -9400,7 +9247,7 @@
           <a:noFill/>
         </p:spPr>
         <p:txBody>
-          <a:bodyPr wrap="square" lIns="0" rIns="0" tIns="0" bIns="0" anchor="ctr">
+          <a:bodyPr wrap="square" lIns="0" tIns="0" rIns="0" bIns="0" anchor="ctr">
             <a:spAutoFit/>
           </a:bodyPr>
           <a:lstStyle/>
@@ -9481,6 +9328,7 @@
           <a:lstStyle/>
           <a:p>
             <a:pPr algn="ctr"/>
+            <a:endParaRPr/>
           </a:p>
         </p:txBody>
       </p:sp>
@@ -9501,7 +9349,7 @@
           <a:noFill/>
         </p:spPr>
         <p:txBody>
-          <a:bodyPr wrap="square" lIns="0" rIns="0" tIns="0" bIns="0" anchor="t">
+          <a:bodyPr wrap="square" lIns="0" tIns="0" rIns="0" bIns="0" anchor="t">
             <a:spAutoFit/>
           </a:bodyPr>
           <a:lstStyle/>
@@ -9540,7 +9388,7 @@
           <a:noFill/>
         </p:spPr>
         <p:txBody>
-          <a:bodyPr wrap="square" lIns="0" rIns="0" tIns="0" bIns="0" anchor="ctr">
+          <a:bodyPr wrap="square" lIns="0" tIns="0" rIns="0" bIns="0" anchor="ctr">
             <a:spAutoFit/>
           </a:bodyPr>
           <a:lstStyle/>
@@ -9621,6 +9469,7 @@
           <a:lstStyle/>
           <a:p>
             <a:pPr algn="ctr"/>
+            <a:endParaRPr/>
           </a:p>
         </p:txBody>
       </p:sp>
@@ -9641,7 +9490,7 @@
           <a:noFill/>
         </p:spPr>
         <p:txBody>
-          <a:bodyPr wrap="square" lIns="0" rIns="0" tIns="0" bIns="0" anchor="t">
+          <a:bodyPr wrap="square" lIns="0" tIns="0" rIns="0" bIns="0" anchor="t">
             <a:spAutoFit/>
           </a:bodyPr>
           <a:lstStyle/>
@@ -9680,7 +9529,7 @@
           <a:noFill/>
         </p:spPr>
         <p:txBody>
-          <a:bodyPr wrap="square" lIns="0" rIns="0" tIns="0" bIns="0" anchor="ctr">
+          <a:bodyPr wrap="square" lIns="0" tIns="0" rIns="0" bIns="0" anchor="ctr">
             <a:spAutoFit/>
           </a:bodyPr>
           <a:lstStyle/>
@@ -9761,6 +9610,7 @@
           <a:lstStyle/>
           <a:p>
             <a:pPr algn="ctr"/>
+            <a:endParaRPr/>
           </a:p>
         </p:txBody>
       </p:sp>
@@ -9781,7 +9631,7 @@
           <a:noFill/>
         </p:spPr>
         <p:txBody>
-          <a:bodyPr wrap="square" lIns="0" rIns="0" tIns="0" bIns="0" anchor="t">
+          <a:bodyPr wrap="square" lIns="0" tIns="0" rIns="0" bIns="0" anchor="t">
             <a:spAutoFit/>
           </a:bodyPr>
           <a:lstStyle/>
@@ -9820,7 +9670,7 @@
           <a:noFill/>
         </p:spPr>
         <p:txBody>
-          <a:bodyPr wrap="square" lIns="0" rIns="0" tIns="0" bIns="0" anchor="ctr">
+          <a:bodyPr wrap="square" lIns="0" tIns="0" rIns="0" bIns="0" anchor="ctr">
             <a:spAutoFit/>
           </a:bodyPr>
           <a:lstStyle/>
@@ -9901,6 +9751,7 @@
           <a:lstStyle/>
           <a:p>
             <a:pPr algn="ctr"/>
+            <a:endParaRPr/>
           </a:p>
         </p:txBody>
       </p:sp>
@@ -9921,7 +9772,7 @@
           <a:noFill/>
         </p:spPr>
         <p:txBody>
-          <a:bodyPr wrap="square" lIns="0" rIns="0" tIns="0" bIns="0" anchor="t">
+          <a:bodyPr wrap="square" lIns="0" tIns="0" rIns="0" bIns="0" anchor="t">
             <a:spAutoFit/>
           </a:bodyPr>
           <a:lstStyle/>
@@ -9960,7 +9811,7 @@
           <a:noFill/>
         </p:spPr>
         <p:txBody>
-          <a:bodyPr wrap="square" lIns="0" rIns="0" tIns="0" bIns="0" anchor="ctr">
+          <a:bodyPr wrap="square" lIns="0" tIns="0" rIns="0" bIns="0" anchor="ctr">
             <a:spAutoFit/>
           </a:bodyPr>
           <a:lstStyle/>
@@ -10041,6 +9892,7 @@
           <a:lstStyle/>
           <a:p>
             <a:pPr algn="ctr"/>
+            <a:endParaRPr/>
           </a:p>
         </p:txBody>
       </p:sp>
@@ -10061,7 +9913,7 @@
           <a:noFill/>
         </p:spPr>
         <p:txBody>
-          <a:bodyPr wrap="square" lIns="0" rIns="0" tIns="0" bIns="0" anchor="t">
+          <a:bodyPr wrap="square" lIns="0" tIns="0" rIns="0" bIns="0" anchor="t">
             <a:spAutoFit/>
           </a:bodyPr>
           <a:lstStyle/>
@@ -10100,7 +9952,7 @@
           <a:noFill/>
         </p:spPr>
         <p:txBody>
-          <a:bodyPr wrap="square" lIns="0" rIns="0" tIns="0" bIns="0" anchor="ctr">
+          <a:bodyPr wrap="square" lIns="0" tIns="0" rIns="0" bIns="0" anchor="ctr">
             <a:spAutoFit/>
           </a:bodyPr>
           <a:lstStyle/>
@@ -10181,6 +10033,7 @@
           <a:lstStyle/>
           <a:p>
             <a:pPr algn="ctr"/>
+            <a:endParaRPr/>
           </a:p>
         </p:txBody>
       </p:sp>
@@ -10201,7 +10054,7 @@
           <a:noFill/>
         </p:spPr>
         <p:txBody>
-          <a:bodyPr wrap="square" lIns="0" rIns="0" tIns="0" bIns="0" anchor="t">
+          <a:bodyPr wrap="square" lIns="0" tIns="0" rIns="0" bIns="0" anchor="t">
             <a:spAutoFit/>
           </a:bodyPr>
           <a:lstStyle/>
@@ -10240,7 +10093,7 @@
           <a:noFill/>
         </p:spPr>
         <p:txBody>
-          <a:bodyPr wrap="square" lIns="0" rIns="0" tIns="0" bIns="0" anchor="ctr">
+          <a:bodyPr wrap="square" lIns="0" tIns="0" rIns="0" bIns="0" anchor="ctr">
             <a:spAutoFit/>
           </a:bodyPr>
           <a:lstStyle/>
@@ -10321,6 +10174,7 @@
           <a:lstStyle/>
           <a:p>
             <a:pPr algn="ctr"/>
+            <a:endParaRPr/>
           </a:p>
         </p:txBody>
       </p:sp>
@@ -10341,7 +10195,7 @@
           <a:noFill/>
         </p:spPr>
         <p:txBody>
-          <a:bodyPr wrap="square" lIns="0" rIns="0" tIns="0" bIns="0" anchor="t">
+          <a:bodyPr wrap="square" lIns="0" tIns="0" rIns="0" bIns="0" anchor="t">
             <a:spAutoFit/>
           </a:bodyPr>
           <a:lstStyle/>
@@ -10380,7 +10234,7 @@
           <a:noFill/>
         </p:spPr>
         <p:txBody>
-          <a:bodyPr wrap="square" lIns="0" rIns="0" tIns="0" bIns="0" anchor="ctr">
+          <a:bodyPr wrap="square" lIns="0" tIns="0" rIns="0" bIns="0" anchor="ctr">
             <a:spAutoFit/>
           </a:bodyPr>
           <a:lstStyle/>
@@ -10429,7 +10283,7 @@
 </file>
 
 <file path=ppt/slides/slide2.xml><?xml version="1.0" encoding="utf-8"?>
-<p:sld xmlns:a="http://schemas.openxmlformats.org/drawingml/2006/main" xmlns:p="http://schemas.openxmlformats.org/presentationml/2006/main" xmlns:r="http://schemas.openxmlformats.org/officeDocument/2006/relationships">
+<p:sld xmlns:a="http://schemas.openxmlformats.org/drawingml/2006/main" xmlns:r="http://schemas.openxmlformats.org/officeDocument/2006/relationships" xmlns:p="http://schemas.openxmlformats.org/presentationml/2006/main">
   <p:cSld>
     <p:spTree>
       <p:nvGrpSpPr>
@@ -10437,7 +10291,14 @@
         <p:cNvGrpSpPr/>
         <p:nvPr/>
       </p:nvGrpSpPr>
-      <p:grpSpPr/>
+      <p:grpSpPr>
+        <a:xfrm>
+          <a:off x="0" y="0"/>
+          <a:ext cx="0" cy="0"/>
+          <a:chOff x="0" y="0"/>
+          <a:chExt cx="0" cy="0"/>
+        </a:xfrm>
+      </p:grpSpPr>
       <p:sp>
         <p:nvSpPr>
           <p:cNvPr id="2" name="Rectangle 1"/>
@@ -10479,6 +10340,7 @@
           <a:lstStyle/>
           <a:p>
             <a:pPr algn="ctr"/>
+            <a:endParaRPr/>
           </a:p>
         </p:txBody>
       </p:sp>
@@ -10499,7 +10361,7 @@
           <a:noFill/>
         </p:spPr>
         <p:txBody>
-          <a:bodyPr wrap="square" lIns="0" rIns="0" tIns="0" bIns="0" anchor="t">
+          <a:bodyPr wrap="square" lIns="0" tIns="0" rIns="0" bIns="0" anchor="t">
             <a:spAutoFit/>
           </a:bodyPr>
           <a:lstStyle/>
@@ -10538,7 +10400,7 @@
           <a:noFill/>
         </p:spPr>
         <p:txBody>
-          <a:bodyPr wrap="square" lIns="0" rIns="0" tIns="0" bIns="0" anchor="t">
+          <a:bodyPr wrap="square" lIns="0" tIns="0" rIns="0" bIns="0" anchor="t">
             <a:spAutoFit/>
           </a:bodyPr>
           <a:lstStyle/>
@@ -10568,8 +10430,8 @@
         </p:nvSpPr>
         <p:spPr>
           <a:xfrm>
-            <a:off x="762000" y="1968500"/>
-            <a:ext cx="5207000" cy="1968500"/>
+            <a:off x="762000" y="1968499"/>
+            <a:ext cx="5207000" cy="2107111"/>
           </a:xfrm>
           <a:prstGeom prst="roundRect">
             <a:avLst>
@@ -10605,6 +10467,7 @@
           <a:lstStyle/>
           <a:p>
             <a:pPr algn="ctr"/>
+            <a:endParaRPr/>
           </a:p>
         </p:txBody>
       </p:sp>
@@ -10625,7 +10488,7 @@
           <a:noFill/>
         </p:spPr>
         <p:txBody>
-          <a:bodyPr wrap="square" lIns="0" rIns="0" tIns="0" bIns="0" anchor="t">
+          <a:bodyPr wrap="square" lIns="0" tIns="0" rIns="0" bIns="0" anchor="t">
             <a:spAutoFit/>
           </a:bodyPr>
           <a:lstStyle/>
@@ -10664,7 +10527,7 @@
           <a:noFill/>
         </p:spPr>
         <p:txBody>
-          <a:bodyPr wrap="square" lIns="0" rIns="0" tIns="0" bIns="0" anchor="t">
+          <a:bodyPr wrap="square" lIns="0" tIns="0" rIns="0" bIns="0" anchor="t">
             <a:spAutoFit/>
           </a:bodyPr>
           <a:lstStyle/>
@@ -10675,7 +10538,7 @@
               </a:lnSpc>
             </a:pPr>
             <a:r>
-              <a:rPr sz="1500" b="1" i="0">
+              <a:rPr sz="1500" b="1" i="0" dirty="0">
                 <a:solidFill>
                   <a:srgbClr val="1A8FC2"/>
                 </a:solidFill>
@@ -10684,7 +10547,7 @@
               <a:t>•  </a:t>
             </a:r>
             <a:r>
-              <a:rPr sz="1500" b="0" i="0">
+              <a:rPr sz="1500" b="0" i="0" dirty="0">
                 <a:solidFill>
                   <a:srgbClr val="0D1B2A"/>
                 </a:solidFill>
@@ -10700,7 +10563,7 @@
               </a:lnSpc>
             </a:pPr>
             <a:r>
-              <a:rPr sz="1500" b="1" i="0">
+              <a:rPr sz="1500" b="1" i="0" dirty="0">
                 <a:solidFill>
                   <a:srgbClr val="1A8FC2"/>
                 </a:solidFill>
@@ -10709,7 +10572,7 @@
               <a:t>•  </a:t>
             </a:r>
             <a:r>
-              <a:rPr sz="1500" b="0" i="0">
+              <a:rPr sz="1500" b="0" i="0" dirty="0">
                 <a:solidFill>
                   <a:srgbClr val="0D1B2A"/>
                 </a:solidFill>
@@ -10725,7 +10588,7 @@
               </a:lnSpc>
             </a:pPr>
             <a:r>
-              <a:rPr sz="1500" b="1" i="0">
+              <a:rPr sz="1500" b="1" i="0" dirty="0">
                 <a:solidFill>
                   <a:srgbClr val="1A8FC2"/>
                 </a:solidFill>
@@ -10734,7 +10597,7 @@
               <a:t>•  </a:t>
             </a:r>
             <a:r>
-              <a:rPr sz="1500" b="0" i="0">
+              <a:rPr sz="1500" b="0" i="0" dirty="0">
                 <a:solidFill>
                   <a:srgbClr val="0D1B2A"/>
                 </a:solidFill>
@@ -10750,7 +10613,7 @@
               </a:lnSpc>
             </a:pPr>
             <a:r>
-              <a:rPr sz="1500" b="1" i="0">
+              <a:rPr sz="1500" b="1" i="0" dirty="0">
                 <a:solidFill>
                   <a:srgbClr val="1A8FC2"/>
                 </a:solidFill>
@@ -10759,7 +10622,7 @@
               <a:t>•  </a:t>
             </a:r>
             <a:r>
-              <a:rPr sz="1500" b="0" i="0">
+              <a:rPr sz="1500" b="0" i="0" dirty="0">
                 <a:solidFill>
                   <a:srgbClr val="0D1B2A"/>
                 </a:solidFill>
@@ -10775,7 +10638,7 @@
               </a:lnSpc>
             </a:pPr>
             <a:r>
-              <a:rPr sz="1500" b="1" i="0">
+              <a:rPr sz="1500" b="1" i="0" dirty="0">
                 <a:solidFill>
                   <a:srgbClr val="1A8FC2"/>
                 </a:solidFill>
@@ -10784,7 +10647,7 @@
               <a:t>•  </a:t>
             </a:r>
             <a:r>
-              <a:rPr sz="1500" b="0" i="0">
+              <a:rPr sz="1500" b="0" i="0" dirty="0">
                 <a:solidFill>
                   <a:srgbClr val="0D1B2A"/>
                 </a:solidFill>
@@ -10804,7 +10667,7 @@
         <p:spPr>
           <a:xfrm>
             <a:off x="6172200" y="1968500"/>
-            <a:ext cx="5207000" cy="1968500"/>
+            <a:ext cx="5207000" cy="2107110"/>
           </a:xfrm>
           <a:prstGeom prst="roundRect">
             <a:avLst>
@@ -10840,6 +10703,7 @@
           <a:lstStyle/>
           <a:p>
             <a:pPr algn="ctr"/>
+            <a:endParaRPr/>
           </a:p>
         </p:txBody>
       </p:sp>
@@ -10860,7 +10724,7 @@
           <a:noFill/>
         </p:spPr>
         <p:txBody>
-          <a:bodyPr wrap="square" lIns="0" rIns="0" tIns="0" bIns="0" anchor="t">
+          <a:bodyPr wrap="square" lIns="0" tIns="0" rIns="0" bIns="0" anchor="t">
             <a:spAutoFit/>
           </a:bodyPr>
           <a:lstStyle/>
@@ -10899,7 +10763,7 @@
           <a:noFill/>
         </p:spPr>
         <p:txBody>
-          <a:bodyPr wrap="square" lIns="0" rIns="0" tIns="0" bIns="0" anchor="t">
+          <a:bodyPr wrap="square" lIns="0" tIns="0" rIns="0" bIns="0" anchor="t">
             <a:spAutoFit/>
           </a:bodyPr>
           <a:lstStyle/>
@@ -11050,6 +10914,7 @@
           <a:lstStyle/>
           <a:p>
             <a:pPr algn="ctr"/>
+            <a:endParaRPr/>
           </a:p>
         </p:txBody>
       </p:sp>
@@ -11070,7 +10935,7 @@
           <a:noFill/>
         </p:spPr>
         <p:txBody>
-          <a:bodyPr wrap="square" lIns="0" rIns="0" tIns="0" bIns="0" anchor="t">
+          <a:bodyPr wrap="square" lIns="0" tIns="0" rIns="0" bIns="0" anchor="t">
             <a:spAutoFit/>
           </a:bodyPr>
           <a:lstStyle/>
@@ -11109,7 +10974,7 @@
           <a:noFill/>
         </p:spPr>
         <p:txBody>
-          <a:bodyPr wrap="square" lIns="0" rIns="0" tIns="0" bIns="0" anchor="t">
+          <a:bodyPr wrap="square" lIns="0" tIns="0" rIns="0" bIns="0" anchor="t">
             <a:spAutoFit/>
           </a:bodyPr>
           <a:lstStyle/>
@@ -11260,6 +11125,7 @@
           <a:lstStyle/>
           <a:p>
             <a:pPr algn="ctr"/>
+            <a:endParaRPr/>
           </a:p>
         </p:txBody>
       </p:sp>
@@ -11280,7 +11146,7 @@
           <a:noFill/>
         </p:spPr>
         <p:txBody>
-          <a:bodyPr wrap="square" lIns="0" rIns="0" tIns="0" bIns="0" anchor="t">
+          <a:bodyPr wrap="square" lIns="0" tIns="0" rIns="0" bIns="0" anchor="t">
             <a:spAutoFit/>
           </a:bodyPr>
           <a:lstStyle/>
@@ -11319,7 +11185,7 @@
           <a:noFill/>
         </p:spPr>
         <p:txBody>
-          <a:bodyPr wrap="square" lIns="0" rIns="0" tIns="0" bIns="0" anchor="t">
+          <a:bodyPr wrap="square" lIns="0" tIns="0" rIns="0" bIns="0" anchor="t">
             <a:spAutoFit/>
           </a:bodyPr>
           <a:lstStyle/>
@@ -11384,7 +11250,7 @@
 </file>
 
 <file path=ppt/slides/slide3.xml><?xml version="1.0" encoding="utf-8"?>
-<p:sld xmlns:a="http://schemas.openxmlformats.org/drawingml/2006/main" xmlns:p="http://schemas.openxmlformats.org/presentationml/2006/main" xmlns:r="http://schemas.openxmlformats.org/officeDocument/2006/relationships">
+<p:sld xmlns:a="http://schemas.openxmlformats.org/drawingml/2006/main" xmlns:r="http://schemas.openxmlformats.org/officeDocument/2006/relationships" xmlns:p="http://schemas.openxmlformats.org/presentationml/2006/main">
   <p:cSld>
     <p:spTree>
       <p:nvGrpSpPr>
@@ -11392,7 +11258,14 @@
         <p:cNvGrpSpPr/>
         <p:nvPr/>
       </p:nvGrpSpPr>
-      <p:grpSpPr/>
+      <p:grpSpPr>
+        <a:xfrm>
+          <a:off x="0" y="0"/>
+          <a:ext cx="0" cy="0"/>
+          <a:chOff x="0" y="0"/>
+          <a:chExt cx="0" cy="0"/>
+        </a:xfrm>
+      </p:grpSpPr>
       <p:sp>
         <p:nvSpPr>
           <p:cNvPr id="2" name="Rectangle 1"/>
@@ -11434,6 +11307,7 @@
           <a:lstStyle/>
           <a:p>
             <a:pPr algn="ctr"/>
+            <a:endParaRPr/>
           </a:p>
         </p:txBody>
       </p:sp>
@@ -11454,7 +11328,7 @@
           <a:noFill/>
         </p:spPr>
         <p:txBody>
-          <a:bodyPr wrap="square" lIns="0" rIns="0" tIns="0" bIns="0" anchor="t">
+          <a:bodyPr wrap="square" lIns="0" tIns="0" rIns="0" bIns="0" anchor="t">
             <a:spAutoFit/>
           </a:bodyPr>
           <a:lstStyle/>
@@ -11493,7 +11367,7 @@
           <a:noFill/>
         </p:spPr>
         <p:txBody>
-          <a:bodyPr wrap="square" lIns="0" rIns="0" tIns="0" bIns="0" anchor="t">
+          <a:bodyPr wrap="square" lIns="0" tIns="0" rIns="0" bIns="0" anchor="t">
             <a:spAutoFit/>
           </a:bodyPr>
           <a:lstStyle/>
@@ -11523,7 +11397,7 @@
         </p:nvSpPr>
         <p:spPr>
           <a:xfrm>
-            <a:off x="1523984" y="2286000"/>
+            <a:off x="349234" y="2295236"/>
             <a:ext cx="2794000" cy="2794000"/>
           </a:xfrm>
           <a:prstGeom prst="roundRect">
@@ -11560,6 +11434,7 @@
           <a:lstStyle/>
           <a:p>
             <a:pPr algn="ctr"/>
+            <a:endParaRPr/>
           </a:p>
         </p:txBody>
       </p:sp>
@@ -11571,7 +11446,7 @@
         </p:nvSpPr>
         <p:spPr>
           <a:xfrm>
-            <a:off x="1650984" y="2565400"/>
+            <a:off x="476234" y="2574636"/>
             <a:ext cx="2540000" cy="279400"/>
           </a:xfrm>
           <a:prstGeom prst="rect">
@@ -11580,7 +11455,7 @@
           <a:noFill/>
         </p:spPr>
         <p:txBody>
-          <a:bodyPr wrap="square" lIns="0" rIns="0" tIns="0" bIns="0" anchor="t">
+          <a:bodyPr wrap="square" lIns="0" tIns="0" rIns="0" bIns="0" anchor="t">
             <a:spAutoFit/>
           </a:bodyPr>
           <a:lstStyle/>
@@ -11591,7 +11466,7 @@
               </a:lnSpc>
             </a:pPr>
             <a:r>
-              <a:rPr sz="1600" b="1" i="0">
+              <a:rPr sz="1600" b="1" i="0" dirty="0">
                 <a:solidFill>
                   <a:srgbClr val="F9FAFB"/>
                 </a:solidFill>
@@ -11610,7 +11485,7 @@
         </p:nvSpPr>
         <p:spPr>
           <a:xfrm>
-            <a:off x="1650984" y="2984500"/>
+            <a:off x="476234" y="2993736"/>
             <a:ext cx="2540000" cy="508000"/>
           </a:xfrm>
           <a:prstGeom prst="rect">
@@ -11619,7 +11494,7 @@
           <a:noFill/>
         </p:spPr>
         <p:txBody>
-          <a:bodyPr wrap="square" lIns="0" rIns="0" tIns="0" bIns="0" anchor="t">
+          <a:bodyPr wrap="square" lIns="0" tIns="0" rIns="0" bIns="0" anchor="t">
             <a:spAutoFit/>
           </a:bodyPr>
           <a:lstStyle/>
@@ -11630,7 +11505,7 @@
               </a:lnSpc>
             </a:pPr>
             <a:r>
-              <a:rPr sz="1300" b="0" i="0">
+              <a:rPr sz="1300" b="0" i="0" dirty="0">
                 <a:solidFill>
                   <a:srgbClr val="9AA3B0"/>
                 </a:solidFill>
@@ -11646,7 +11521,7 @@
               </a:lnSpc>
             </a:pPr>
             <a:r>
-              <a:rPr sz="1300" b="0" i="0">
+              <a:rPr sz="1300" b="0" i="0" dirty="0">
                 <a:solidFill>
                   <a:srgbClr val="9AA3B0"/>
                 </a:solidFill>
@@ -11665,7 +11540,7 @@
         </p:nvSpPr>
         <p:spPr>
           <a:xfrm>
-            <a:off x="1676384" y="3746500"/>
+            <a:off x="501634" y="3771900"/>
             <a:ext cx="812800" cy="266700"/>
           </a:xfrm>
           <a:prstGeom prst="roundRect">
@@ -11700,6 +11575,7 @@
           <a:lstStyle/>
           <a:p>
             <a:pPr algn="ctr"/>
+            <a:endParaRPr/>
           </a:p>
         </p:txBody>
       </p:sp>
@@ -11711,7 +11587,7 @@
         </p:nvSpPr>
         <p:spPr>
           <a:xfrm>
-            <a:off x="1676384" y="3784600"/>
+            <a:off x="501634" y="3793836"/>
             <a:ext cx="812800" cy="203200"/>
           </a:xfrm>
           <a:prstGeom prst="rect">
@@ -11720,7 +11596,7 @@
           <a:noFill/>
         </p:spPr>
         <p:txBody>
-          <a:bodyPr wrap="square" lIns="0" rIns="0" tIns="0" bIns="0" anchor="t">
+          <a:bodyPr wrap="square" lIns="0" tIns="0" rIns="0" bIns="0" anchor="t">
             <a:spAutoFit/>
           </a:bodyPr>
           <a:lstStyle/>
@@ -11731,7 +11607,7 @@
               </a:lnSpc>
             </a:pPr>
             <a:r>
-              <a:rPr sz="1100" b="0" i="0">
+              <a:rPr sz="1100" b="0" i="0" dirty="0">
                 <a:solidFill>
                   <a:srgbClr val="8EC6E0"/>
                 </a:solidFill>
@@ -11750,7 +11626,7 @@
         </p:nvSpPr>
         <p:spPr>
           <a:xfrm>
-            <a:off x="2552684" y="3746500"/>
+            <a:off x="1365234" y="3746500"/>
             <a:ext cx="673100" cy="266700"/>
           </a:xfrm>
           <a:prstGeom prst="roundRect">
@@ -11785,6 +11661,7 @@
           <a:lstStyle/>
           <a:p>
             <a:pPr algn="ctr"/>
+            <a:endParaRPr/>
           </a:p>
         </p:txBody>
       </p:sp>
@@ -11796,7 +11673,7 @@
         </p:nvSpPr>
         <p:spPr>
           <a:xfrm>
-            <a:off x="2552684" y="3784600"/>
+            <a:off x="1377934" y="3793836"/>
             <a:ext cx="673100" cy="203200"/>
           </a:xfrm>
           <a:prstGeom prst="rect">
@@ -11805,7 +11682,7 @@
           <a:noFill/>
         </p:spPr>
         <p:txBody>
-          <a:bodyPr wrap="square" lIns="0" rIns="0" tIns="0" bIns="0" anchor="t">
+          <a:bodyPr wrap="square" lIns="0" tIns="0" rIns="0" bIns="0" anchor="t">
             <a:spAutoFit/>
           </a:bodyPr>
           <a:lstStyle/>
@@ -11816,7 +11693,7 @@
               </a:lnSpc>
             </a:pPr>
             <a:r>
-              <a:rPr sz="1100" b="0" i="0">
+              <a:rPr sz="1100" b="0" i="0" dirty="0">
                 <a:solidFill>
                   <a:srgbClr val="8EC6E0"/>
                 </a:solidFill>
@@ -11835,7 +11712,7 @@
         </p:nvSpPr>
         <p:spPr>
           <a:xfrm>
-            <a:off x="3289284" y="3746500"/>
+            <a:off x="2120884" y="3762086"/>
             <a:ext cx="812800" cy="266700"/>
           </a:xfrm>
           <a:prstGeom prst="roundRect">
@@ -11870,6 +11747,7 @@
           <a:lstStyle/>
           <a:p>
             <a:pPr algn="ctr"/>
+            <a:endParaRPr/>
           </a:p>
         </p:txBody>
       </p:sp>
@@ -11881,7 +11759,7 @@
         </p:nvSpPr>
         <p:spPr>
           <a:xfrm>
-            <a:off x="3289284" y="3784600"/>
+            <a:off x="2114534" y="3793836"/>
             <a:ext cx="812800" cy="203200"/>
           </a:xfrm>
           <a:prstGeom prst="rect">
@@ -11890,7 +11768,7 @@
           <a:noFill/>
         </p:spPr>
         <p:txBody>
-          <a:bodyPr wrap="square" lIns="0" rIns="0" tIns="0" bIns="0" anchor="t">
+          <a:bodyPr wrap="square" lIns="0" tIns="0" rIns="0" bIns="0" anchor="t">
             <a:spAutoFit/>
           </a:bodyPr>
           <a:lstStyle/>
@@ -11920,7 +11798,7 @@
         </p:nvSpPr>
         <p:spPr>
           <a:xfrm>
-            <a:off x="1676384" y="4064000"/>
+            <a:off x="501634" y="4089400"/>
             <a:ext cx="812800" cy="266700"/>
           </a:xfrm>
           <a:prstGeom prst="roundRect">
@@ -11955,6 +11833,7 @@
           <a:lstStyle/>
           <a:p>
             <a:pPr algn="ctr"/>
+            <a:endParaRPr/>
           </a:p>
         </p:txBody>
       </p:sp>
@@ -11966,7 +11845,7 @@
         </p:nvSpPr>
         <p:spPr>
           <a:xfrm>
-            <a:off x="1676384" y="4102100"/>
+            <a:off x="501634" y="4111336"/>
             <a:ext cx="812800" cy="203200"/>
           </a:xfrm>
           <a:prstGeom prst="rect">
@@ -11975,7 +11854,7 @@
           <a:noFill/>
         </p:spPr>
         <p:txBody>
-          <a:bodyPr wrap="square" lIns="0" rIns="0" tIns="0" bIns="0" anchor="t">
+          <a:bodyPr wrap="square" lIns="0" tIns="0" rIns="0" bIns="0" anchor="t">
             <a:spAutoFit/>
           </a:bodyPr>
           <a:lstStyle/>
@@ -12005,7 +11884,7 @@
         </p:nvSpPr>
         <p:spPr>
           <a:xfrm>
-            <a:off x="2552684" y="4064000"/>
+            <a:off x="1377934" y="4089400"/>
             <a:ext cx="603250" cy="266700"/>
           </a:xfrm>
           <a:prstGeom prst="roundRect">
@@ -12040,6 +11919,7 @@
           <a:lstStyle/>
           <a:p>
             <a:pPr algn="ctr"/>
+            <a:endParaRPr/>
           </a:p>
         </p:txBody>
       </p:sp>
@@ -12051,7 +11931,7 @@
         </p:nvSpPr>
         <p:spPr>
           <a:xfrm>
-            <a:off x="2552684" y="4102100"/>
+            <a:off x="1377934" y="4111336"/>
             <a:ext cx="603250" cy="203200"/>
           </a:xfrm>
           <a:prstGeom prst="rect">
@@ -12060,7 +11940,7 @@
           <a:noFill/>
         </p:spPr>
         <p:txBody>
-          <a:bodyPr wrap="square" lIns="0" rIns="0" tIns="0" bIns="0" anchor="t">
+          <a:bodyPr wrap="square" lIns="0" tIns="0" rIns="0" bIns="0" anchor="t">
             <a:spAutoFit/>
           </a:bodyPr>
           <a:lstStyle/>
@@ -12090,7 +11970,7 @@
         </p:nvSpPr>
         <p:spPr>
           <a:xfrm>
-            <a:off x="4698984" y="2286000"/>
+            <a:off x="4352909" y="2295236"/>
             <a:ext cx="2794000" cy="2794000"/>
           </a:xfrm>
           <a:prstGeom prst="roundRect">
@@ -12127,6 +12007,7 @@
           <a:lstStyle/>
           <a:p>
             <a:pPr algn="ctr"/>
+            <a:endParaRPr/>
           </a:p>
         </p:txBody>
       </p:sp>
@@ -12138,7 +12019,7 @@
         </p:nvSpPr>
         <p:spPr>
           <a:xfrm>
-            <a:off x="4825984" y="2565400"/>
+            <a:off x="4479909" y="2574636"/>
             <a:ext cx="2540000" cy="279400"/>
           </a:xfrm>
           <a:prstGeom prst="rect">
@@ -12147,7 +12028,7 @@
           <a:noFill/>
         </p:spPr>
         <p:txBody>
-          <a:bodyPr wrap="square" lIns="0" rIns="0" tIns="0" bIns="0" anchor="t">
+          <a:bodyPr wrap="square" lIns="0" tIns="0" rIns="0" bIns="0" anchor="t">
             <a:spAutoFit/>
           </a:bodyPr>
           <a:lstStyle/>
@@ -12177,7 +12058,7 @@
         </p:nvSpPr>
         <p:spPr>
           <a:xfrm>
-            <a:off x="4825984" y="2984500"/>
+            <a:off x="4479909" y="2993736"/>
             <a:ext cx="2540000" cy="508000"/>
           </a:xfrm>
           <a:prstGeom prst="rect">
@@ -12186,7 +12067,7 @@
           <a:noFill/>
         </p:spPr>
         <p:txBody>
-          <a:bodyPr wrap="square" lIns="0" rIns="0" tIns="0" bIns="0" anchor="t">
+          <a:bodyPr wrap="square" lIns="0" tIns="0" rIns="0" bIns="0" anchor="t">
             <a:spAutoFit/>
           </a:bodyPr>
           <a:lstStyle/>
@@ -12232,7 +12113,7 @@
         </p:nvSpPr>
         <p:spPr>
           <a:xfrm>
-            <a:off x="4851384" y="3746500"/>
+            <a:off x="4540234" y="3762086"/>
             <a:ext cx="882650" cy="266700"/>
           </a:xfrm>
           <a:prstGeom prst="roundRect">
@@ -12267,6 +12148,7 @@
           <a:lstStyle/>
           <a:p>
             <a:pPr algn="ctr"/>
+            <a:endParaRPr/>
           </a:p>
         </p:txBody>
       </p:sp>
@@ -12278,7 +12160,7 @@
         </p:nvSpPr>
         <p:spPr>
           <a:xfrm>
-            <a:off x="4851384" y="3784600"/>
+            <a:off x="4505309" y="3793836"/>
             <a:ext cx="882650" cy="203200"/>
           </a:xfrm>
           <a:prstGeom prst="rect">
@@ -12287,7 +12169,7 @@
           <a:noFill/>
         </p:spPr>
         <p:txBody>
-          <a:bodyPr wrap="square" lIns="0" rIns="0" tIns="0" bIns="0" anchor="t">
+          <a:bodyPr wrap="square" lIns="0" tIns="0" rIns="0" bIns="0" anchor="t">
             <a:spAutoFit/>
           </a:bodyPr>
           <a:lstStyle/>
@@ -12317,7 +12199,7 @@
         </p:nvSpPr>
         <p:spPr>
           <a:xfrm>
-            <a:off x="5797534" y="3746500"/>
+            <a:off x="5486384" y="3762086"/>
             <a:ext cx="812800" cy="266700"/>
           </a:xfrm>
           <a:prstGeom prst="roundRect">
@@ -12352,6 +12234,7 @@
           <a:lstStyle/>
           <a:p>
             <a:pPr algn="ctr"/>
+            <a:endParaRPr/>
           </a:p>
         </p:txBody>
       </p:sp>
@@ -12363,7 +12246,7 @@
         </p:nvSpPr>
         <p:spPr>
           <a:xfrm>
-            <a:off x="5797534" y="3784600"/>
+            <a:off x="5451459" y="3793836"/>
             <a:ext cx="812800" cy="203200"/>
           </a:xfrm>
           <a:prstGeom prst="rect">
@@ -12372,7 +12255,7 @@
           <a:noFill/>
         </p:spPr>
         <p:txBody>
-          <a:bodyPr wrap="square" lIns="0" rIns="0" tIns="0" bIns="0" anchor="t">
+          <a:bodyPr wrap="square" lIns="0" tIns="0" rIns="0" bIns="0" anchor="t">
             <a:spAutoFit/>
           </a:bodyPr>
           <a:lstStyle/>
@@ -12402,7 +12285,7 @@
         </p:nvSpPr>
         <p:spPr>
           <a:xfrm>
-            <a:off x="4851384" y="4064000"/>
+            <a:off x="4540234" y="4079586"/>
             <a:ext cx="952500" cy="266700"/>
           </a:xfrm>
           <a:prstGeom prst="roundRect">
@@ -12437,6 +12320,7 @@
           <a:lstStyle/>
           <a:p>
             <a:pPr algn="ctr"/>
+            <a:endParaRPr/>
           </a:p>
         </p:txBody>
       </p:sp>
@@ -12448,7 +12332,7 @@
         </p:nvSpPr>
         <p:spPr>
           <a:xfrm>
-            <a:off x="4851384" y="4102100"/>
+            <a:off x="4505309" y="4111336"/>
             <a:ext cx="952500" cy="203200"/>
           </a:xfrm>
           <a:prstGeom prst="rect">
@@ -12457,7 +12341,7 @@
           <a:noFill/>
         </p:spPr>
         <p:txBody>
-          <a:bodyPr wrap="square" lIns="0" rIns="0" tIns="0" bIns="0" anchor="t">
+          <a:bodyPr wrap="square" lIns="0" tIns="0" rIns="0" bIns="0" anchor="t">
             <a:spAutoFit/>
           </a:bodyPr>
           <a:lstStyle/>
@@ -12487,7 +12371,7 @@
         </p:nvSpPr>
         <p:spPr>
           <a:xfrm>
-            <a:off x="5867384" y="4064000"/>
+            <a:off x="5556234" y="4079586"/>
             <a:ext cx="742950" cy="266700"/>
           </a:xfrm>
           <a:prstGeom prst="roundRect">
@@ -12522,6 +12406,7 @@
           <a:lstStyle/>
           <a:p>
             <a:pPr algn="ctr"/>
+            <a:endParaRPr/>
           </a:p>
         </p:txBody>
       </p:sp>
@@ -12533,7 +12418,7 @@
         </p:nvSpPr>
         <p:spPr>
           <a:xfrm>
-            <a:off x="5867384" y="4102100"/>
+            <a:off x="5521309" y="4111336"/>
             <a:ext cx="742950" cy="203200"/>
           </a:xfrm>
           <a:prstGeom prst="rect">
@@ -12542,7 +12427,7 @@
           <a:noFill/>
         </p:spPr>
         <p:txBody>
-          <a:bodyPr wrap="square" lIns="0" rIns="0" tIns="0" bIns="0" anchor="t">
+          <a:bodyPr wrap="square" lIns="0" tIns="0" rIns="0" bIns="0" anchor="t">
             <a:spAutoFit/>
           </a:bodyPr>
           <a:lstStyle/>
@@ -12572,7 +12457,7 @@
         </p:nvSpPr>
         <p:spPr>
           <a:xfrm>
-            <a:off x="4851384" y="4381500"/>
+            <a:off x="4540234" y="4397086"/>
             <a:ext cx="882650" cy="266700"/>
           </a:xfrm>
           <a:prstGeom prst="roundRect">
@@ -12607,6 +12492,7 @@
           <a:lstStyle/>
           <a:p>
             <a:pPr algn="ctr"/>
+            <a:endParaRPr/>
           </a:p>
         </p:txBody>
       </p:sp>
@@ -12618,7 +12504,7 @@
         </p:nvSpPr>
         <p:spPr>
           <a:xfrm>
-            <a:off x="4851384" y="4419600"/>
+            <a:off x="4505309" y="4428836"/>
             <a:ext cx="882650" cy="203200"/>
           </a:xfrm>
           <a:prstGeom prst="rect">
@@ -12627,7 +12513,7 @@
           <a:noFill/>
         </p:spPr>
         <p:txBody>
-          <a:bodyPr wrap="square" lIns="0" rIns="0" tIns="0" bIns="0" anchor="t">
+          <a:bodyPr wrap="square" lIns="0" tIns="0" rIns="0" bIns="0" anchor="t">
             <a:spAutoFit/>
           </a:bodyPr>
           <a:lstStyle/>
@@ -12657,7 +12543,7 @@
         </p:nvSpPr>
         <p:spPr>
           <a:xfrm>
-            <a:off x="7873984" y="2286000"/>
+            <a:off x="8272439" y="2295236"/>
             <a:ext cx="2794000" cy="2794000"/>
           </a:xfrm>
           <a:prstGeom prst="roundRect">
@@ -12694,6 +12580,7 @@
           <a:lstStyle/>
           <a:p>
             <a:pPr algn="ctr"/>
+            <a:endParaRPr/>
           </a:p>
         </p:txBody>
       </p:sp>
@@ -12705,7 +12592,7 @@
         </p:nvSpPr>
         <p:spPr>
           <a:xfrm>
-            <a:off x="8000984" y="2565400"/>
+            <a:off x="8399439" y="2574636"/>
             <a:ext cx="2540000" cy="279400"/>
           </a:xfrm>
           <a:prstGeom prst="rect">
@@ -12714,7 +12601,7 @@
           <a:noFill/>
         </p:spPr>
         <p:txBody>
-          <a:bodyPr wrap="square" lIns="0" rIns="0" tIns="0" bIns="0" anchor="t">
+          <a:bodyPr wrap="square" lIns="0" tIns="0" rIns="0" bIns="0" anchor="t">
             <a:spAutoFit/>
           </a:bodyPr>
           <a:lstStyle/>
@@ -12744,7 +12631,7 @@
         </p:nvSpPr>
         <p:spPr>
           <a:xfrm>
-            <a:off x="8000984" y="2984500"/>
+            <a:off x="8399439" y="2993736"/>
             <a:ext cx="2540000" cy="508000"/>
           </a:xfrm>
           <a:prstGeom prst="rect">
@@ -12753,7 +12640,7 @@
           <a:noFill/>
         </p:spPr>
         <p:txBody>
-          <a:bodyPr wrap="square" lIns="0" rIns="0" tIns="0" bIns="0" anchor="t">
+          <a:bodyPr wrap="square" lIns="0" tIns="0" rIns="0" bIns="0" anchor="t">
             <a:spAutoFit/>
           </a:bodyPr>
           <a:lstStyle/>
@@ -12799,7 +12686,7 @@
         </p:nvSpPr>
         <p:spPr>
           <a:xfrm>
-            <a:off x="8026384" y="3746500"/>
+            <a:off x="8416909" y="3749963"/>
             <a:ext cx="1301750" cy="266700"/>
           </a:xfrm>
           <a:prstGeom prst="roundRect">
@@ -12834,6 +12721,7 @@
           <a:lstStyle/>
           <a:p>
             <a:pPr algn="ctr"/>
+            <a:endParaRPr/>
           </a:p>
         </p:txBody>
       </p:sp>
@@ -12845,7 +12733,7 @@
         </p:nvSpPr>
         <p:spPr>
           <a:xfrm>
-            <a:off x="8026384" y="3784600"/>
+            <a:off x="8424839" y="3793836"/>
             <a:ext cx="1301750" cy="203200"/>
           </a:xfrm>
           <a:prstGeom prst="rect">
@@ -12854,7 +12742,7 @@
           <a:noFill/>
         </p:spPr>
         <p:txBody>
-          <a:bodyPr wrap="square" lIns="0" rIns="0" tIns="0" bIns="0" anchor="t">
+          <a:bodyPr wrap="square" lIns="0" tIns="0" rIns="0" bIns="0" anchor="t">
             <a:spAutoFit/>
           </a:bodyPr>
           <a:lstStyle/>
@@ -12884,7 +12772,7 @@
         </p:nvSpPr>
         <p:spPr>
           <a:xfrm>
-            <a:off x="9391634" y="3746500"/>
+            <a:off x="9812009" y="3743036"/>
             <a:ext cx="952500" cy="266700"/>
           </a:xfrm>
           <a:prstGeom prst="roundRect">
@@ -12919,6 +12807,7 @@
           <a:lstStyle/>
           <a:p>
             <a:pPr algn="ctr"/>
+            <a:endParaRPr/>
           </a:p>
         </p:txBody>
       </p:sp>
@@ -12930,7 +12819,7 @@
         </p:nvSpPr>
         <p:spPr>
           <a:xfrm>
-            <a:off x="9391634" y="3784600"/>
+            <a:off x="9790089" y="3793836"/>
             <a:ext cx="952500" cy="203200"/>
           </a:xfrm>
           <a:prstGeom prst="rect">
@@ -12939,7 +12828,7 @@
           <a:noFill/>
         </p:spPr>
         <p:txBody>
-          <a:bodyPr wrap="square" lIns="0" rIns="0" tIns="0" bIns="0" anchor="t">
+          <a:bodyPr wrap="square" lIns="0" tIns="0" rIns="0" bIns="0" anchor="t">
             <a:spAutoFit/>
           </a:bodyPr>
           <a:lstStyle/>
@@ -12969,7 +12858,7 @@
         </p:nvSpPr>
         <p:spPr>
           <a:xfrm>
-            <a:off x="8026384" y="4064000"/>
+            <a:off x="8416909" y="4067463"/>
             <a:ext cx="1162050" cy="266700"/>
           </a:xfrm>
           <a:prstGeom prst="roundRect">
@@ -13004,6 +12893,7 @@
           <a:lstStyle/>
           <a:p>
             <a:pPr algn="ctr"/>
+            <a:endParaRPr/>
           </a:p>
         </p:txBody>
       </p:sp>
@@ -13015,7 +12905,7 @@
         </p:nvSpPr>
         <p:spPr>
           <a:xfrm>
-            <a:off x="8026384" y="4102100"/>
+            <a:off x="8424839" y="4111336"/>
             <a:ext cx="1162050" cy="203200"/>
           </a:xfrm>
           <a:prstGeom prst="rect">
@@ -13024,7 +12914,7 @@
           <a:noFill/>
         </p:spPr>
         <p:txBody>
-          <a:bodyPr wrap="square" lIns="0" rIns="0" tIns="0" bIns="0" anchor="t">
+          <a:bodyPr wrap="square" lIns="0" tIns="0" rIns="0" bIns="0" anchor="t">
             <a:spAutoFit/>
           </a:bodyPr>
           <a:lstStyle/>
@@ -13035,7 +12925,7 @@
               </a:lnSpc>
             </a:pPr>
             <a:r>
-              <a:rPr sz="1100" b="0" i="0">
+              <a:rPr sz="1100" b="0" i="0" dirty="0">
                 <a:solidFill>
                   <a:srgbClr val="DEBB6E"/>
                 </a:solidFill>
@@ -13054,7 +12944,7 @@
         </p:nvSpPr>
         <p:spPr>
           <a:xfrm>
-            <a:off x="3809984" y="3238500"/>
+            <a:off x="3067034" y="3479799"/>
             <a:ext cx="1397000" cy="228600"/>
           </a:xfrm>
           <a:prstGeom prst="rect">
@@ -13063,7 +12953,7 @@
           <a:noFill/>
         </p:spPr>
         <p:txBody>
-          <a:bodyPr wrap="square" lIns="0" rIns="0" tIns="0" bIns="0" anchor="t">
+          <a:bodyPr wrap="square" lIns="0" tIns="0" rIns="0" bIns="0" anchor="t">
             <a:spAutoFit/>
           </a:bodyPr>
           <a:lstStyle/>
@@ -13074,7 +12964,7 @@
               </a:lnSpc>
             </a:pPr>
             <a:r>
-              <a:rPr sz="1100" b="1" i="0">
+              <a:rPr sz="1100" b="1" i="0" dirty="0">
                 <a:solidFill>
                   <a:srgbClr val="6CB8DA"/>
                 </a:solidFill>
@@ -13093,16 +12983,16 @@
         </p:nvSpPr>
         <p:spPr>
           <a:xfrm>
-            <a:off x="3809984" y="3937000"/>
-            <a:ext cx="1397000" cy="228600"/>
-          </a:xfrm>
-          <a:prstGeom prst="rect">
-            <a:avLst/>
-          </a:prstGeom>
-          <a:noFill/>
-        </p:spPr>
-        <p:txBody>
-          <a:bodyPr wrap="square" lIns="0" rIns="0" tIns="0" bIns="0" anchor="t">
+            <a:off x="3143234" y="3807115"/>
+            <a:ext cx="1085850" cy="346313"/>
+          </a:xfrm>
+          <a:prstGeom prst="rect">
+            <a:avLst/>
+          </a:prstGeom>
+          <a:noFill/>
+        </p:spPr>
+        <p:txBody>
+          <a:bodyPr wrap="square" lIns="0" tIns="0" rIns="0" bIns="0" anchor="t">
             <a:spAutoFit/>
           </a:bodyPr>
           <a:lstStyle/>
@@ -13113,7 +13003,7 @@
               </a:lnSpc>
             </a:pPr>
             <a:r>
-              <a:rPr sz="1000" b="0" i="1">
+              <a:rPr sz="1000" b="0" i="1" dirty="0">
                 <a:solidFill>
                   <a:srgbClr val="9AA3B0"/>
                 </a:solidFill>
@@ -13127,13 +13017,15 @@
       <p:cxnSp>
         <p:nvCxnSpPr>
           <p:cNvPr id="42" name="Connector 41"/>
-          <p:cNvCxnSpPr/>
+          <p:cNvCxnSpPr>
+            <a:cxnSpLocks/>
+          </p:cNvCxnSpPr>
           <p:nvPr/>
         </p:nvCxnSpPr>
         <p:spPr>
           <a:xfrm>
-            <a:off x="4330684" y="3683000"/>
-            <a:ext cx="355600" cy="0"/>
+            <a:off x="3143234" y="3746500"/>
+            <a:ext cx="1197857" cy="0"/>
           </a:xfrm>
           <a:prstGeom prst="line">
             <a:avLst/>
@@ -13177,7 +13069,7 @@
           <a:noFill/>
         </p:spPr>
         <p:txBody>
-          <a:bodyPr wrap="square" lIns="0" rIns="0" tIns="0" bIns="0" anchor="t">
+          <a:bodyPr wrap="square" lIns="0" tIns="0" rIns="0" bIns="0" anchor="t">
             <a:spAutoFit/>
           </a:bodyPr>
           <a:lstStyle/>
@@ -13207,16 +13099,16 @@
         </p:nvSpPr>
         <p:spPr>
           <a:xfrm>
-            <a:off x="6984984" y="3937000"/>
-            <a:ext cx="1397000" cy="228600"/>
-          </a:xfrm>
-          <a:prstGeom prst="rect">
-            <a:avLst/>
-          </a:prstGeom>
-          <a:noFill/>
-        </p:spPr>
-        <p:txBody>
-          <a:bodyPr wrap="square" lIns="0" rIns="0" tIns="0" bIns="0" anchor="t">
+            <a:off x="7073884" y="3761870"/>
+            <a:ext cx="1279525" cy="169342"/>
+          </a:xfrm>
+          <a:prstGeom prst="rect">
+            <a:avLst/>
+          </a:prstGeom>
+          <a:noFill/>
+        </p:spPr>
+        <p:txBody>
+          <a:bodyPr wrap="square" lIns="0" tIns="0" rIns="0" bIns="0" anchor="t">
             <a:spAutoFit/>
           </a:bodyPr>
           <a:lstStyle/>
@@ -13227,13 +13119,31 @@
               </a:lnSpc>
             </a:pPr>
             <a:r>
-              <a:rPr sz="1000" b="0" i="1">
+              <a:rPr sz="1000" b="0" i="1" dirty="0">
                 <a:solidFill>
                   <a:srgbClr val="9AA3B0"/>
                 </a:solidFill>
                 <a:latin typeface="DM Sans"/>
               </a:rPr>
-              <a:t>signed tx + receipt</a:t>
+              <a:t>signed </a:t>
+            </a:r>
+            <a:r>
+              <a:rPr sz="1000" b="0" i="1" dirty="0" err="1">
+                <a:solidFill>
+                  <a:srgbClr val="9AA3B0"/>
+                </a:solidFill>
+                <a:latin typeface="DM Sans"/>
+              </a:rPr>
+              <a:t>tx</a:t>
+            </a:r>
+            <a:r>
+              <a:rPr sz="1000" b="0" i="1" dirty="0">
+                <a:solidFill>
+                  <a:srgbClr val="9AA3B0"/>
+                </a:solidFill>
+                <a:latin typeface="DM Sans"/>
+              </a:rPr>
+              <a:t> + receipt</a:t>
             </a:r>
           </a:p>
         </p:txBody>
@@ -13241,13 +13151,16 @@
       <p:cxnSp>
         <p:nvCxnSpPr>
           <p:cNvPr id="45" name="Connector 44"/>
-          <p:cNvCxnSpPr/>
+          <p:cNvCxnSpPr>
+            <a:cxnSpLocks/>
+            <a:stCxn id="18" idx="3"/>
+          </p:cNvCxnSpPr>
           <p:nvPr/>
         </p:nvCxnSpPr>
         <p:spPr>
-          <a:xfrm>
-            <a:off x="7505684" y="3683000"/>
-            <a:ext cx="355600" cy="0"/>
+          <a:xfrm flipV="1">
+            <a:off x="7146909" y="3683000"/>
+            <a:ext cx="1125530" cy="9236"/>
           </a:xfrm>
           <a:prstGeom prst="line">
             <a:avLst/>
@@ -13291,7 +13204,7 @@
           <a:noFill/>
         </p:spPr>
         <p:txBody>
-          <a:bodyPr wrap="square" lIns="0" rIns="0" tIns="0" bIns="0" anchor="t">
+          <a:bodyPr wrap="square" lIns="0" tIns="0" rIns="0" bIns="0" anchor="t">
             <a:spAutoFit/>
           </a:bodyPr>
           <a:lstStyle/>
@@ -13322,7 +13235,7 @@
 </file>
 
 <file path=ppt/slides/slide4.xml><?xml version="1.0" encoding="utf-8"?>
-<p:sld xmlns:a="http://schemas.openxmlformats.org/drawingml/2006/main" xmlns:p="http://schemas.openxmlformats.org/presentationml/2006/main" xmlns:r="http://schemas.openxmlformats.org/officeDocument/2006/relationships">
+<p:sld xmlns:a="http://schemas.openxmlformats.org/drawingml/2006/main" xmlns:r="http://schemas.openxmlformats.org/officeDocument/2006/relationships" xmlns:p="http://schemas.openxmlformats.org/presentationml/2006/main">
   <p:cSld>
     <p:spTree>
       <p:nvGrpSpPr>
@@ -13330,7 +13243,14 @@
         <p:cNvGrpSpPr/>
         <p:nvPr/>
       </p:nvGrpSpPr>
-      <p:grpSpPr/>
+      <p:grpSpPr>
+        <a:xfrm>
+          <a:off x="0" y="0"/>
+          <a:ext cx="0" cy="0"/>
+          <a:chOff x="0" y="0"/>
+          <a:chExt cx="0" cy="0"/>
+        </a:xfrm>
+      </p:grpSpPr>
       <p:sp>
         <p:nvSpPr>
           <p:cNvPr id="2" name="Rectangle 1"/>
@@ -13372,6 +13292,7 @@
           <a:lstStyle/>
           <a:p>
             <a:pPr algn="ctr"/>
+            <a:endParaRPr/>
           </a:p>
         </p:txBody>
       </p:sp>
@@ -13392,7 +13313,7 @@
           <a:noFill/>
         </p:spPr>
         <p:txBody>
-          <a:bodyPr wrap="square" lIns="0" rIns="0" tIns="0" bIns="0" anchor="t">
+          <a:bodyPr wrap="square" lIns="0" tIns="0" rIns="0" bIns="0" anchor="t">
             <a:spAutoFit/>
           </a:bodyPr>
           <a:lstStyle/>
@@ -13431,7 +13352,7 @@
           <a:noFill/>
         </p:spPr>
         <p:txBody>
-          <a:bodyPr wrap="square" lIns="0" rIns="0" tIns="0" bIns="0" anchor="t">
+          <a:bodyPr wrap="square" lIns="0" tIns="0" rIns="0" bIns="0" anchor="t">
             <a:spAutoFit/>
           </a:bodyPr>
           <a:lstStyle/>
@@ -13494,6 +13415,7 @@
           <a:lstStyle/>
           <a:p>
             <a:pPr algn="ctr"/>
+            <a:endParaRPr/>
           </a:p>
         </p:txBody>
       </p:sp>
@@ -13540,6 +13462,7 @@
           <a:lstStyle/>
           <a:p>
             <a:pPr algn="ctr"/>
+            <a:endParaRPr/>
           </a:p>
         </p:txBody>
       </p:sp>
@@ -13560,7 +13483,7 @@
           <a:noFill/>
         </p:spPr>
         <p:txBody>
-          <a:bodyPr wrap="square" lIns="0" rIns="0" tIns="0" bIns="0" anchor="t">
+          <a:bodyPr wrap="square" lIns="0" tIns="0" rIns="0" bIns="0" anchor="t">
             <a:spAutoFit/>
           </a:bodyPr>
           <a:lstStyle/>
@@ -13627,6 +13550,7 @@
           <a:lstStyle/>
           <a:p>
             <a:pPr algn="ctr"/>
+            <a:endParaRPr/>
           </a:p>
         </p:txBody>
       </p:sp>
@@ -13647,7 +13571,7 @@
           <a:noFill/>
         </p:spPr>
         <p:txBody>
-          <a:bodyPr wrap="square" lIns="0" rIns="0" tIns="0" bIns="0" anchor="t">
+          <a:bodyPr wrap="square" lIns="0" tIns="0" rIns="0" bIns="0" anchor="t">
             <a:spAutoFit/>
           </a:bodyPr>
           <a:lstStyle/>
@@ -13686,7 +13610,7 @@
           <a:noFill/>
         </p:spPr>
         <p:txBody>
-          <a:bodyPr wrap="square" lIns="0" rIns="0" tIns="0" bIns="0" anchor="t">
+          <a:bodyPr wrap="square" lIns="0" tIns="0" rIns="0" bIns="0" anchor="t">
             <a:spAutoFit/>
           </a:bodyPr>
           <a:lstStyle/>
@@ -13725,7 +13649,7 @@
           <a:noFill/>
         </p:spPr>
         <p:txBody>
-          <a:bodyPr wrap="square" lIns="0" rIns="0" tIns="0" bIns="0" anchor="t">
+          <a:bodyPr wrap="square" lIns="0" tIns="0" rIns="0" bIns="0" anchor="t">
             <a:spAutoFit/>
           </a:bodyPr>
           <a:lstStyle/>
@@ -13764,7 +13688,7 @@
           <a:noFill/>
         </p:spPr>
         <p:txBody>
-          <a:bodyPr wrap="square" lIns="0" rIns="0" tIns="0" bIns="0" anchor="t">
+          <a:bodyPr wrap="square" lIns="0" tIns="0" rIns="0" bIns="0" anchor="t">
             <a:spAutoFit/>
           </a:bodyPr>
           <a:lstStyle/>
@@ -13803,7 +13727,7 @@
           <a:noFill/>
         </p:spPr>
         <p:txBody>
-          <a:bodyPr wrap="square" lIns="0" rIns="0" tIns="0" bIns="0" anchor="t">
+          <a:bodyPr wrap="square" lIns="0" tIns="0" rIns="0" bIns="0" anchor="t">
             <a:spAutoFit/>
           </a:bodyPr>
           <a:lstStyle/>
@@ -13842,7 +13766,7 @@
           <a:noFill/>
         </p:spPr>
         <p:txBody>
-          <a:bodyPr wrap="square" lIns="0" rIns="0" tIns="0" bIns="0" anchor="t">
+          <a:bodyPr wrap="square" lIns="0" tIns="0" rIns="0" bIns="0" anchor="t">
             <a:spAutoFit/>
           </a:bodyPr>
           <a:lstStyle/>
@@ -13881,7 +13805,7 @@
           <a:noFill/>
         </p:spPr>
         <p:txBody>
-          <a:bodyPr wrap="square" lIns="0" rIns="0" tIns="0" bIns="0" anchor="t">
+          <a:bodyPr wrap="square" lIns="0" tIns="0" rIns="0" bIns="0" anchor="t">
             <a:spAutoFit/>
           </a:bodyPr>
           <a:lstStyle/>
@@ -13920,7 +13844,7 @@
           <a:noFill/>
         </p:spPr>
         <p:txBody>
-          <a:bodyPr wrap="square" lIns="0" rIns="0" tIns="0" bIns="0" anchor="t">
+          <a:bodyPr wrap="square" lIns="0" tIns="0" rIns="0" bIns="0" anchor="t">
             <a:spAutoFit/>
           </a:bodyPr>
           <a:lstStyle/>
@@ -13959,7 +13883,7 @@
           <a:noFill/>
         </p:spPr>
         <p:txBody>
-          <a:bodyPr wrap="square" lIns="0" rIns="0" tIns="0" bIns="0" anchor="t">
+          <a:bodyPr wrap="square" lIns="0" tIns="0" rIns="0" bIns="0" anchor="t">
             <a:spAutoFit/>
           </a:bodyPr>
           <a:lstStyle/>
@@ -14022,6 +13946,7 @@
           <a:lstStyle/>
           <a:p>
             <a:pPr algn="ctr"/>
+            <a:endParaRPr/>
           </a:p>
         </p:txBody>
       </p:sp>
@@ -14068,6 +13993,7 @@
           <a:lstStyle/>
           <a:p>
             <a:pPr algn="ctr"/>
+            <a:endParaRPr/>
           </a:p>
         </p:txBody>
       </p:sp>
@@ -14088,7 +14014,7 @@
           <a:noFill/>
         </p:spPr>
         <p:txBody>
-          <a:bodyPr wrap="square" lIns="0" rIns="0" tIns="0" bIns="0" anchor="t">
+          <a:bodyPr wrap="square" lIns="0" tIns="0" rIns="0" bIns="0" anchor="t">
             <a:spAutoFit/>
           </a:bodyPr>
           <a:lstStyle/>
@@ -14155,6 +14081,7 @@
           <a:lstStyle/>
           <a:p>
             <a:pPr algn="ctr"/>
+            <a:endParaRPr/>
           </a:p>
         </p:txBody>
       </p:sp>
@@ -14175,7 +14102,7 @@
           <a:noFill/>
         </p:spPr>
         <p:txBody>
-          <a:bodyPr wrap="square" lIns="0" rIns="0" tIns="0" bIns="0" anchor="t">
+          <a:bodyPr wrap="square" lIns="0" tIns="0" rIns="0" bIns="0" anchor="t">
             <a:spAutoFit/>
           </a:bodyPr>
           <a:lstStyle/>
@@ -14214,7 +14141,7 @@
           <a:noFill/>
         </p:spPr>
         <p:txBody>
-          <a:bodyPr wrap="square" lIns="0" rIns="0" tIns="0" bIns="0" anchor="t">
+          <a:bodyPr wrap="square" lIns="0" tIns="0" rIns="0" bIns="0" anchor="t">
             <a:spAutoFit/>
           </a:bodyPr>
           <a:lstStyle/>
@@ -14253,7 +14180,7 @@
           <a:noFill/>
         </p:spPr>
         <p:txBody>
-          <a:bodyPr wrap="square" lIns="0" rIns="0" tIns="0" bIns="0" anchor="t">
+          <a:bodyPr wrap="square" lIns="0" tIns="0" rIns="0" bIns="0" anchor="t">
             <a:spAutoFit/>
           </a:bodyPr>
           <a:lstStyle/>
@@ -14292,7 +14219,7 @@
           <a:noFill/>
         </p:spPr>
         <p:txBody>
-          <a:bodyPr wrap="square" lIns="0" rIns="0" tIns="0" bIns="0" anchor="t">
+          <a:bodyPr wrap="square" lIns="0" tIns="0" rIns="0" bIns="0" anchor="t">
             <a:spAutoFit/>
           </a:bodyPr>
           <a:lstStyle/>
@@ -14331,7 +14258,7 @@
           <a:noFill/>
         </p:spPr>
         <p:txBody>
-          <a:bodyPr wrap="square" lIns="0" rIns="0" tIns="0" bIns="0" anchor="t">
+          <a:bodyPr wrap="square" lIns="0" tIns="0" rIns="0" bIns="0" anchor="t">
             <a:spAutoFit/>
           </a:bodyPr>
           <a:lstStyle/>
@@ -14370,7 +14297,7 @@
           <a:noFill/>
         </p:spPr>
         <p:txBody>
-          <a:bodyPr wrap="square" lIns="0" rIns="0" tIns="0" bIns="0" anchor="t">
+          <a:bodyPr wrap="square" lIns="0" tIns="0" rIns="0" bIns="0" anchor="t">
             <a:spAutoFit/>
           </a:bodyPr>
           <a:lstStyle/>
@@ -14409,7 +14336,7 @@
           <a:noFill/>
         </p:spPr>
         <p:txBody>
-          <a:bodyPr wrap="square" lIns="0" rIns="0" tIns="0" bIns="0" anchor="t">
+          <a:bodyPr wrap="square" lIns="0" tIns="0" rIns="0" bIns="0" anchor="t">
             <a:spAutoFit/>
           </a:bodyPr>
           <a:lstStyle/>
@@ -14448,7 +14375,7 @@
           <a:noFill/>
         </p:spPr>
         <p:txBody>
-          <a:bodyPr wrap="square" lIns="0" rIns="0" tIns="0" bIns="0" anchor="t">
+          <a:bodyPr wrap="square" lIns="0" tIns="0" rIns="0" bIns="0" anchor="t">
             <a:spAutoFit/>
           </a:bodyPr>
           <a:lstStyle/>
@@ -14487,7 +14414,7 @@
           <a:noFill/>
         </p:spPr>
         <p:txBody>
-          <a:bodyPr wrap="square" lIns="0" rIns="0" tIns="0" bIns="0" anchor="t">
+          <a:bodyPr wrap="square" lIns="0" tIns="0" rIns="0" bIns="0" anchor="t">
             <a:spAutoFit/>
           </a:bodyPr>
           <a:lstStyle/>
@@ -14550,6 +14477,7 @@
           <a:lstStyle/>
           <a:p>
             <a:pPr algn="ctr"/>
+            <a:endParaRPr/>
           </a:p>
         </p:txBody>
       </p:sp>
@@ -14596,6 +14524,7 @@
           <a:lstStyle/>
           <a:p>
             <a:pPr algn="ctr"/>
+            <a:endParaRPr/>
           </a:p>
         </p:txBody>
       </p:sp>
@@ -14616,7 +14545,7 @@
           <a:noFill/>
         </p:spPr>
         <p:txBody>
-          <a:bodyPr wrap="square" lIns="0" rIns="0" tIns="0" bIns="0" anchor="t">
+          <a:bodyPr wrap="square" lIns="0" tIns="0" rIns="0" bIns="0" anchor="t">
             <a:spAutoFit/>
           </a:bodyPr>
           <a:lstStyle/>
@@ -14683,6 +14612,7 @@
           <a:lstStyle/>
           <a:p>
             <a:pPr algn="ctr"/>
+            <a:endParaRPr/>
           </a:p>
         </p:txBody>
       </p:sp>
@@ -14703,7 +14633,7 @@
           <a:noFill/>
         </p:spPr>
         <p:txBody>
-          <a:bodyPr wrap="square" lIns="0" rIns="0" tIns="0" bIns="0" anchor="t">
+          <a:bodyPr wrap="square" lIns="0" tIns="0" rIns="0" bIns="0" anchor="t">
             <a:spAutoFit/>
           </a:bodyPr>
           <a:lstStyle/>
@@ -14742,7 +14672,7 @@
           <a:noFill/>
         </p:spPr>
         <p:txBody>
-          <a:bodyPr wrap="square" lIns="0" rIns="0" tIns="0" bIns="0" anchor="t">
+          <a:bodyPr wrap="square" lIns="0" tIns="0" rIns="0" bIns="0" anchor="t">
             <a:spAutoFit/>
           </a:bodyPr>
           <a:lstStyle/>
@@ -14781,7 +14711,7 @@
           <a:noFill/>
         </p:spPr>
         <p:txBody>
-          <a:bodyPr wrap="square" lIns="0" rIns="0" tIns="0" bIns="0" anchor="t">
+          <a:bodyPr wrap="square" lIns="0" tIns="0" rIns="0" bIns="0" anchor="t">
             <a:spAutoFit/>
           </a:bodyPr>
           <a:lstStyle/>
@@ -14820,7 +14750,7 @@
           <a:noFill/>
         </p:spPr>
         <p:txBody>
-          <a:bodyPr wrap="square" lIns="0" rIns="0" tIns="0" bIns="0" anchor="t">
+          <a:bodyPr wrap="square" lIns="0" tIns="0" rIns="0" bIns="0" anchor="t">
             <a:spAutoFit/>
           </a:bodyPr>
           <a:lstStyle/>
@@ -14859,7 +14789,7 @@
           <a:noFill/>
         </p:spPr>
         <p:txBody>
-          <a:bodyPr wrap="square" lIns="0" rIns="0" tIns="0" bIns="0" anchor="t">
+          <a:bodyPr wrap="square" lIns="0" tIns="0" rIns="0" bIns="0" anchor="t">
             <a:spAutoFit/>
           </a:bodyPr>
           <a:lstStyle/>
@@ -14898,7 +14828,7 @@
           <a:noFill/>
         </p:spPr>
         <p:txBody>
-          <a:bodyPr wrap="square" lIns="0" rIns="0" tIns="0" bIns="0" anchor="t">
+          <a:bodyPr wrap="square" lIns="0" tIns="0" rIns="0" bIns="0" anchor="t">
             <a:spAutoFit/>
           </a:bodyPr>
           <a:lstStyle/>
@@ -14937,7 +14867,7 @@
           <a:noFill/>
         </p:spPr>
         <p:txBody>
-          <a:bodyPr wrap="square" lIns="0" rIns="0" tIns="0" bIns="0" anchor="t">
+          <a:bodyPr wrap="square" lIns="0" tIns="0" rIns="0" bIns="0" anchor="t">
             <a:spAutoFit/>
           </a:bodyPr>
           <a:lstStyle/>
@@ -14976,7 +14906,7 @@
           <a:noFill/>
         </p:spPr>
         <p:txBody>
-          <a:bodyPr wrap="square" lIns="0" rIns="0" tIns="0" bIns="0" anchor="t">
+          <a:bodyPr wrap="square" lIns="0" tIns="0" rIns="0" bIns="0" anchor="t">
             <a:spAutoFit/>
           </a:bodyPr>
           <a:lstStyle/>
@@ -15015,7 +14945,7 @@
           <a:noFill/>
         </p:spPr>
         <p:txBody>
-          <a:bodyPr wrap="square" lIns="0" rIns="0" tIns="0" bIns="0" anchor="t">
+          <a:bodyPr wrap="square" lIns="0" tIns="0" rIns="0" bIns="0" anchor="t">
             <a:spAutoFit/>
           </a:bodyPr>
           <a:lstStyle/>
@@ -15046,7 +14976,7 @@
 </file>
 
 <file path=ppt/slides/slide5.xml><?xml version="1.0" encoding="utf-8"?>
-<p:sld xmlns:a="http://schemas.openxmlformats.org/drawingml/2006/main" xmlns:p="http://schemas.openxmlformats.org/presentationml/2006/main" xmlns:r="http://schemas.openxmlformats.org/officeDocument/2006/relationships">
+<p:sld xmlns:a="http://schemas.openxmlformats.org/drawingml/2006/main" xmlns:r="http://schemas.openxmlformats.org/officeDocument/2006/relationships" xmlns:p="http://schemas.openxmlformats.org/presentationml/2006/main">
   <p:cSld>
     <p:spTree>
       <p:nvGrpSpPr>
@@ -15054,7 +14984,14 @@
         <p:cNvGrpSpPr/>
         <p:nvPr/>
       </p:nvGrpSpPr>
-      <p:grpSpPr/>
+      <p:grpSpPr>
+        <a:xfrm>
+          <a:off x="0" y="0"/>
+          <a:ext cx="0" cy="0"/>
+          <a:chOff x="0" y="0"/>
+          <a:chExt cx="0" cy="0"/>
+        </a:xfrm>
+      </p:grpSpPr>
       <p:sp>
         <p:nvSpPr>
           <p:cNvPr id="2" name="Rectangle 1"/>
@@ -15096,6 +15033,7 @@
           <a:lstStyle/>
           <a:p>
             <a:pPr algn="ctr"/>
+            <a:endParaRPr/>
           </a:p>
         </p:txBody>
       </p:sp>
@@ -15116,7 +15054,7 @@
           <a:noFill/>
         </p:spPr>
         <p:txBody>
-          <a:bodyPr wrap="square" lIns="0" rIns="0" tIns="0" bIns="0" anchor="t">
+          <a:bodyPr wrap="square" lIns="0" tIns="0" rIns="0" bIns="0" anchor="t">
             <a:spAutoFit/>
           </a:bodyPr>
           <a:lstStyle/>
@@ -15155,7 +15093,7 @@
           <a:noFill/>
         </p:spPr>
         <p:txBody>
-          <a:bodyPr wrap="square" lIns="0" rIns="0" tIns="0" bIns="0" anchor="t">
+          <a:bodyPr wrap="square" lIns="0" tIns="0" rIns="0" bIns="0" anchor="t">
             <a:spAutoFit/>
           </a:bodyPr>
           <a:lstStyle/>
@@ -15222,6 +15160,7 @@
           <a:lstStyle/>
           <a:p>
             <a:pPr algn="ctr"/>
+            <a:endParaRPr/>
           </a:p>
         </p:txBody>
       </p:sp>
@@ -15242,7 +15181,7 @@
           <a:noFill/>
         </p:spPr>
         <p:txBody>
-          <a:bodyPr wrap="square" lIns="0" rIns="0" tIns="0" bIns="0" anchor="t">
+          <a:bodyPr wrap="square" lIns="0" tIns="0" rIns="0" bIns="0" anchor="t">
             <a:spAutoFit/>
           </a:bodyPr>
           <a:lstStyle/>
@@ -15281,7 +15220,7 @@
           <a:noFill/>
         </p:spPr>
         <p:txBody>
-          <a:bodyPr wrap="square" lIns="0" rIns="0" tIns="0" bIns="0" anchor="t">
+          <a:bodyPr wrap="square" lIns="0" tIns="0" rIns="0" bIns="0" anchor="t">
             <a:spAutoFit/>
           </a:bodyPr>
           <a:lstStyle/>
@@ -15320,7 +15259,7 @@
           <a:noFill/>
         </p:spPr>
         <p:txBody>
-          <a:bodyPr wrap="square" lIns="0" rIns="0" tIns="0" bIns="0" anchor="t">
+          <a:bodyPr wrap="square" lIns="0" tIns="0" rIns="0" bIns="0" anchor="t">
             <a:spAutoFit/>
           </a:bodyPr>
           <a:lstStyle/>
@@ -15359,7 +15298,7 @@
           <a:noFill/>
         </p:spPr>
         <p:txBody>
-          <a:bodyPr wrap="square" lIns="0" rIns="0" tIns="0" bIns="0" anchor="t">
+          <a:bodyPr wrap="square" lIns="0" tIns="0" rIns="0" bIns="0" anchor="t">
             <a:spAutoFit/>
           </a:bodyPr>
           <a:lstStyle/>
@@ -15398,7 +15337,7 @@
           <a:noFill/>
         </p:spPr>
         <p:txBody>
-          <a:bodyPr wrap="square" lIns="0" rIns="0" tIns="0" bIns="0" anchor="t">
+          <a:bodyPr wrap="square" lIns="0" tIns="0" rIns="0" bIns="0" anchor="t">
             <a:spAutoFit/>
           </a:bodyPr>
           <a:lstStyle/>
@@ -15437,7 +15376,7 @@
           <a:noFill/>
         </p:spPr>
         <p:txBody>
-          <a:bodyPr wrap="square" lIns="0" rIns="0" tIns="0" bIns="0" anchor="t">
+          <a:bodyPr wrap="square" lIns="0" tIns="0" rIns="0" bIns="0" anchor="t">
             <a:spAutoFit/>
           </a:bodyPr>
           <a:lstStyle/>
@@ -15476,7 +15415,7 @@
           <a:noFill/>
         </p:spPr>
         <p:txBody>
-          <a:bodyPr wrap="square" lIns="0" rIns="0" tIns="0" bIns="0" anchor="t">
+          <a:bodyPr wrap="square" lIns="0" tIns="0" rIns="0" bIns="0" anchor="t">
             <a:spAutoFit/>
           </a:bodyPr>
           <a:lstStyle/>
@@ -15515,7 +15454,7 @@
           <a:noFill/>
         </p:spPr>
         <p:txBody>
-          <a:bodyPr wrap="square" lIns="0" rIns="0" tIns="0" bIns="0" anchor="t">
+          <a:bodyPr wrap="square" lIns="0" tIns="0" rIns="0" bIns="0" anchor="t">
             <a:spAutoFit/>
           </a:bodyPr>
           <a:lstStyle/>
@@ -15554,7 +15493,7 @@
           <a:noFill/>
         </p:spPr>
         <p:txBody>
-          <a:bodyPr wrap="square" lIns="0" rIns="0" tIns="0" bIns="0" anchor="t">
+          <a:bodyPr wrap="square" lIns="0" tIns="0" rIns="0" bIns="0" anchor="t">
             <a:spAutoFit/>
           </a:bodyPr>
           <a:lstStyle/>
@@ -15617,6 +15556,7 @@
           <a:lstStyle/>
           <a:p>
             <a:pPr algn="ctr"/>
+            <a:endParaRPr/>
           </a:p>
         </p:txBody>
       </p:sp>
@@ -15637,7 +15577,7 @@
           <a:noFill/>
         </p:spPr>
         <p:txBody>
-          <a:bodyPr wrap="square" lIns="0" rIns="0" tIns="0" bIns="0" anchor="t">
+          <a:bodyPr wrap="square" lIns="0" tIns="0" rIns="0" bIns="0" anchor="t">
             <a:spAutoFit/>
           </a:bodyPr>
           <a:lstStyle/>
@@ -15676,7 +15616,7 @@
           <a:noFill/>
         </p:spPr>
         <p:txBody>
-          <a:bodyPr wrap="square" lIns="0" rIns="0" tIns="0" bIns="0" anchor="t">
+          <a:bodyPr wrap="square" lIns="0" tIns="0" rIns="0" bIns="0" anchor="t">
             <a:spAutoFit/>
           </a:bodyPr>
           <a:lstStyle/>
@@ -15741,6 +15681,7 @@
           <a:lstStyle/>
           <a:p>
             <a:pPr algn="ctr"/>
+            <a:endParaRPr/>
           </a:p>
         </p:txBody>
       </p:sp>
@@ -15761,7 +15702,7 @@
           <a:noFill/>
         </p:spPr>
         <p:txBody>
-          <a:bodyPr wrap="square" lIns="0" rIns="0" tIns="0" bIns="0" anchor="t">
+          <a:bodyPr wrap="square" lIns="0" tIns="0" rIns="0" bIns="0" anchor="t">
             <a:spAutoFit/>
           </a:bodyPr>
           <a:lstStyle/>
@@ -15800,7 +15741,7 @@
           <a:noFill/>
         </p:spPr>
         <p:txBody>
-          <a:bodyPr wrap="square" lIns="0" rIns="0" tIns="0" bIns="0" anchor="t">
+          <a:bodyPr wrap="square" lIns="0" tIns="0" rIns="0" bIns="0" anchor="t">
             <a:spAutoFit/>
           </a:bodyPr>
           <a:lstStyle/>
@@ -15865,6 +15806,7 @@
           <a:lstStyle/>
           <a:p>
             <a:pPr algn="ctr"/>
+            <a:endParaRPr/>
           </a:p>
         </p:txBody>
       </p:sp>
@@ -15885,7 +15827,7 @@
           <a:noFill/>
         </p:spPr>
         <p:txBody>
-          <a:bodyPr wrap="square" lIns="0" rIns="0" tIns="0" bIns="0" anchor="t">
+          <a:bodyPr wrap="square" lIns="0" tIns="0" rIns="0" bIns="0" anchor="t">
             <a:spAutoFit/>
           </a:bodyPr>
           <a:lstStyle/>
@@ -15924,7 +15866,7 @@
           <a:noFill/>
         </p:spPr>
         <p:txBody>
-          <a:bodyPr wrap="square" lIns="0" rIns="0" tIns="0" bIns="0" anchor="t">
+          <a:bodyPr wrap="square" lIns="0" tIns="0" rIns="0" bIns="0" anchor="t">
             <a:spAutoFit/>
           </a:bodyPr>
           <a:lstStyle/>
@@ -15989,6 +15931,7 @@
           <a:lstStyle/>
           <a:p>
             <a:pPr algn="ctr"/>
+            <a:endParaRPr/>
           </a:p>
         </p:txBody>
       </p:sp>
@@ -16009,7 +15952,7 @@
           <a:noFill/>
         </p:spPr>
         <p:txBody>
-          <a:bodyPr wrap="square" lIns="0" rIns="0" tIns="0" bIns="0" anchor="t">
+          <a:bodyPr wrap="square" lIns="0" tIns="0" rIns="0" bIns="0" anchor="t">
             <a:spAutoFit/>
           </a:bodyPr>
           <a:lstStyle/>
@@ -16048,7 +15991,7 @@
           <a:noFill/>
         </p:spPr>
         <p:txBody>
-          <a:bodyPr wrap="square" lIns="0" rIns="0" tIns="0" bIns="0" anchor="t">
+          <a:bodyPr wrap="square" lIns="0" tIns="0" rIns="0" bIns="0" anchor="t">
             <a:spAutoFit/>
           </a:bodyPr>
           <a:lstStyle/>
@@ -16113,6 +16056,7 @@
           <a:lstStyle/>
           <a:p>
             <a:pPr algn="ctr"/>
+            <a:endParaRPr/>
           </a:p>
         </p:txBody>
       </p:sp>
@@ -16133,7 +16077,7 @@
           <a:noFill/>
         </p:spPr>
         <p:txBody>
-          <a:bodyPr wrap="square" lIns="0" rIns="0" tIns="0" bIns="0" anchor="t">
+          <a:bodyPr wrap="square" lIns="0" tIns="0" rIns="0" bIns="0" anchor="t">
             <a:spAutoFit/>
           </a:bodyPr>
           <a:lstStyle/>
@@ -16172,7 +16116,7 @@
           <a:noFill/>
         </p:spPr>
         <p:txBody>
-          <a:bodyPr wrap="square" lIns="0" rIns="0" tIns="0" bIns="0" anchor="t">
+          <a:bodyPr wrap="square" lIns="0" tIns="0" rIns="0" bIns="0" anchor="t">
             <a:spAutoFit/>
           </a:bodyPr>
           <a:lstStyle/>
@@ -16237,6 +16181,7 @@
           <a:lstStyle/>
           <a:p>
             <a:pPr algn="ctr"/>
+            <a:endParaRPr/>
           </a:p>
         </p:txBody>
       </p:sp>
@@ -16257,7 +16202,7 @@
           <a:noFill/>
         </p:spPr>
         <p:txBody>
-          <a:bodyPr wrap="square" lIns="0" rIns="0" tIns="0" bIns="0" anchor="t">
+          <a:bodyPr wrap="square" lIns="0" tIns="0" rIns="0" bIns="0" anchor="t">
             <a:spAutoFit/>
           </a:bodyPr>
           <a:lstStyle/>
@@ -16324,6 +16269,7 @@
           <a:lstStyle/>
           <a:p>
             <a:pPr algn="ctr"/>
+            <a:endParaRPr/>
           </a:p>
         </p:txBody>
       </p:sp>
@@ -16370,6 +16316,7 @@
           <a:lstStyle/>
           <a:p>
             <a:pPr algn="ctr"/>
+            <a:endParaRPr/>
           </a:p>
         </p:txBody>
       </p:sp>
@@ -16390,7 +16337,7 @@
           <a:noFill/>
         </p:spPr>
         <p:txBody>
-          <a:bodyPr wrap="square" lIns="0" rIns="0" tIns="0" bIns="0" anchor="t">
+          <a:bodyPr wrap="square" lIns="0" tIns="0" rIns="0" bIns="0" anchor="t">
             <a:spAutoFit/>
           </a:bodyPr>
           <a:lstStyle/>
@@ -16429,7 +16376,7 @@
           <a:noFill/>
         </p:spPr>
         <p:txBody>
-          <a:bodyPr wrap="square" lIns="0" rIns="0" tIns="0" bIns="0" anchor="t">
+          <a:bodyPr wrap="square" lIns="0" tIns="0" rIns="0" bIns="0" anchor="t">
             <a:spAutoFit/>
           </a:bodyPr>
           <a:lstStyle/>
@@ -16468,7 +16415,7 @@
           <a:noFill/>
         </p:spPr>
         <p:txBody>
-          <a:bodyPr wrap="square" lIns="0" rIns="0" tIns="0" bIns="0" anchor="t">
+          <a:bodyPr wrap="square" lIns="0" tIns="0" rIns="0" bIns="0" anchor="t">
             <a:spAutoFit/>
           </a:bodyPr>
           <a:lstStyle/>
@@ -16507,7 +16454,7 @@
           <a:noFill/>
         </p:spPr>
         <p:txBody>
-          <a:bodyPr wrap="square" lIns="0" rIns="0" tIns="0" bIns="0" anchor="t">
+          <a:bodyPr wrap="square" lIns="0" tIns="0" rIns="0" bIns="0" anchor="t">
             <a:spAutoFit/>
           </a:bodyPr>
           <a:lstStyle/>
@@ -16546,7 +16493,7 @@
           <a:noFill/>
         </p:spPr>
         <p:txBody>
-          <a:bodyPr wrap="square" lIns="0" rIns="0" tIns="0" bIns="0" anchor="t">
+          <a:bodyPr wrap="square" lIns="0" tIns="0" rIns="0" bIns="0" anchor="t">
             <a:spAutoFit/>
           </a:bodyPr>
           <a:lstStyle/>
@@ -16585,7 +16532,7 @@
           <a:noFill/>
         </p:spPr>
         <p:txBody>
-          <a:bodyPr wrap="square" lIns="0" rIns="0" tIns="0" bIns="0" anchor="t">
+          <a:bodyPr wrap="square" lIns="0" tIns="0" rIns="0" bIns="0" anchor="t">
             <a:spAutoFit/>
           </a:bodyPr>
           <a:lstStyle/>
@@ -16624,7 +16571,7 @@
           <a:noFill/>
         </p:spPr>
         <p:txBody>
-          <a:bodyPr wrap="square" lIns="0" rIns="0" tIns="0" bIns="0" anchor="t">
+          <a:bodyPr wrap="square" lIns="0" tIns="0" rIns="0" bIns="0" anchor="t">
             <a:spAutoFit/>
           </a:bodyPr>
           <a:lstStyle/>
@@ -16663,7 +16610,7 @@
           <a:noFill/>
         </p:spPr>
         <p:txBody>
-          <a:bodyPr wrap="square" lIns="0" rIns="0" tIns="0" bIns="0" anchor="t">
+          <a:bodyPr wrap="square" lIns="0" tIns="0" rIns="0" bIns="0" anchor="t">
             <a:spAutoFit/>
           </a:bodyPr>
           <a:lstStyle/>
@@ -16702,7 +16649,7 @@
           <a:noFill/>
         </p:spPr>
         <p:txBody>
-          <a:bodyPr wrap="square" lIns="0" rIns="0" tIns="0" bIns="0" anchor="t">
+          <a:bodyPr wrap="square" lIns="0" tIns="0" rIns="0" bIns="0" anchor="t">
             <a:spAutoFit/>
           </a:bodyPr>
           <a:lstStyle/>
@@ -16741,7 +16688,7 @@
           <a:noFill/>
         </p:spPr>
         <p:txBody>
-          <a:bodyPr wrap="square" lIns="0" rIns="0" tIns="0" bIns="0" anchor="t">
+          <a:bodyPr wrap="square" lIns="0" tIns="0" rIns="0" bIns="0" anchor="t">
             <a:spAutoFit/>
           </a:bodyPr>
           <a:lstStyle/>
@@ -16780,7 +16727,7 @@
           <a:noFill/>
         </p:spPr>
         <p:txBody>
-          <a:bodyPr wrap="square" lIns="0" rIns="0" tIns="0" bIns="0" anchor="t">
+          <a:bodyPr wrap="square" lIns="0" tIns="0" rIns="0" bIns="0" anchor="t">
             <a:spAutoFit/>
           </a:bodyPr>
           <a:lstStyle/>
@@ -16819,7 +16766,7 @@
           <a:noFill/>
         </p:spPr>
         <p:txBody>
-          <a:bodyPr wrap="square" lIns="0" rIns="0" tIns="0" bIns="0" anchor="t">
+          <a:bodyPr wrap="square" lIns="0" tIns="0" rIns="0" bIns="0" anchor="t">
             <a:spAutoFit/>
           </a:bodyPr>
           <a:lstStyle/>
@@ -16858,7 +16805,7 @@
           <a:noFill/>
         </p:spPr>
         <p:txBody>
-          <a:bodyPr wrap="square" lIns="0" rIns="0" tIns="0" bIns="0" anchor="t">
+          <a:bodyPr wrap="square" lIns="0" tIns="0" rIns="0" bIns="0" anchor="t">
             <a:spAutoFit/>
           </a:bodyPr>
           <a:lstStyle/>
@@ -16897,7 +16844,7 @@
           <a:noFill/>
         </p:spPr>
         <p:txBody>
-          <a:bodyPr wrap="square" lIns="0" rIns="0" tIns="0" bIns="0" anchor="t">
+          <a:bodyPr wrap="square" lIns="0" tIns="0" rIns="0" bIns="0" anchor="t">
             <a:spAutoFit/>
           </a:bodyPr>
           <a:lstStyle/>
@@ -16944,7 +16891,7 @@
 </file>
 
 <file path=ppt/slides/slide6.xml><?xml version="1.0" encoding="utf-8"?>
-<p:sld xmlns:a="http://schemas.openxmlformats.org/drawingml/2006/main" xmlns:p="http://schemas.openxmlformats.org/presentationml/2006/main" xmlns:r="http://schemas.openxmlformats.org/officeDocument/2006/relationships">
+<p:sld xmlns:a="http://schemas.openxmlformats.org/drawingml/2006/main" xmlns:r="http://schemas.openxmlformats.org/officeDocument/2006/relationships" xmlns:p="http://schemas.openxmlformats.org/presentationml/2006/main">
   <p:cSld>
     <p:spTree>
       <p:nvGrpSpPr>
@@ -16952,7 +16899,14 @@
         <p:cNvGrpSpPr/>
         <p:nvPr/>
       </p:nvGrpSpPr>
-      <p:grpSpPr/>
+      <p:grpSpPr>
+        <a:xfrm>
+          <a:off x="0" y="0"/>
+          <a:ext cx="0" cy="0"/>
+          <a:chOff x="0" y="0"/>
+          <a:chExt cx="0" cy="0"/>
+        </a:xfrm>
+      </p:grpSpPr>
       <p:sp>
         <p:nvSpPr>
           <p:cNvPr id="2" name="Rectangle 1"/>
@@ -16994,6 +16948,7 @@
           <a:lstStyle/>
           <a:p>
             <a:pPr algn="ctr"/>
+            <a:endParaRPr/>
           </a:p>
         </p:txBody>
       </p:sp>
@@ -17014,7 +16969,7 @@
           <a:noFill/>
         </p:spPr>
         <p:txBody>
-          <a:bodyPr wrap="square" lIns="0" rIns="0" tIns="0" bIns="0" anchor="t">
+          <a:bodyPr wrap="square" lIns="0" tIns="0" rIns="0" bIns="0" anchor="t">
             <a:spAutoFit/>
           </a:bodyPr>
           <a:lstStyle/>
@@ -17053,7 +17008,7 @@
           <a:noFill/>
         </p:spPr>
         <p:txBody>
-          <a:bodyPr wrap="square" lIns="0" rIns="0" tIns="0" bIns="0" anchor="t">
+          <a:bodyPr wrap="square" lIns="0" tIns="0" rIns="0" bIns="0" anchor="t">
             <a:spAutoFit/>
           </a:bodyPr>
           <a:lstStyle/>
@@ -17092,7 +17047,7 @@
           <a:noFill/>
         </p:spPr>
         <p:txBody>
-          <a:bodyPr wrap="square" lIns="0" rIns="0" tIns="0" bIns="0" anchor="t">
+          <a:bodyPr wrap="square" lIns="0" tIns="0" rIns="0" bIns="0" anchor="t">
             <a:spAutoFit/>
           </a:bodyPr>
           <a:lstStyle/>
@@ -17157,6 +17112,7 @@
           <a:lstStyle/>
           <a:p>
             <a:pPr algn="ctr"/>
+            <a:endParaRPr/>
           </a:p>
         </p:txBody>
       </p:sp>
@@ -17177,7 +17133,7 @@
           <a:noFill/>
         </p:spPr>
         <p:txBody>
-          <a:bodyPr wrap="square" lIns="0" rIns="0" tIns="0" bIns="0" anchor="t">
+          <a:bodyPr wrap="square" lIns="0" tIns="0" rIns="0" bIns="0" anchor="t">
             <a:spAutoFit/>
           </a:bodyPr>
           <a:lstStyle/>
@@ -17242,6 +17198,7 @@
           <a:lstStyle/>
           <a:p>
             <a:pPr algn="ctr"/>
+            <a:endParaRPr/>
           </a:p>
         </p:txBody>
       </p:sp>
@@ -17288,6 +17245,7 @@
           <a:lstStyle/>
           <a:p>
             <a:pPr algn="ctr"/>
+            <a:endParaRPr/>
           </a:p>
         </p:txBody>
       </p:sp>
@@ -17308,7 +17266,7 @@
           <a:noFill/>
         </p:spPr>
         <p:txBody>
-          <a:bodyPr wrap="square" lIns="0" rIns="0" tIns="0" bIns="0" anchor="t">
+          <a:bodyPr wrap="square" lIns="0" tIns="0" rIns="0" bIns="0" anchor="t">
             <a:spAutoFit/>
           </a:bodyPr>
           <a:lstStyle/>
@@ -17373,6 +17331,7 @@
           <a:lstStyle/>
           <a:p>
             <a:pPr algn="ctr"/>
+            <a:endParaRPr/>
           </a:p>
         </p:txBody>
       </p:sp>
@@ -17419,6 +17378,7 @@
           <a:lstStyle/>
           <a:p>
             <a:pPr algn="ctr"/>
+            <a:endParaRPr/>
           </a:p>
         </p:txBody>
       </p:sp>
@@ -17439,7 +17399,7 @@
           <a:noFill/>
         </p:spPr>
         <p:txBody>
-          <a:bodyPr wrap="square" lIns="0" rIns="0" tIns="0" bIns="0" anchor="t">
+          <a:bodyPr wrap="square" lIns="0" tIns="0" rIns="0" bIns="0" anchor="t">
             <a:spAutoFit/>
           </a:bodyPr>
           <a:lstStyle/>
@@ -17504,6 +17464,7 @@
           <a:lstStyle/>
           <a:p>
             <a:pPr algn="ctr"/>
+            <a:endParaRPr/>
           </a:p>
         </p:txBody>
       </p:sp>
@@ -17550,6 +17511,7 @@
           <a:lstStyle/>
           <a:p>
             <a:pPr algn="ctr"/>
+            <a:endParaRPr/>
           </a:p>
         </p:txBody>
       </p:sp>
@@ -17570,7 +17532,7 @@
           <a:noFill/>
         </p:spPr>
         <p:txBody>
-          <a:bodyPr wrap="square" lIns="0" rIns="0" tIns="0" bIns="0" anchor="t">
+          <a:bodyPr wrap="square" lIns="0" tIns="0" rIns="0" bIns="0" anchor="t">
             <a:spAutoFit/>
           </a:bodyPr>
           <a:lstStyle/>
@@ -17635,6 +17597,7 @@
           <a:lstStyle/>
           <a:p>
             <a:pPr algn="ctr"/>
+            <a:endParaRPr/>
           </a:p>
         </p:txBody>
       </p:sp>
@@ -17681,6 +17644,7 @@
           <a:lstStyle/>
           <a:p>
             <a:pPr algn="ctr"/>
+            <a:endParaRPr/>
           </a:p>
         </p:txBody>
       </p:sp>
@@ -17701,7 +17665,7 @@
           <a:noFill/>
         </p:spPr>
         <p:txBody>
-          <a:bodyPr wrap="square" lIns="0" rIns="0" tIns="0" bIns="0" anchor="t">
+          <a:bodyPr wrap="square" lIns="0" tIns="0" rIns="0" bIns="0" anchor="t">
             <a:spAutoFit/>
           </a:bodyPr>
           <a:lstStyle/>
@@ -17766,6 +17730,7 @@
           <a:lstStyle/>
           <a:p>
             <a:pPr algn="ctr"/>
+            <a:endParaRPr/>
           </a:p>
         </p:txBody>
       </p:sp>
@@ -17806,7 +17771,7 @@
           </a:fontRef>
         </p:style>
         <p:txBody>
-          <a:bodyPr rtlCol="0" anchor="ctr" lIns="0" rIns="0" tIns="0" bIns="0"/>
+          <a:bodyPr lIns="0" tIns="0" rIns="0" bIns="0" rtlCol="0" anchor="ctr"/>
           <a:lstStyle/>
           <a:p>
             <a:pPr algn="ctr"/>
@@ -17839,7 +17804,7 @@
           <a:noFill/>
         </p:spPr>
         <p:txBody>
-          <a:bodyPr wrap="square" lIns="0" rIns="0" tIns="0" bIns="0" anchor="t">
+          <a:bodyPr wrap="square" lIns="0" tIns="0" rIns="0" bIns="0" anchor="t">
             <a:spAutoFit/>
           </a:bodyPr>
           <a:lstStyle/>
@@ -17894,7 +17859,7 @@
           <a:noFill/>
         </p:spPr>
         <p:txBody>
-          <a:bodyPr wrap="square" lIns="0" rIns="0" tIns="0" bIns="0" anchor="t">
+          <a:bodyPr wrap="square" lIns="0" tIns="0" rIns="0" bIns="0" anchor="t">
             <a:spAutoFit/>
           </a:bodyPr>
           <a:lstStyle/>
@@ -17969,7 +17934,7 @@
           </a:fontRef>
         </p:style>
         <p:txBody>
-          <a:bodyPr rtlCol="0" anchor="ctr" lIns="0" rIns="0" tIns="0" bIns="0"/>
+          <a:bodyPr lIns="0" tIns="0" rIns="0" bIns="0" rtlCol="0" anchor="ctr"/>
           <a:lstStyle/>
           <a:p>
             <a:pPr algn="ctr"/>
@@ -18002,7 +17967,7 @@
           <a:noFill/>
         </p:spPr>
         <p:txBody>
-          <a:bodyPr wrap="square" lIns="0" rIns="0" tIns="0" bIns="0" anchor="t">
+          <a:bodyPr wrap="square" lIns="0" tIns="0" rIns="0" bIns="0" anchor="t">
             <a:spAutoFit/>
           </a:bodyPr>
           <a:lstStyle/>
@@ -18057,7 +18022,7 @@
           <a:noFill/>
         </p:spPr>
         <p:txBody>
-          <a:bodyPr wrap="square" lIns="0" rIns="0" tIns="0" bIns="0" anchor="t">
+          <a:bodyPr wrap="square" lIns="0" tIns="0" rIns="0" bIns="0" anchor="t">
             <a:spAutoFit/>
           </a:bodyPr>
           <a:lstStyle/>
@@ -18132,7 +18097,7 @@
           </a:fontRef>
         </p:style>
         <p:txBody>
-          <a:bodyPr rtlCol="0" anchor="ctr" lIns="0" rIns="0" tIns="0" bIns="0"/>
+          <a:bodyPr lIns="0" tIns="0" rIns="0" bIns="0" rtlCol="0" anchor="ctr"/>
           <a:lstStyle/>
           <a:p>
             <a:pPr algn="ctr"/>
@@ -18165,7 +18130,7 @@
           <a:noFill/>
         </p:spPr>
         <p:txBody>
-          <a:bodyPr wrap="square" lIns="0" rIns="0" tIns="0" bIns="0" anchor="t">
+          <a:bodyPr wrap="square" lIns="0" tIns="0" rIns="0" bIns="0" anchor="t">
             <a:spAutoFit/>
           </a:bodyPr>
           <a:lstStyle/>
@@ -18211,16 +18176,16 @@
         </p:nvSpPr>
         <p:spPr>
           <a:xfrm>
-            <a:off x="6032500" y="3644900"/>
-            <a:ext cx="1879600" cy="317500"/>
-          </a:xfrm>
-          <a:prstGeom prst="rect">
-            <a:avLst/>
-          </a:prstGeom>
-          <a:noFill/>
-        </p:spPr>
-        <p:txBody>
-          <a:bodyPr wrap="square" lIns="0" rIns="0" tIns="0" bIns="0" anchor="t">
+            <a:off x="5280297" y="3715900"/>
+            <a:ext cx="1428206" cy="162801"/>
+          </a:xfrm>
+          <a:prstGeom prst="rect">
+            <a:avLst/>
+          </a:prstGeom>
+          <a:noFill/>
+        </p:spPr>
+        <p:txBody>
+          <a:bodyPr wrap="square" lIns="0" tIns="0" rIns="0" bIns="0" anchor="t">
             <a:spAutoFit/>
           </a:bodyPr>
           <a:lstStyle/>
@@ -18231,7 +18196,7 @@
               </a:lnSpc>
             </a:pPr>
             <a:r>
-              <a:rPr sz="900" b="0" i="0">
+              <a:rPr sz="900" b="0" i="0" dirty="0">
                 <a:solidFill>
                   <a:srgbClr val="5A6A7E"/>
                 </a:solidFill>
@@ -18239,15 +18204,17 @@
               </a:rPr>
               <a:t>Mongoose</a:t>
             </a:r>
-          </a:p>
-          <a:p>
-            <a:pPr algn="l">
-              <a:lnSpc>
-                <a:spcPct val="125000"/>
-              </a:lnSpc>
-            </a:pPr>
-            <a:r>
-              <a:rPr sz="900" b="0" i="0">
+            <a:r>
+              <a:rPr lang="en-GB" sz="900" b="0" i="0" dirty="0">
+                <a:solidFill>
+                  <a:srgbClr val="5A6A7E"/>
+                </a:solidFill>
+                <a:latin typeface="DM Sans"/>
+              </a:rPr>
+              <a:t> </a:t>
+            </a:r>
+            <a:r>
+              <a:rPr sz="900" b="0" i="0" dirty="0">
                 <a:solidFill>
                   <a:srgbClr val="5A6A7E"/>
                 </a:solidFill>
@@ -18295,7 +18262,7 @@
           </a:fontRef>
         </p:style>
         <p:txBody>
-          <a:bodyPr rtlCol="0" anchor="ctr" lIns="0" rIns="0" tIns="0" bIns="0"/>
+          <a:bodyPr lIns="0" tIns="0" rIns="0" bIns="0" rtlCol="0" anchor="ctr"/>
           <a:lstStyle/>
           <a:p>
             <a:pPr algn="ctr"/>
@@ -18328,7 +18295,7 @@
           <a:noFill/>
         </p:spPr>
         <p:txBody>
-          <a:bodyPr wrap="square" lIns="0" rIns="0" tIns="0" bIns="0" anchor="t">
+          <a:bodyPr wrap="square" lIns="0" tIns="0" rIns="0" bIns="0" anchor="t">
             <a:spAutoFit/>
           </a:bodyPr>
           <a:lstStyle/>
@@ -18383,7 +18350,7 @@
           <a:noFill/>
         </p:spPr>
         <p:txBody>
-          <a:bodyPr wrap="square" lIns="0" rIns="0" tIns="0" bIns="0" anchor="t">
+          <a:bodyPr wrap="square" lIns="0" tIns="0" rIns="0" bIns="0" anchor="t">
             <a:spAutoFit/>
           </a:bodyPr>
           <a:lstStyle/>
@@ -18458,7 +18425,7 @@
           </a:fontRef>
         </p:style>
         <p:txBody>
-          <a:bodyPr rtlCol="0" anchor="ctr" lIns="0" rIns="0" tIns="0" bIns="0"/>
+          <a:bodyPr lIns="0" tIns="0" rIns="0" bIns="0" rtlCol="0" anchor="ctr"/>
           <a:lstStyle/>
           <a:p>
             <a:pPr algn="ctr"/>
@@ -18491,7 +18458,7 @@
           <a:noFill/>
         </p:spPr>
         <p:txBody>
-          <a:bodyPr wrap="square" lIns="0" rIns="0" tIns="0" bIns="0" anchor="t">
+          <a:bodyPr wrap="square" lIns="0" tIns="0" rIns="0" bIns="0" anchor="t">
             <a:spAutoFit/>
           </a:bodyPr>
           <a:lstStyle/>
@@ -18530,7 +18497,7 @@
           <a:noFill/>
         </p:spPr>
         <p:txBody>
-          <a:bodyPr wrap="square" lIns="0" rIns="0" tIns="0" bIns="0" anchor="t">
+          <a:bodyPr wrap="square" lIns="0" tIns="0" rIns="0" bIns="0" anchor="t">
             <a:spAutoFit/>
           </a:bodyPr>
           <a:lstStyle/>
@@ -18605,7 +18572,7 @@
           </a:fontRef>
         </p:style>
         <p:txBody>
-          <a:bodyPr rtlCol="0" anchor="ctr" lIns="0" rIns="0" tIns="0" bIns="0"/>
+          <a:bodyPr lIns="0" tIns="0" rIns="0" bIns="0" rtlCol="0" anchor="ctr"/>
           <a:lstStyle/>
           <a:p>
             <a:pPr algn="ctr"/>
@@ -18638,7 +18605,7 @@
           <a:noFill/>
         </p:spPr>
         <p:txBody>
-          <a:bodyPr wrap="square" lIns="0" rIns="0" tIns="0" bIns="0" anchor="t">
+          <a:bodyPr wrap="square" lIns="0" tIns="0" rIns="0" bIns="0" anchor="t">
             <a:spAutoFit/>
           </a:bodyPr>
           <a:lstStyle/>
@@ -18693,7 +18660,7 @@
           <a:noFill/>
         </p:spPr>
         <p:txBody>
-          <a:bodyPr wrap="square" lIns="0" rIns="0" tIns="0" bIns="0" anchor="t">
+          <a:bodyPr wrap="square" lIns="0" tIns="0" rIns="0" bIns="0" anchor="t">
             <a:spAutoFit/>
           </a:bodyPr>
           <a:lstStyle/>
@@ -18768,7 +18735,7 @@
           </a:fontRef>
         </p:style>
         <p:txBody>
-          <a:bodyPr rtlCol="0" anchor="ctr" lIns="0" rIns="0" tIns="0" bIns="0"/>
+          <a:bodyPr lIns="0" tIns="0" rIns="0" bIns="0" rtlCol="0" anchor="ctr"/>
           <a:lstStyle/>
           <a:p>
             <a:pPr algn="ctr"/>
@@ -18801,7 +18768,7 @@
           <a:noFill/>
         </p:spPr>
         <p:txBody>
-          <a:bodyPr wrap="square" lIns="0" rIns="0" tIns="0" bIns="0" anchor="t">
+          <a:bodyPr wrap="square" lIns="0" tIns="0" rIns="0" bIns="0" anchor="t">
             <a:spAutoFit/>
           </a:bodyPr>
           <a:lstStyle/>
@@ -18856,7 +18823,7 @@
           <a:noFill/>
         </p:spPr>
         <p:txBody>
-          <a:bodyPr wrap="square" lIns="0" rIns="0" tIns="0" bIns="0" anchor="t">
+          <a:bodyPr wrap="square" lIns="0" tIns="0" rIns="0" bIns="0" anchor="t">
             <a:spAutoFit/>
           </a:bodyPr>
           <a:lstStyle/>
@@ -18931,7 +18898,7 @@
           </a:fontRef>
         </p:style>
         <p:txBody>
-          <a:bodyPr rtlCol="0" anchor="ctr" lIns="0" rIns="0" tIns="0" bIns="0"/>
+          <a:bodyPr lIns="0" tIns="0" rIns="0" bIns="0" rtlCol="0" anchor="ctr"/>
           <a:lstStyle/>
           <a:p>
             <a:pPr algn="ctr"/>
@@ -18964,7 +18931,7 @@
           <a:noFill/>
         </p:spPr>
         <p:txBody>
-          <a:bodyPr wrap="square" lIns="0" rIns="0" tIns="0" bIns="0" anchor="t">
+          <a:bodyPr wrap="square" lIns="0" tIns="0" rIns="0" bIns="0" anchor="t">
             <a:spAutoFit/>
           </a:bodyPr>
           <a:lstStyle/>
@@ -19019,7 +18986,7 @@
           <a:noFill/>
         </p:spPr>
         <p:txBody>
-          <a:bodyPr wrap="square" lIns="0" rIns="0" tIns="0" bIns="0" anchor="t">
+          <a:bodyPr wrap="square" lIns="0" tIns="0" rIns="0" bIns="0" anchor="t">
             <a:spAutoFit/>
           </a:bodyPr>
           <a:lstStyle/>
@@ -19065,7 +19032,7 @@
         </p:nvCxnSpPr>
         <p:spPr>
           <a:xfrm>
-            <a:off x="1955800" y="2743200"/>
+            <a:off x="1955800" y="2812869"/>
             <a:ext cx="1625600" cy="0"/>
           </a:xfrm>
           <a:prstGeom prst="line">
@@ -19096,13 +19063,15 @@
       <p:cxnSp>
         <p:nvCxnSpPr>
           <p:cNvPr id="46" name="Connector 45"/>
-          <p:cNvCxnSpPr/>
+          <p:cNvCxnSpPr>
+            <a:cxnSpLocks/>
+          </p:cNvCxnSpPr>
           <p:nvPr/>
         </p:nvCxnSpPr>
         <p:spPr>
           <a:xfrm>
-            <a:off x="4089400" y="2743200"/>
-            <a:ext cx="1625600" cy="698500"/>
+            <a:off x="4397829" y="2812869"/>
+            <a:ext cx="1317171" cy="628831"/>
           </a:xfrm>
           <a:prstGeom prst="line">
             <a:avLst/>
@@ -19132,12 +19101,14 @@
       <p:cxnSp>
         <p:nvCxnSpPr>
           <p:cNvPr id="47" name="Connector 46"/>
-          <p:cNvCxnSpPr/>
+          <p:cNvCxnSpPr>
+            <a:cxnSpLocks/>
+          </p:cNvCxnSpPr>
           <p:nvPr/>
         </p:nvCxnSpPr>
         <p:spPr>
           <a:xfrm>
-            <a:off x="6223000" y="3441700"/>
+            <a:off x="6223000" y="3460931"/>
             <a:ext cx="1625600" cy="0"/>
           </a:xfrm>
           <a:prstGeom prst="line">
@@ -19168,13 +19139,15 @@
       <p:cxnSp>
         <p:nvCxnSpPr>
           <p:cNvPr id="48" name="Connector 47"/>
-          <p:cNvCxnSpPr/>
+          <p:cNvCxnSpPr>
+            <a:cxnSpLocks/>
+          </p:cNvCxnSpPr>
           <p:nvPr/>
         </p:nvCxnSpPr>
         <p:spPr>
           <a:xfrm flipH="1">
-            <a:off x="5715000" y="3441700"/>
-            <a:ext cx="2641600" cy="698500"/>
+            <a:off x="5969001" y="3600632"/>
+            <a:ext cx="1917700" cy="412568"/>
           </a:xfrm>
           <a:prstGeom prst="line">
             <a:avLst/>
@@ -19204,13 +19177,16 @@
       <p:cxnSp>
         <p:nvCxnSpPr>
           <p:cNvPr id="49" name="Connector 48"/>
-          <p:cNvCxnSpPr/>
+          <p:cNvCxnSpPr>
+            <a:cxnSpLocks/>
+            <a:stCxn id="34" idx="1"/>
+          </p:cNvCxnSpPr>
           <p:nvPr/>
         </p:nvCxnSpPr>
         <p:spPr>
           <a:xfrm>
-            <a:off x="6223000" y="4140200"/>
-            <a:ext cx="3759200" cy="0"/>
+            <a:off x="6032500" y="4184650"/>
+            <a:ext cx="3900351" cy="0"/>
           </a:xfrm>
           <a:prstGeom prst="line">
             <a:avLst/>
@@ -19240,13 +19216,15 @@
       <p:cxnSp>
         <p:nvCxnSpPr>
           <p:cNvPr id="50" name="Connector 49"/>
-          <p:cNvCxnSpPr/>
+          <p:cNvCxnSpPr>
+            <a:cxnSpLocks/>
+          </p:cNvCxnSpPr>
           <p:nvPr/>
         </p:nvCxnSpPr>
         <p:spPr>
           <a:xfrm flipH="1">
-            <a:off x="7848600" y="4140200"/>
-            <a:ext cx="2641600" cy="698500"/>
+            <a:off x="8102600" y="4279900"/>
+            <a:ext cx="1841500" cy="419100"/>
           </a:xfrm>
           <a:prstGeom prst="line">
             <a:avLst/>
@@ -19276,13 +19254,15 @@
       <p:cxnSp>
         <p:nvCxnSpPr>
           <p:cNvPr id="51" name="Connector 50"/>
-          <p:cNvCxnSpPr/>
+          <p:cNvCxnSpPr>
+            <a:cxnSpLocks/>
+          </p:cNvCxnSpPr>
           <p:nvPr/>
         </p:nvCxnSpPr>
         <p:spPr>
           <a:xfrm flipH="1">
-            <a:off x="3581400" y="4838700"/>
-            <a:ext cx="4775200" cy="0"/>
+            <a:off x="3962400" y="4838700"/>
+            <a:ext cx="3814354" cy="44450"/>
           </a:xfrm>
           <a:prstGeom prst="line">
             <a:avLst/>
@@ -19318,7 +19298,7 @@
 </file>
 
 <file path=ppt/slides/slide7.xml><?xml version="1.0" encoding="utf-8"?>
-<p:sld xmlns:a="http://schemas.openxmlformats.org/drawingml/2006/main" xmlns:p="http://schemas.openxmlformats.org/presentationml/2006/main" xmlns:r="http://schemas.openxmlformats.org/officeDocument/2006/relationships">
+<p:sld xmlns:a="http://schemas.openxmlformats.org/drawingml/2006/main" xmlns:r="http://schemas.openxmlformats.org/officeDocument/2006/relationships" xmlns:p="http://schemas.openxmlformats.org/presentationml/2006/main">
   <p:cSld>
     <p:spTree>
       <p:nvGrpSpPr>
@@ -19326,7 +19306,14 @@
         <p:cNvGrpSpPr/>
         <p:nvPr/>
       </p:nvGrpSpPr>
-      <p:grpSpPr/>
+      <p:grpSpPr>
+        <a:xfrm>
+          <a:off x="0" y="0"/>
+          <a:ext cx="0" cy="0"/>
+          <a:chOff x="0" y="0"/>
+          <a:chExt cx="0" cy="0"/>
+        </a:xfrm>
+      </p:grpSpPr>
       <p:sp>
         <p:nvSpPr>
           <p:cNvPr id="2" name="Rectangle 1"/>
@@ -19368,6 +19355,7 @@
           <a:lstStyle/>
           <a:p>
             <a:pPr algn="ctr"/>
+            <a:endParaRPr/>
           </a:p>
         </p:txBody>
       </p:sp>
@@ -19388,7 +19376,7 @@
           <a:noFill/>
         </p:spPr>
         <p:txBody>
-          <a:bodyPr wrap="square" lIns="0" rIns="0" tIns="0" bIns="0" anchor="t">
+          <a:bodyPr wrap="square" lIns="0" tIns="0" rIns="0" bIns="0" anchor="t">
             <a:spAutoFit/>
           </a:bodyPr>
           <a:lstStyle/>
@@ -19427,7 +19415,7 @@
           <a:noFill/>
         </p:spPr>
         <p:txBody>
-          <a:bodyPr wrap="square" lIns="0" rIns="0" tIns="0" bIns="0" anchor="t">
+          <a:bodyPr wrap="square" lIns="0" tIns="0" rIns="0" bIns="0" anchor="t">
             <a:spAutoFit/>
           </a:bodyPr>
           <a:lstStyle/>
@@ -19466,7 +19454,7 @@
           <a:noFill/>
         </p:spPr>
         <p:txBody>
-          <a:bodyPr wrap="square" lIns="0" rIns="0" tIns="0" bIns="0" anchor="t">
+          <a:bodyPr wrap="square" lIns="0" tIns="0" rIns="0" bIns="0" anchor="t">
             <a:spAutoFit/>
           </a:bodyPr>
           <a:lstStyle/>
@@ -19533,6 +19521,7 @@
           <a:lstStyle/>
           <a:p>
             <a:pPr algn="ctr"/>
+            <a:endParaRPr/>
           </a:p>
         </p:txBody>
       </p:sp>
@@ -19579,6 +19568,7 @@
           <a:lstStyle/>
           <a:p>
             <a:pPr algn="ctr"/>
+            <a:endParaRPr/>
           </a:p>
         </p:txBody>
       </p:sp>
@@ -19599,7 +19589,7 @@
           <a:noFill/>
         </p:spPr>
         <p:txBody>
-          <a:bodyPr wrap="square" lIns="0" rIns="0" tIns="0" bIns="0" anchor="t">
+          <a:bodyPr wrap="square" lIns="0" tIns="0" rIns="0" bIns="0" anchor="t">
             <a:spAutoFit/>
           </a:bodyPr>
           <a:lstStyle/>
@@ -19630,7 +19620,7 @@
         <p:spPr>
           <a:xfrm>
             <a:off x="1016000" y="2298700"/>
-            <a:ext cx="1320800" cy="190500"/>
+            <a:ext cx="1735908" cy="203200"/>
           </a:xfrm>
           <a:prstGeom prst="roundRect">
             <a:avLst>
@@ -19664,6 +19654,7 @@
           <a:lstStyle/>
           <a:p>
             <a:pPr algn="ctr"/>
+            <a:endParaRPr/>
           </a:p>
         </p:txBody>
       </p:sp>
@@ -19675,16 +19666,16 @@
         </p:nvSpPr>
         <p:spPr>
           <a:xfrm>
-            <a:off x="1016000" y="2324100"/>
-            <a:ext cx="1320800" cy="165100"/>
-          </a:xfrm>
-          <a:prstGeom prst="rect">
-            <a:avLst/>
-          </a:prstGeom>
-          <a:noFill/>
-        </p:spPr>
-        <p:txBody>
-          <a:bodyPr wrap="square" lIns="0" rIns="0" tIns="0" bIns="0" anchor="t">
+            <a:off x="985519" y="2334679"/>
+            <a:ext cx="1796869" cy="169342"/>
+          </a:xfrm>
+          <a:prstGeom prst="rect">
+            <a:avLst/>
+          </a:prstGeom>
+          <a:noFill/>
+        </p:spPr>
+        <p:txBody>
+          <a:bodyPr wrap="square" lIns="0" tIns="0" rIns="0" bIns="0" anchor="t">
             <a:spAutoFit/>
           </a:bodyPr>
           <a:lstStyle/>
@@ -19695,7 +19686,7 @@
               </a:lnSpc>
             </a:pPr>
             <a:r>
-              <a:rPr sz="1000" b="1" i="0" spc="200">
+              <a:rPr sz="1000" b="1" i="0" spc="200" dirty="0">
                 <a:solidFill>
                   <a:srgbClr val="BB8520"/>
                 </a:solidFill>
@@ -19743,7 +19734,7 @@
           </a:fontRef>
         </p:style>
         <p:txBody>
-          <a:bodyPr rtlCol="0" anchor="ctr" lIns="0" rIns="0" tIns="0" bIns="0"/>
+          <a:bodyPr lIns="0" tIns="0" rIns="0" bIns="0" rtlCol="0" anchor="ctr"/>
           <a:lstStyle/>
           <a:p>
             <a:pPr algn="ctr"/>
@@ -19776,7 +19767,7 @@
           <a:noFill/>
         </p:spPr>
         <p:txBody>
-          <a:bodyPr wrap="square" lIns="0" rIns="0" tIns="0" bIns="0" anchor="t">
+          <a:bodyPr wrap="square" lIns="0" tIns="0" rIns="0" bIns="0" anchor="t">
             <a:spAutoFit/>
           </a:bodyPr>
           <a:lstStyle/>
@@ -19815,7 +19806,7 @@
           <a:noFill/>
         </p:spPr>
         <p:txBody>
-          <a:bodyPr wrap="square" lIns="0" rIns="0" tIns="0" bIns="0" anchor="t">
+          <a:bodyPr wrap="square" lIns="0" tIns="0" rIns="0" bIns="0" anchor="t">
             <a:spAutoFit/>
           </a:bodyPr>
           <a:lstStyle/>
@@ -19874,7 +19865,7 @@
           </a:fontRef>
         </p:style>
         <p:txBody>
-          <a:bodyPr rtlCol="0" anchor="ctr" lIns="0" rIns="0" tIns="0" bIns="0"/>
+          <a:bodyPr lIns="0" tIns="0" rIns="0" bIns="0" rtlCol="0" anchor="ctr"/>
           <a:lstStyle/>
           <a:p>
             <a:pPr algn="ctr"/>
@@ -19907,7 +19898,7 @@
           <a:noFill/>
         </p:spPr>
         <p:txBody>
-          <a:bodyPr wrap="square" lIns="0" rIns="0" tIns="0" bIns="0" anchor="t">
+          <a:bodyPr wrap="square" lIns="0" tIns="0" rIns="0" bIns="0" anchor="t">
             <a:spAutoFit/>
           </a:bodyPr>
           <a:lstStyle/>
@@ -19946,7 +19937,7 @@
           <a:noFill/>
         </p:spPr>
         <p:txBody>
-          <a:bodyPr wrap="square" lIns="0" rIns="0" tIns="0" bIns="0" anchor="t">
+          <a:bodyPr wrap="square" lIns="0" tIns="0" rIns="0" bIns="0" anchor="t">
             <a:spAutoFit/>
           </a:bodyPr>
           <a:lstStyle/>
@@ -20005,7 +19996,7 @@
           </a:fontRef>
         </p:style>
         <p:txBody>
-          <a:bodyPr rtlCol="0" anchor="ctr" lIns="0" rIns="0" tIns="0" bIns="0"/>
+          <a:bodyPr lIns="0" tIns="0" rIns="0" bIns="0" rtlCol="0" anchor="ctr"/>
           <a:lstStyle/>
           <a:p>
             <a:pPr algn="ctr"/>
@@ -20038,7 +20029,7 @@
           <a:noFill/>
         </p:spPr>
         <p:txBody>
-          <a:bodyPr wrap="square" lIns="0" rIns="0" tIns="0" bIns="0" anchor="t">
+          <a:bodyPr wrap="square" lIns="0" tIns="0" rIns="0" bIns="0" anchor="t">
             <a:spAutoFit/>
           </a:bodyPr>
           <a:lstStyle/>
@@ -20077,7 +20068,7 @@
           <a:noFill/>
         </p:spPr>
         <p:txBody>
-          <a:bodyPr wrap="square" lIns="0" rIns="0" tIns="0" bIns="0" anchor="t">
+          <a:bodyPr wrap="square" lIns="0" tIns="0" rIns="0" bIns="0" anchor="t">
             <a:spAutoFit/>
           </a:bodyPr>
           <a:lstStyle/>
@@ -20136,7 +20127,7 @@
           </a:fontRef>
         </p:style>
         <p:txBody>
-          <a:bodyPr rtlCol="0" anchor="ctr" lIns="0" rIns="0" tIns="0" bIns="0"/>
+          <a:bodyPr lIns="0" tIns="0" rIns="0" bIns="0" rtlCol="0" anchor="ctr"/>
           <a:lstStyle/>
           <a:p>
             <a:pPr algn="ctr"/>
@@ -20169,7 +20160,7 @@
           <a:noFill/>
         </p:spPr>
         <p:txBody>
-          <a:bodyPr wrap="square" lIns="0" rIns="0" tIns="0" bIns="0" anchor="t">
+          <a:bodyPr wrap="square" lIns="0" tIns="0" rIns="0" bIns="0" anchor="t">
             <a:spAutoFit/>
           </a:bodyPr>
           <a:lstStyle/>
@@ -20208,7 +20199,7 @@
           <a:noFill/>
         </p:spPr>
         <p:txBody>
-          <a:bodyPr wrap="square" lIns="0" rIns="0" tIns="0" bIns="0" anchor="t">
+          <a:bodyPr wrap="square" lIns="0" tIns="0" rIns="0" bIns="0" anchor="t">
             <a:spAutoFit/>
           </a:bodyPr>
           <a:lstStyle/>
@@ -20219,13 +20210,22 @@
               </a:lnSpc>
             </a:pPr>
             <a:r>
-              <a:rPr sz="1100" b="0" i="0">
+              <a:rPr sz="1100" b="0" i="0" dirty="0" err="1">
                 <a:solidFill>
                   <a:srgbClr val="5A6A7E"/>
                 </a:solidFill>
                 <a:latin typeface="DM Sans"/>
               </a:rPr>
-              <a:t>blockchainStatus = 'logged'</a:t>
+              <a:t>blockchainStatus</a:t>
+            </a:r>
+            <a:r>
+              <a:rPr sz="1100" b="0" i="0" dirty="0">
+                <a:solidFill>
+                  <a:srgbClr val="5A6A7E"/>
+                </a:solidFill>
+                <a:latin typeface="DM Sans"/>
+              </a:rPr>
+              <a:t> = 'logged'</a:t>
             </a:r>
           </a:p>
         </p:txBody>
@@ -20267,7 +20267,7 @@
           </a:fontRef>
         </p:style>
         <p:txBody>
-          <a:bodyPr rtlCol="0" anchor="ctr" lIns="0" rIns="0" tIns="0" bIns="0"/>
+          <a:bodyPr lIns="0" tIns="0" rIns="0" bIns="0" rtlCol="0" anchor="ctr"/>
           <a:lstStyle/>
           <a:p>
             <a:pPr algn="ctr"/>
@@ -20300,7 +20300,7 @@
           <a:noFill/>
         </p:spPr>
         <p:txBody>
-          <a:bodyPr wrap="square" lIns="0" rIns="0" tIns="0" bIns="0" anchor="t">
+          <a:bodyPr wrap="square" lIns="0" tIns="0" rIns="0" bIns="0" anchor="t">
             <a:spAutoFit/>
           </a:bodyPr>
           <a:lstStyle/>
@@ -20339,7 +20339,7 @@
           <a:noFill/>
         </p:spPr>
         <p:txBody>
-          <a:bodyPr wrap="square" lIns="0" rIns="0" tIns="0" bIns="0" anchor="t">
+          <a:bodyPr wrap="square" lIns="0" tIns="0" rIns="0" bIns="0" anchor="t">
             <a:spAutoFit/>
           </a:bodyPr>
           <a:lstStyle/>
@@ -20406,6 +20406,7 @@
           <a:lstStyle/>
           <a:p>
             <a:pPr algn="ctr"/>
+            <a:endParaRPr/>
           </a:p>
         </p:txBody>
       </p:sp>
@@ -20452,6 +20453,7 @@
           <a:lstStyle/>
           <a:p>
             <a:pPr algn="ctr"/>
+            <a:endParaRPr/>
           </a:p>
         </p:txBody>
       </p:sp>
@@ -20472,7 +20474,7 @@
           <a:noFill/>
         </p:spPr>
         <p:txBody>
-          <a:bodyPr wrap="square" lIns="0" rIns="0" tIns="0" bIns="0" anchor="t">
+          <a:bodyPr wrap="square" lIns="0" tIns="0" rIns="0" bIns="0" anchor="t">
             <a:spAutoFit/>
           </a:bodyPr>
           <a:lstStyle/>
@@ -20502,8 +20504,8 @@
         </p:nvSpPr>
         <p:spPr>
           <a:xfrm>
-            <a:off x="6477000" y="2298700"/>
-            <a:ext cx="1473200" cy="190500"/>
+            <a:off x="6476999" y="2298700"/>
+            <a:ext cx="1804852" cy="203200"/>
           </a:xfrm>
           <a:prstGeom prst="roundRect">
             <a:avLst>
@@ -20537,6 +20539,7 @@
           <a:lstStyle/>
           <a:p>
             <a:pPr algn="ctr"/>
+            <a:endParaRPr/>
           </a:p>
         </p:txBody>
       </p:sp>
@@ -20548,16 +20551,16 @@
         </p:nvSpPr>
         <p:spPr>
           <a:xfrm>
-            <a:off x="6477000" y="2324100"/>
-            <a:ext cx="1473200" cy="165100"/>
-          </a:xfrm>
-          <a:prstGeom prst="rect">
-            <a:avLst/>
-          </a:prstGeom>
-          <a:noFill/>
-        </p:spPr>
-        <p:txBody>
-          <a:bodyPr wrap="square" lIns="0" rIns="0" tIns="0" bIns="0" anchor="t">
+            <a:off x="6424748" y="2328510"/>
+            <a:ext cx="1909354" cy="169342"/>
+          </a:xfrm>
+          <a:prstGeom prst="rect">
+            <a:avLst/>
+          </a:prstGeom>
+          <a:noFill/>
+        </p:spPr>
+        <p:txBody>
+          <a:bodyPr wrap="square" lIns="0" tIns="0" rIns="0" bIns="0" anchor="t">
             <a:spAutoFit/>
           </a:bodyPr>
           <a:lstStyle/>
@@ -20568,14 +20571,29 @@
               </a:lnSpc>
             </a:pPr>
             <a:r>
-              <a:rPr sz="1000" b="1" i="0" spc="200">
+              <a:rPr sz="1000" b="1" i="0" spc="200" dirty="0">
                 <a:solidFill>
                   <a:srgbClr val="0AA693"/>
                 </a:solidFill>
                 <a:latin typeface="DM Sans"/>
               </a:rPr>
-              <a:t>TRUSTLESS · DApp</a:t>
-            </a:r>
+              <a:t>TRUSTLESS · </a:t>
+            </a:r>
+            <a:r>
+              <a:rPr sz="1000" b="1" i="0" spc="200" dirty="0" err="1">
+                <a:solidFill>
+                  <a:srgbClr val="0AA693"/>
+                </a:solidFill>
+                <a:latin typeface="DM Sans"/>
+              </a:rPr>
+              <a:t>DApp</a:t>
+            </a:r>
+            <a:endParaRPr sz="1000" b="1" i="0" spc="200" dirty="0">
+              <a:solidFill>
+                <a:srgbClr val="0AA693"/>
+              </a:solidFill>
+              <a:latin typeface="DM Sans"/>
+            </a:endParaRPr>
           </a:p>
         </p:txBody>
       </p:sp>
@@ -20616,7 +20634,7 @@
           </a:fontRef>
         </p:style>
         <p:txBody>
-          <a:bodyPr rtlCol="0" anchor="ctr" lIns="0" rIns="0" tIns="0" bIns="0"/>
+          <a:bodyPr lIns="0" tIns="0" rIns="0" bIns="0" rtlCol="0" anchor="ctr"/>
           <a:lstStyle/>
           <a:p>
             <a:pPr algn="ctr"/>
@@ -20649,7 +20667,7 @@
           <a:noFill/>
         </p:spPr>
         <p:txBody>
-          <a:bodyPr wrap="square" lIns="0" rIns="0" tIns="0" bIns="0" anchor="t">
+          <a:bodyPr wrap="square" lIns="0" tIns="0" rIns="0" bIns="0" anchor="t">
             <a:spAutoFit/>
           </a:bodyPr>
           <a:lstStyle/>
@@ -20688,7 +20706,7 @@
           <a:noFill/>
         </p:spPr>
         <p:txBody>
-          <a:bodyPr wrap="square" lIns="0" rIns="0" tIns="0" bIns="0" anchor="t">
+          <a:bodyPr wrap="square" lIns="0" tIns="0" rIns="0" bIns="0" anchor="t">
             <a:spAutoFit/>
           </a:bodyPr>
           <a:lstStyle/>
@@ -20747,7 +20765,7 @@
           </a:fontRef>
         </p:style>
         <p:txBody>
-          <a:bodyPr rtlCol="0" anchor="ctr" lIns="0" rIns="0" tIns="0" bIns="0"/>
+          <a:bodyPr lIns="0" tIns="0" rIns="0" bIns="0" rtlCol="0" anchor="ctr"/>
           <a:lstStyle/>
           <a:p>
             <a:pPr algn="ctr"/>
@@ -20780,7 +20798,7 @@
           <a:noFill/>
         </p:spPr>
         <p:txBody>
-          <a:bodyPr wrap="square" lIns="0" rIns="0" tIns="0" bIns="0" anchor="t">
+          <a:bodyPr wrap="square" lIns="0" tIns="0" rIns="0" bIns="0" anchor="t">
             <a:spAutoFit/>
           </a:bodyPr>
           <a:lstStyle/>
@@ -20819,7 +20837,7 @@
           <a:noFill/>
         </p:spPr>
         <p:txBody>
-          <a:bodyPr wrap="square" lIns="0" rIns="0" tIns="0" bIns="0" anchor="t">
+          <a:bodyPr wrap="square" lIns="0" tIns="0" rIns="0" bIns="0" anchor="t">
             <a:spAutoFit/>
           </a:bodyPr>
           <a:lstStyle/>
@@ -20878,7 +20896,7 @@
           </a:fontRef>
         </p:style>
         <p:txBody>
-          <a:bodyPr rtlCol="0" anchor="ctr" lIns="0" rIns="0" tIns="0" bIns="0"/>
+          <a:bodyPr lIns="0" tIns="0" rIns="0" bIns="0" rtlCol="0" anchor="ctr"/>
           <a:lstStyle/>
           <a:p>
             <a:pPr algn="ctr"/>
@@ -20911,7 +20929,7 @@
           <a:noFill/>
         </p:spPr>
         <p:txBody>
-          <a:bodyPr wrap="square" lIns="0" rIns="0" tIns="0" bIns="0" anchor="t">
+          <a:bodyPr wrap="square" lIns="0" tIns="0" rIns="0" bIns="0" anchor="t">
             <a:spAutoFit/>
           </a:bodyPr>
           <a:lstStyle/>
@@ -20950,7 +20968,7 @@
           <a:noFill/>
         </p:spPr>
         <p:txBody>
-          <a:bodyPr wrap="square" lIns="0" rIns="0" tIns="0" bIns="0" anchor="t">
+          <a:bodyPr wrap="square" lIns="0" tIns="0" rIns="0" bIns="0" anchor="t">
             <a:spAutoFit/>
           </a:bodyPr>
           <a:lstStyle/>
@@ -21009,7 +21027,7 @@
           </a:fontRef>
         </p:style>
         <p:txBody>
-          <a:bodyPr rtlCol="0" anchor="ctr" lIns="0" rIns="0" tIns="0" bIns="0"/>
+          <a:bodyPr lIns="0" tIns="0" rIns="0" bIns="0" rtlCol="0" anchor="ctr"/>
           <a:lstStyle/>
           <a:p>
             <a:pPr algn="ctr"/>
@@ -21042,7 +21060,7 @@
           <a:noFill/>
         </p:spPr>
         <p:txBody>
-          <a:bodyPr wrap="square" lIns="0" rIns="0" tIns="0" bIns="0" anchor="t">
+          <a:bodyPr wrap="square" lIns="0" tIns="0" rIns="0" bIns="0" anchor="t">
             <a:spAutoFit/>
           </a:bodyPr>
           <a:lstStyle/>
@@ -21081,7 +21099,7 @@
           <a:noFill/>
         </p:spPr>
         <p:txBody>
-          <a:bodyPr wrap="square" lIns="0" rIns="0" tIns="0" bIns="0" anchor="t">
+          <a:bodyPr wrap="square" lIns="0" tIns="0" rIns="0" bIns="0" anchor="t">
             <a:spAutoFit/>
           </a:bodyPr>
           <a:lstStyle/>
@@ -21140,7 +21158,7 @@
           </a:fontRef>
         </p:style>
         <p:txBody>
-          <a:bodyPr rtlCol="0" anchor="ctr" lIns="0" rIns="0" tIns="0" bIns="0"/>
+          <a:bodyPr lIns="0" tIns="0" rIns="0" bIns="0" rtlCol="0" anchor="ctr"/>
           <a:lstStyle/>
           <a:p>
             <a:pPr algn="ctr"/>
@@ -21173,7 +21191,7 @@
           <a:noFill/>
         </p:spPr>
         <p:txBody>
-          <a:bodyPr wrap="square" lIns="0" rIns="0" tIns="0" bIns="0" anchor="t">
+          <a:bodyPr wrap="square" lIns="0" tIns="0" rIns="0" bIns="0" anchor="t">
             <a:spAutoFit/>
           </a:bodyPr>
           <a:lstStyle/>
@@ -21212,7 +21230,7 @@
           <a:noFill/>
         </p:spPr>
         <p:txBody>
-          <a:bodyPr wrap="square" lIns="0" rIns="0" tIns="0" bIns="0" anchor="t">
+          <a:bodyPr wrap="square" lIns="0" tIns="0" rIns="0" bIns="0" anchor="t">
             <a:spAutoFit/>
           </a:bodyPr>
           <a:lstStyle/>
@@ -21243,7 +21261,7 @@
 </file>
 
 <file path=ppt/slides/slide8.xml><?xml version="1.0" encoding="utf-8"?>
-<p:sld xmlns:a="http://schemas.openxmlformats.org/drawingml/2006/main" xmlns:p="http://schemas.openxmlformats.org/presentationml/2006/main" xmlns:r="http://schemas.openxmlformats.org/officeDocument/2006/relationships">
+<p:sld xmlns:a="http://schemas.openxmlformats.org/drawingml/2006/main" xmlns:r="http://schemas.openxmlformats.org/officeDocument/2006/relationships" xmlns:p="http://schemas.openxmlformats.org/presentationml/2006/main">
   <p:cSld>
     <p:spTree>
       <p:nvGrpSpPr>
@@ -21251,7 +21269,14 @@
         <p:cNvGrpSpPr/>
         <p:nvPr/>
       </p:nvGrpSpPr>
-      <p:grpSpPr/>
+      <p:grpSpPr>
+        <a:xfrm>
+          <a:off x="0" y="0"/>
+          <a:ext cx="0" cy="0"/>
+          <a:chOff x="0" y="0"/>
+          <a:chExt cx="0" cy="0"/>
+        </a:xfrm>
+      </p:grpSpPr>
       <p:sp>
         <p:nvSpPr>
           <p:cNvPr id="2" name="Rectangle 1"/>
@@ -21293,6 +21318,7 @@
           <a:lstStyle/>
           <a:p>
             <a:pPr algn="ctr"/>
+            <a:endParaRPr/>
           </a:p>
         </p:txBody>
       </p:sp>
@@ -21313,7 +21339,7 @@
           <a:noFill/>
         </p:spPr>
         <p:txBody>
-          <a:bodyPr wrap="square" lIns="0" rIns="0" tIns="0" bIns="0" anchor="t">
+          <a:bodyPr wrap="square" lIns="0" tIns="0" rIns="0" bIns="0" anchor="t">
             <a:spAutoFit/>
           </a:bodyPr>
           <a:lstStyle/>
@@ -21352,7 +21378,7 @@
           <a:noFill/>
         </p:spPr>
         <p:txBody>
-          <a:bodyPr wrap="square" lIns="0" rIns="0" tIns="0" bIns="0" anchor="t">
+          <a:bodyPr wrap="square" lIns="0" tIns="0" rIns="0" bIns="0" anchor="t">
             <a:spAutoFit/>
           </a:bodyPr>
           <a:lstStyle/>
@@ -21417,6 +21443,7 @@
           <a:lstStyle/>
           <a:p>
             <a:pPr algn="ctr"/>
+            <a:endParaRPr/>
           </a:p>
         </p:txBody>
       </p:sp>
@@ -21463,6 +21490,7 @@
           <a:lstStyle/>
           <a:p>
             <a:pPr algn="ctr"/>
+            <a:endParaRPr/>
           </a:p>
         </p:txBody>
       </p:sp>
@@ -21483,7 +21511,7 @@
           <a:noFill/>
         </p:spPr>
         <p:txBody>
-          <a:bodyPr wrap="square" lIns="0" rIns="0" tIns="0" bIns="0" anchor="t">
+          <a:bodyPr wrap="square" lIns="0" tIns="0" rIns="0" bIns="0" anchor="t">
             <a:spAutoFit/>
           </a:bodyPr>
           <a:lstStyle/>
@@ -21522,7 +21550,7 @@
           <a:noFill/>
         </p:spPr>
         <p:txBody>
-          <a:bodyPr wrap="square" lIns="0" rIns="0" tIns="0" bIns="0" anchor="t">
+          <a:bodyPr wrap="square" lIns="0" tIns="0" rIns="0" bIns="0" anchor="t">
             <a:spAutoFit/>
           </a:bodyPr>
           <a:lstStyle/>
@@ -21561,7 +21589,7 @@
           <a:noFill/>
         </p:spPr>
         <p:txBody>
-          <a:bodyPr wrap="square" lIns="0" rIns="0" tIns="0" bIns="0" anchor="t">
+          <a:bodyPr wrap="square" lIns="0" tIns="0" rIns="0" bIns="0" anchor="t">
             <a:spAutoFit/>
           </a:bodyPr>
           <a:lstStyle/>
@@ -21600,7 +21628,7 @@
           <a:noFill/>
         </p:spPr>
         <p:txBody>
-          <a:bodyPr wrap="square" lIns="0" rIns="0" tIns="0" bIns="0" anchor="t">
+          <a:bodyPr wrap="square" lIns="0" tIns="0" rIns="0" bIns="0" anchor="t">
             <a:spAutoFit/>
           </a:bodyPr>
           <a:lstStyle/>
@@ -21639,7 +21667,7 @@
           <a:noFill/>
         </p:spPr>
         <p:txBody>
-          <a:bodyPr wrap="square" lIns="0" rIns="0" tIns="0" bIns="0" anchor="t">
+          <a:bodyPr wrap="square" lIns="0" tIns="0" rIns="0" bIns="0" anchor="t">
             <a:spAutoFit/>
           </a:bodyPr>
           <a:lstStyle/>
@@ -21678,7 +21706,7 @@
           <a:noFill/>
         </p:spPr>
         <p:txBody>
-          <a:bodyPr wrap="square" lIns="0" rIns="0" tIns="0" bIns="0" anchor="t">
+          <a:bodyPr wrap="square" lIns="0" tIns="0" rIns="0" bIns="0" anchor="t">
             <a:spAutoFit/>
           </a:bodyPr>
           <a:lstStyle/>
@@ -21717,7 +21745,7 @@
           <a:noFill/>
         </p:spPr>
         <p:txBody>
-          <a:bodyPr wrap="square" lIns="0" rIns="0" tIns="0" bIns="0" anchor="t">
+          <a:bodyPr wrap="square" lIns="0" tIns="0" rIns="0" bIns="0" anchor="t">
             <a:spAutoFit/>
           </a:bodyPr>
           <a:lstStyle/>
@@ -21756,7 +21784,7 @@
           <a:noFill/>
         </p:spPr>
         <p:txBody>
-          <a:bodyPr wrap="square" lIns="0" rIns="0" tIns="0" bIns="0" anchor="t">
+          <a:bodyPr wrap="square" lIns="0" tIns="0" rIns="0" bIns="0" anchor="t">
             <a:spAutoFit/>
           </a:bodyPr>
           <a:lstStyle/>
@@ -21795,7 +21823,7 @@
           <a:noFill/>
         </p:spPr>
         <p:txBody>
-          <a:bodyPr wrap="square" lIns="0" rIns="0" tIns="0" bIns="0" anchor="ctr">
+          <a:bodyPr wrap="square" lIns="0" tIns="0" rIns="0" bIns="0" anchor="ctr">
             <a:spAutoFit/>
           </a:bodyPr>
           <a:lstStyle/>
@@ -21834,7 +21862,7 @@
           <a:noFill/>
         </p:spPr>
         <p:txBody>
-          <a:bodyPr wrap="square" lIns="0" rIns="0" tIns="0" bIns="0" anchor="ctr">
+          <a:bodyPr wrap="square" lIns="0" tIns="0" rIns="0" bIns="0" anchor="ctr">
             <a:spAutoFit/>
           </a:bodyPr>
           <a:lstStyle/>
@@ -21873,7 +21901,7 @@
           <a:noFill/>
         </p:spPr>
         <p:txBody>
-          <a:bodyPr wrap="square" lIns="0" rIns="0" tIns="0" bIns="0" anchor="ctr">
+          <a:bodyPr wrap="square" lIns="0" tIns="0" rIns="0" bIns="0" anchor="ctr">
             <a:spAutoFit/>
           </a:bodyPr>
           <a:lstStyle/>
@@ -21912,7 +21940,7 @@
           <a:noFill/>
         </p:spPr>
         <p:txBody>
-          <a:bodyPr wrap="square" lIns="0" rIns="0" tIns="0" bIns="0" anchor="ctr">
+          <a:bodyPr wrap="square" lIns="0" tIns="0" rIns="0" bIns="0" anchor="ctr">
             <a:spAutoFit/>
           </a:bodyPr>
           <a:lstStyle/>
@@ -21951,7 +21979,7 @@
           <a:noFill/>
         </p:spPr>
         <p:txBody>
-          <a:bodyPr wrap="square" lIns="0" rIns="0" tIns="0" bIns="0" anchor="ctr">
+          <a:bodyPr wrap="square" lIns="0" tIns="0" rIns="0" bIns="0" anchor="ctr">
             <a:spAutoFit/>
           </a:bodyPr>
           <a:lstStyle/>
@@ -22014,6 +22042,7 @@
           <a:lstStyle/>
           <a:p>
             <a:pPr algn="ctr"/>
+            <a:endParaRPr/>
           </a:p>
         </p:txBody>
       </p:sp>
@@ -22058,6 +22087,7 @@
           <a:lstStyle/>
           <a:p>
             <a:pPr algn="ctr"/>
+            <a:endParaRPr/>
           </a:p>
         </p:txBody>
       </p:sp>
@@ -22078,7 +22108,7 @@
           <a:noFill/>
         </p:spPr>
         <p:txBody>
-          <a:bodyPr wrap="square" lIns="0" rIns="0" tIns="0" bIns="0" anchor="ctr">
+          <a:bodyPr wrap="square" lIns="0" tIns="0" rIns="0" bIns="0" anchor="ctr">
             <a:spAutoFit/>
           </a:bodyPr>
           <a:lstStyle/>
@@ -22117,7 +22147,7 @@
           <a:noFill/>
         </p:spPr>
         <p:txBody>
-          <a:bodyPr wrap="square" lIns="0" rIns="0" tIns="0" bIns="0" anchor="ctr">
+          <a:bodyPr wrap="square" lIns="0" tIns="0" rIns="0" bIns="0" anchor="ctr">
             <a:spAutoFit/>
           </a:bodyPr>
           <a:lstStyle/>
@@ -22156,7 +22186,7 @@
           <a:noFill/>
         </p:spPr>
         <p:txBody>
-          <a:bodyPr wrap="square" lIns="0" rIns="0" tIns="0" bIns="0" anchor="ctr">
+          <a:bodyPr wrap="square" lIns="0" tIns="0" rIns="0" bIns="0" anchor="ctr">
             <a:spAutoFit/>
           </a:bodyPr>
           <a:lstStyle/>
@@ -22195,7 +22225,7 @@
           <a:noFill/>
         </p:spPr>
         <p:txBody>
-          <a:bodyPr wrap="square" lIns="0" rIns="0" tIns="0" bIns="0" anchor="ctr">
+          <a:bodyPr wrap="square" lIns="0" tIns="0" rIns="0" bIns="0" anchor="ctr">
             <a:spAutoFit/>
           </a:bodyPr>
           <a:lstStyle/>
@@ -22234,7 +22264,7 @@
           <a:noFill/>
         </p:spPr>
         <p:txBody>
-          <a:bodyPr wrap="square" lIns="0" rIns="0" tIns="0" bIns="0" anchor="ctr">
+          <a:bodyPr wrap="square" lIns="0" tIns="0" rIns="0" bIns="0" anchor="ctr">
             <a:spAutoFit/>
           </a:bodyPr>
           <a:lstStyle/>
@@ -22297,6 +22327,7 @@
           <a:lstStyle/>
           <a:p>
             <a:pPr algn="ctr"/>
+            <a:endParaRPr/>
           </a:p>
         </p:txBody>
       </p:sp>
@@ -22317,7 +22348,7 @@
           <a:noFill/>
         </p:spPr>
         <p:txBody>
-          <a:bodyPr wrap="square" lIns="0" rIns="0" tIns="0" bIns="0" anchor="ctr">
+          <a:bodyPr wrap="square" lIns="0" tIns="0" rIns="0" bIns="0" anchor="ctr">
             <a:spAutoFit/>
           </a:bodyPr>
           <a:lstStyle/>
@@ -22356,7 +22387,7 @@
           <a:noFill/>
         </p:spPr>
         <p:txBody>
-          <a:bodyPr wrap="square" lIns="0" rIns="0" tIns="0" bIns="0" anchor="ctr">
+          <a:bodyPr wrap="square" lIns="0" tIns="0" rIns="0" bIns="0" anchor="ctr">
             <a:spAutoFit/>
           </a:bodyPr>
           <a:lstStyle/>
@@ -22395,7 +22426,7 @@
           <a:noFill/>
         </p:spPr>
         <p:txBody>
-          <a:bodyPr wrap="square" lIns="0" rIns="0" tIns="0" bIns="0" anchor="ctr">
+          <a:bodyPr wrap="square" lIns="0" tIns="0" rIns="0" bIns="0" anchor="ctr">
             <a:spAutoFit/>
           </a:bodyPr>
           <a:lstStyle/>
@@ -22434,7 +22465,7 @@
           <a:noFill/>
         </p:spPr>
         <p:txBody>
-          <a:bodyPr wrap="square" lIns="0" rIns="0" tIns="0" bIns="0" anchor="ctr">
+          <a:bodyPr wrap="square" lIns="0" tIns="0" rIns="0" bIns="0" anchor="ctr">
             <a:spAutoFit/>
           </a:bodyPr>
           <a:lstStyle/>
@@ -22473,7 +22504,7 @@
           <a:noFill/>
         </p:spPr>
         <p:txBody>
-          <a:bodyPr wrap="square" lIns="0" rIns="0" tIns="0" bIns="0" anchor="ctr">
+          <a:bodyPr wrap="square" lIns="0" tIns="0" rIns="0" bIns="0" anchor="ctr">
             <a:spAutoFit/>
           </a:bodyPr>
           <a:lstStyle/>
@@ -22536,6 +22567,7 @@
           <a:lstStyle/>
           <a:p>
             <a:pPr algn="ctr"/>
+            <a:endParaRPr/>
           </a:p>
         </p:txBody>
       </p:sp>
@@ -22580,6 +22612,7 @@
           <a:lstStyle/>
           <a:p>
             <a:pPr algn="ctr"/>
+            <a:endParaRPr/>
           </a:p>
         </p:txBody>
       </p:sp>
@@ -22600,7 +22633,7 @@
           <a:noFill/>
         </p:spPr>
         <p:txBody>
-          <a:bodyPr wrap="square" lIns="0" rIns="0" tIns="0" bIns="0" anchor="ctr">
+          <a:bodyPr wrap="square" lIns="0" tIns="0" rIns="0" bIns="0" anchor="ctr">
             <a:spAutoFit/>
           </a:bodyPr>
           <a:lstStyle/>
@@ -22639,7 +22672,7 @@
           <a:noFill/>
         </p:spPr>
         <p:txBody>
-          <a:bodyPr wrap="square" lIns="0" rIns="0" tIns="0" bIns="0" anchor="ctr">
+          <a:bodyPr wrap="square" lIns="0" tIns="0" rIns="0" bIns="0" anchor="ctr">
             <a:spAutoFit/>
           </a:bodyPr>
           <a:lstStyle/>
@@ -22678,7 +22711,7 @@
           <a:noFill/>
         </p:spPr>
         <p:txBody>
-          <a:bodyPr wrap="square" lIns="0" rIns="0" tIns="0" bIns="0" anchor="ctr">
+          <a:bodyPr wrap="square" lIns="0" tIns="0" rIns="0" bIns="0" anchor="ctr">
             <a:spAutoFit/>
           </a:bodyPr>
           <a:lstStyle/>
@@ -22717,7 +22750,7 @@
           <a:noFill/>
         </p:spPr>
         <p:txBody>
-          <a:bodyPr wrap="square" lIns="0" rIns="0" tIns="0" bIns="0" anchor="ctr">
+          <a:bodyPr wrap="square" lIns="0" tIns="0" rIns="0" bIns="0" anchor="ctr">
             <a:spAutoFit/>
           </a:bodyPr>
           <a:lstStyle/>
@@ -22756,7 +22789,7 @@
           <a:noFill/>
         </p:spPr>
         <p:txBody>
-          <a:bodyPr wrap="square" lIns="0" rIns="0" tIns="0" bIns="0" anchor="ctr">
+          <a:bodyPr wrap="square" lIns="0" tIns="0" rIns="0" bIns="0" anchor="ctr">
             <a:spAutoFit/>
           </a:bodyPr>
           <a:lstStyle/>
@@ -22819,6 +22852,7 @@
           <a:lstStyle/>
           <a:p>
             <a:pPr algn="ctr"/>
+            <a:endParaRPr/>
           </a:p>
         </p:txBody>
       </p:sp>
@@ -22839,7 +22873,7 @@
           <a:noFill/>
         </p:spPr>
         <p:txBody>
-          <a:bodyPr wrap="square" lIns="0" rIns="0" tIns="0" bIns="0" anchor="ctr">
+          <a:bodyPr wrap="square" lIns="0" tIns="0" rIns="0" bIns="0" anchor="ctr">
             <a:spAutoFit/>
           </a:bodyPr>
           <a:lstStyle/>
@@ -22878,7 +22912,7 @@
           <a:noFill/>
         </p:spPr>
         <p:txBody>
-          <a:bodyPr wrap="square" lIns="0" rIns="0" tIns="0" bIns="0" anchor="ctr">
+          <a:bodyPr wrap="square" lIns="0" tIns="0" rIns="0" bIns="0" anchor="ctr">
             <a:spAutoFit/>
           </a:bodyPr>
           <a:lstStyle/>
@@ -22917,7 +22951,7 @@
           <a:noFill/>
         </p:spPr>
         <p:txBody>
-          <a:bodyPr wrap="square" lIns="0" rIns="0" tIns="0" bIns="0" anchor="ctr">
+          <a:bodyPr wrap="square" lIns="0" tIns="0" rIns="0" bIns="0" anchor="ctr">
             <a:spAutoFit/>
           </a:bodyPr>
           <a:lstStyle/>
@@ -22956,7 +22990,7 @@
           <a:noFill/>
         </p:spPr>
         <p:txBody>
-          <a:bodyPr wrap="square" lIns="0" rIns="0" tIns="0" bIns="0" anchor="ctr">
+          <a:bodyPr wrap="square" lIns="0" tIns="0" rIns="0" bIns="0" anchor="ctr">
             <a:spAutoFit/>
           </a:bodyPr>
           <a:lstStyle/>
@@ -22995,7 +23029,7 @@
           <a:noFill/>
         </p:spPr>
         <p:txBody>
-          <a:bodyPr wrap="square" lIns="0" rIns="0" tIns="0" bIns="0" anchor="ctr">
+          <a:bodyPr wrap="square" lIns="0" tIns="0" rIns="0" bIns="0" anchor="ctr">
             <a:spAutoFit/>
           </a:bodyPr>
           <a:lstStyle/>
@@ -23058,6 +23092,7 @@
           <a:lstStyle/>
           <a:p>
             <a:pPr algn="ctr"/>
+            <a:endParaRPr/>
           </a:p>
         </p:txBody>
       </p:sp>
@@ -23102,6 +23137,7 @@
           <a:lstStyle/>
           <a:p>
             <a:pPr algn="ctr"/>
+            <a:endParaRPr/>
           </a:p>
         </p:txBody>
       </p:sp>
@@ -23122,7 +23158,7 @@
           <a:noFill/>
         </p:spPr>
         <p:txBody>
-          <a:bodyPr wrap="square" lIns="0" rIns="0" tIns="0" bIns="0" anchor="ctr">
+          <a:bodyPr wrap="square" lIns="0" tIns="0" rIns="0" bIns="0" anchor="ctr">
             <a:spAutoFit/>
           </a:bodyPr>
           <a:lstStyle/>
@@ -23161,7 +23197,7 @@
           <a:noFill/>
         </p:spPr>
         <p:txBody>
-          <a:bodyPr wrap="square" lIns="0" rIns="0" tIns="0" bIns="0" anchor="ctr">
+          <a:bodyPr wrap="square" lIns="0" tIns="0" rIns="0" bIns="0" anchor="ctr">
             <a:spAutoFit/>
           </a:bodyPr>
           <a:lstStyle/>
@@ -23200,7 +23236,7 @@
           <a:noFill/>
         </p:spPr>
         <p:txBody>
-          <a:bodyPr wrap="square" lIns="0" rIns="0" tIns="0" bIns="0" anchor="ctr">
+          <a:bodyPr wrap="square" lIns="0" tIns="0" rIns="0" bIns="0" anchor="ctr">
             <a:spAutoFit/>
           </a:bodyPr>
           <a:lstStyle/>
@@ -23239,7 +23275,7 @@
           <a:noFill/>
         </p:spPr>
         <p:txBody>
-          <a:bodyPr wrap="square" lIns="0" rIns="0" tIns="0" bIns="0" anchor="ctr">
+          <a:bodyPr wrap="square" lIns="0" tIns="0" rIns="0" bIns="0" anchor="ctr">
             <a:spAutoFit/>
           </a:bodyPr>
           <a:lstStyle/>
@@ -23278,7 +23314,7 @@
           <a:noFill/>
         </p:spPr>
         <p:txBody>
-          <a:bodyPr wrap="square" lIns="0" rIns="0" tIns="0" bIns="0" anchor="ctr">
+          <a:bodyPr wrap="square" lIns="0" tIns="0" rIns="0" bIns="0" anchor="ctr">
             <a:spAutoFit/>
           </a:bodyPr>
           <a:lstStyle/>
@@ -23341,6 +23377,7 @@
           <a:lstStyle/>
           <a:p>
             <a:pPr algn="ctr"/>
+            <a:endParaRPr/>
           </a:p>
         </p:txBody>
       </p:sp>
@@ -23361,7 +23398,7 @@
           <a:noFill/>
         </p:spPr>
         <p:txBody>
-          <a:bodyPr wrap="square" lIns="0" rIns="0" tIns="0" bIns="0" anchor="ctr">
+          <a:bodyPr wrap="square" lIns="0" tIns="0" rIns="0" bIns="0" anchor="ctr">
             <a:spAutoFit/>
           </a:bodyPr>
           <a:lstStyle/>
@@ -23400,7 +23437,7 @@
           <a:noFill/>
         </p:spPr>
         <p:txBody>
-          <a:bodyPr wrap="square" lIns="0" rIns="0" tIns="0" bIns="0" anchor="ctr">
+          <a:bodyPr wrap="square" lIns="0" tIns="0" rIns="0" bIns="0" anchor="ctr">
             <a:spAutoFit/>
           </a:bodyPr>
           <a:lstStyle/>
@@ -23439,7 +23476,7 @@
           <a:noFill/>
         </p:spPr>
         <p:txBody>
-          <a:bodyPr wrap="square" lIns="0" rIns="0" tIns="0" bIns="0" anchor="ctr">
+          <a:bodyPr wrap="square" lIns="0" tIns="0" rIns="0" bIns="0" anchor="ctr">
             <a:spAutoFit/>
           </a:bodyPr>
           <a:lstStyle/>
@@ -23478,7 +23515,7 @@
           <a:noFill/>
         </p:spPr>
         <p:txBody>
-          <a:bodyPr wrap="square" lIns="0" rIns="0" tIns="0" bIns="0" anchor="ctr">
+          <a:bodyPr wrap="square" lIns="0" tIns="0" rIns="0" bIns="0" anchor="ctr">
             <a:spAutoFit/>
           </a:bodyPr>
           <a:lstStyle/>
@@ -23517,7 +23554,7 @@
           <a:noFill/>
         </p:spPr>
         <p:txBody>
-          <a:bodyPr wrap="square" lIns="0" rIns="0" tIns="0" bIns="0" anchor="ctr">
+          <a:bodyPr wrap="square" lIns="0" tIns="0" rIns="0" bIns="0" anchor="ctr">
             <a:spAutoFit/>
           </a:bodyPr>
           <a:lstStyle/>
@@ -23580,6 +23617,7 @@
           <a:lstStyle/>
           <a:p>
             <a:pPr algn="ctr"/>
+            <a:endParaRPr/>
           </a:p>
         </p:txBody>
       </p:sp>
@@ -23624,6 +23662,7 @@
           <a:lstStyle/>
           <a:p>
             <a:pPr algn="ctr"/>
+            <a:endParaRPr/>
           </a:p>
         </p:txBody>
       </p:sp>
@@ -23644,7 +23683,7 @@
           <a:noFill/>
         </p:spPr>
         <p:txBody>
-          <a:bodyPr wrap="square" lIns="0" rIns="0" tIns="0" bIns="0" anchor="ctr">
+          <a:bodyPr wrap="square" lIns="0" tIns="0" rIns="0" bIns="0" anchor="ctr">
             <a:spAutoFit/>
           </a:bodyPr>
           <a:lstStyle/>
@@ -23683,7 +23722,7 @@
           <a:noFill/>
         </p:spPr>
         <p:txBody>
-          <a:bodyPr wrap="square" lIns="0" rIns="0" tIns="0" bIns="0" anchor="ctr">
+          <a:bodyPr wrap="square" lIns="0" tIns="0" rIns="0" bIns="0" anchor="ctr">
             <a:spAutoFit/>
           </a:bodyPr>
           <a:lstStyle/>
@@ -23722,7 +23761,7 @@
           <a:noFill/>
         </p:spPr>
         <p:txBody>
-          <a:bodyPr wrap="square" lIns="0" rIns="0" tIns="0" bIns="0" anchor="ctr">
+          <a:bodyPr wrap="square" lIns="0" tIns="0" rIns="0" bIns="0" anchor="ctr">
             <a:spAutoFit/>
           </a:bodyPr>
           <a:lstStyle/>
@@ -23761,7 +23800,7 @@
           <a:noFill/>
         </p:spPr>
         <p:txBody>
-          <a:bodyPr wrap="square" lIns="0" rIns="0" tIns="0" bIns="0" anchor="ctr">
+          <a:bodyPr wrap="square" lIns="0" tIns="0" rIns="0" bIns="0" anchor="ctr">
             <a:spAutoFit/>
           </a:bodyPr>
           <a:lstStyle/>
@@ -23800,7 +23839,7 @@
           <a:noFill/>
         </p:spPr>
         <p:txBody>
-          <a:bodyPr wrap="square" lIns="0" rIns="0" tIns="0" bIns="0" anchor="ctr">
+          <a:bodyPr wrap="square" lIns="0" tIns="0" rIns="0" bIns="0" anchor="ctr">
             <a:spAutoFit/>
           </a:bodyPr>
           <a:lstStyle/>
@@ -23863,6 +23902,7 @@
           <a:lstStyle/>
           <a:p>
             <a:pPr algn="ctr"/>
+            <a:endParaRPr/>
           </a:p>
         </p:txBody>
       </p:sp>
@@ -23883,7 +23923,7 @@
           <a:noFill/>
         </p:spPr>
         <p:txBody>
-          <a:bodyPr wrap="square" lIns="0" rIns="0" tIns="0" bIns="0" anchor="ctr">
+          <a:bodyPr wrap="square" lIns="0" tIns="0" rIns="0" bIns="0" anchor="ctr">
             <a:spAutoFit/>
           </a:bodyPr>
           <a:lstStyle/>
@@ -23922,7 +23962,7 @@
           <a:noFill/>
         </p:spPr>
         <p:txBody>
-          <a:bodyPr wrap="square" lIns="0" rIns="0" tIns="0" bIns="0" anchor="ctr">
+          <a:bodyPr wrap="square" lIns="0" tIns="0" rIns="0" bIns="0" anchor="ctr">
             <a:spAutoFit/>
           </a:bodyPr>
           <a:lstStyle/>
@@ -23961,7 +24001,7 @@
           <a:noFill/>
         </p:spPr>
         <p:txBody>
-          <a:bodyPr wrap="square" lIns="0" rIns="0" tIns="0" bIns="0" anchor="ctr">
+          <a:bodyPr wrap="square" lIns="0" tIns="0" rIns="0" bIns="0" anchor="ctr">
             <a:spAutoFit/>
           </a:bodyPr>
           <a:lstStyle/>
@@ -24000,7 +24040,7 @@
           <a:noFill/>
         </p:spPr>
         <p:txBody>
-          <a:bodyPr wrap="square" lIns="0" rIns="0" tIns="0" bIns="0" anchor="ctr">
+          <a:bodyPr wrap="square" lIns="0" tIns="0" rIns="0" bIns="0" anchor="ctr">
             <a:spAutoFit/>
           </a:bodyPr>
           <a:lstStyle/>
@@ -24039,7 +24079,7 @@
           <a:noFill/>
         </p:spPr>
         <p:txBody>
-          <a:bodyPr wrap="square" lIns="0" rIns="0" tIns="0" bIns="0" anchor="ctr">
+          <a:bodyPr wrap="square" lIns="0" tIns="0" rIns="0" bIns="0" anchor="ctr">
             <a:spAutoFit/>
           </a:bodyPr>
           <a:lstStyle/>
@@ -24070,7 +24110,7 @@
 </file>
 
 <file path=ppt/slides/slide9.xml><?xml version="1.0" encoding="utf-8"?>
-<p:sld xmlns:a="http://schemas.openxmlformats.org/drawingml/2006/main" xmlns:p="http://schemas.openxmlformats.org/presentationml/2006/main" xmlns:r="http://schemas.openxmlformats.org/officeDocument/2006/relationships">
+<p:sld xmlns:a="http://schemas.openxmlformats.org/drawingml/2006/main" xmlns:r="http://schemas.openxmlformats.org/officeDocument/2006/relationships" xmlns:p="http://schemas.openxmlformats.org/presentationml/2006/main">
   <p:cSld>
     <p:spTree>
       <p:nvGrpSpPr>
@@ -24078,7 +24118,14 @@
         <p:cNvGrpSpPr/>
         <p:nvPr/>
       </p:nvGrpSpPr>
-      <p:grpSpPr/>
+      <p:grpSpPr>
+        <a:xfrm>
+          <a:off x="0" y="0"/>
+          <a:ext cx="0" cy="0"/>
+          <a:chOff x="0" y="0"/>
+          <a:chExt cx="0" cy="0"/>
+        </a:xfrm>
+      </p:grpSpPr>
       <p:sp>
         <p:nvSpPr>
           <p:cNvPr id="2" name="Rectangle 1"/>
@@ -24120,6 +24167,7 @@
           <a:lstStyle/>
           <a:p>
             <a:pPr algn="ctr"/>
+            <a:endParaRPr/>
           </a:p>
         </p:txBody>
       </p:sp>
@@ -24140,7 +24188,7 @@
           <a:noFill/>
         </p:spPr>
         <p:txBody>
-          <a:bodyPr wrap="square" lIns="0" rIns="0" tIns="0" bIns="0" anchor="t">
+          <a:bodyPr wrap="square" lIns="0" tIns="0" rIns="0" bIns="0" anchor="t">
             <a:spAutoFit/>
           </a:bodyPr>
           <a:lstStyle/>
@@ -24179,7 +24227,7 @@
           <a:noFill/>
         </p:spPr>
         <p:txBody>
-          <a:bodyPr wrap="square" lIns="0" rIns="0" tIns="0" bIns="0" anchor="t">
+          <a:bodyPr wrap="square" lIns="0" tIns="0" rIns="0" bIns="0" anchor="t">
             <a:spAutoFit/>
           </a:bodyPr>
           <a:lstStyle/>
@@ -24246,6 +24294,7 @@
           <a:lstStyle/>
           <a:p>
             <a:pPr algn="ctr"/>
+            <a:endParaRPr/>
           </a:p>
         </p:txBody>
       </p:sp>
@@ -24258,7 +24307,7 @@
           <p:nvPr/>
         </p:nvPicPr>
         <p:blipFill>
-          <a:blip r:embed="rId2"/>
+          <a:blip r:embed="rId3"/>
           <a:stretch>
             <a:fillRect/>
           </a:stretch>
@@ -24290,7 +24339,7 @@
           <a:noFill/>
         </p:spPr>
         <p:txBody>
-          <a:bodyPr wrap="square" lIns="0" rIns="0" tIns="0" bIns="0" anchor="t">
+          <a:bodyPr wrap="square" lIns="0" tIns="0" rIns="0" bIns="0" anchor="t">
             <a:spAutoFit/>
           </a:bodyPr>
           <a:lstStyle/>
@@ -24357,6 +24406,7 @@
           <a:lstStyle/>
           <a:p>
             <a:pPr algn="ctr"/>
+            <a:endParaRPr/>
           </a:p>
         </p:txBody>
       </p:sp>
@@ -24369,7 +24419,7 @@
           <p:nvPr/>
         </p:nvPicPr>
         <p:blipFill>
-          <a:blip r:embed="rId3"/>
+          <a:blip r:embed="rId4"/>
           <a:stretch>
             <a:fillRect/>
           </a:stretch>
@@ -24401,7 +24451,7 @@
           <a:noFill/>
         </p:spPr>
         <p:txBody>
-          <a:bodyPr wrap="square" lIns="0" rIns="0" tIns="0" bIns="0" anchor="t">
+          <a:bodyPr wrap="square" lIns="0" tIns="0" rIns="0" bIns="0" anchor="t">
             <a:spAutoFit/>
           </a:bodyPr>
           <a:lstStyle/>
@@ -24468,6 +24518,7 @@
           <a:lstStyle/>
           <a:p>
             <a:pPr algn="ctr"/>
+            <a:endParaRPr/>
           </a:p>
         </p:txBody>
       </p:sp>
@@ -24480,7 +24531,7 @@
           <p:nvPr/>
         </p:nvPicPr>
         <p:blipFill>
-          <a:blip r:embed="rId4"/>
+          <a:blip r:embed="rId5"/>
           <a:stretch>
             <a:fillRect/>
           </a:stretch>
@@ -24512,7 +24563,7 @@
           <a:noFill/>
         </p:spPr>
         <p:txBody>
-          <a:bodyPr wrap="square" lIns="0" rIns="0" tIns="0" bIns="0" anchor="t">
+          <a:bodyPr wrap="square" lIns="0" tIns="0" rIns="0" bIns="0" anchor="t">
             <a:spAutoFit/>
           </a:bodyPr>
           <a:lstStyle/>
@@ -24579,6 +24630,7 @@
           <a:lstStyle/>
           <a:p>
             <a:pPr algn="ctr"/>
+            <a:endParaRPr/>
           </a:p>
         </p:txBody>
       </p:sp>
@@ -24591,7 +24643,7 @@
           <p:nvPr/>
         </p:nvPicPr>
         <p:blipFill>
-          <a:blip r:embed="rId5"/>
+          <a:blip r:embed="rId6"/>
           <a:stretch>
             <a:fillRect/>
           </a:stretch>
@@ -24623,7 +24675,7 @@
           <a:noFill/>
         </p:spPr>
         <p:txBody>
-          <a:bodyPr wrap="square" lIns="0" rIns="0" tIns="0" bIns="0" anchor="t">
+          <a:bodyPr wrap="square" lIns="0" tIns="0" rIns="0" bIns="0" anchor="t">
             <a:spAutoFit/>
           </a:bodyPr>
           <a:lstStyle/>
@@ -24690,6 +24742,7 @@
           <a:lstStyle/>
           <a:p>
             <a:pPr algn="ctr"/>
+            <a:endParaRPr/>
           </a:p>
         </p:txBody>
       </p:sp>
@@ -24702,7 +24755,7 @@
           <p:nvPr/>
         </p:nvPicPr>
         <p:blipFill>
-          <a:blip r:embed="rId6"/>
+          <a:blip r:embed="rId7"/>
           <a:stretch>
             <a:fillRect/>
           </a:stretch>
@@ -24734,7 +24787,7 @@
           <a:noFill/>
         </p:spPr>
         <p:txBody>
-          <a:bodyPr wrap="square" lIns="0" rIns="0" tIns="0" bIns="0" anchor="t">
+          <a:bodyPr wrap="square" lIns="0" tIns="0" rIns="0" bIns="0" anchor="t">
             <a:spAutoFit/>
           </a:bodyPr>
           <a:lstStyle/>
@@ -24801,6 +24854,7 @@
           <a:lstStyle/>
           <a:p>
             <a:pPr algn="ctr"/>
+            <a:endParaRPr/>
           </a:p>
         </p:txBody>
       </p:sp>
@@ -24813,7 +24867,7 @@
           <p:nvPr/>
         </p:nvPicPr>
         <p:blipFill>
-          <a:blip r:embed="rId7"/>
+          <a:blip r:embed="rId8"/>
           <a:stretch>
             <a:fillRect/>
           </a:stretch>
@@ -24845,7 +24899,7 @@
           <a:noFill/>
         </p:spPr>
         <p:txBody>
-          <a:bodyPr wrap="square" lIns="0" rIns="0" tIns="0" bIns="0" anchor="t">
+          <a:bodyPr wrap="square" lIns="0" tIns="0" rIns="0" bIns="0" anchor="t">
             <a:spAutoFit/>
           </a:bodyPr>
           <a:lstStyle/>
@@ -25206,44 +25260,44 @@
         <a:sysClr val="window" lastClr="FFFFFF"/>
       </a:lt1>
       <a:dk2>
-        <a:srgbClr val="1F497D"/>
+        <a:srgbClr val="0E2841"/>
       </a:dk2>
       <a:lt2>
-        <a:srgbClr val="EEECE1"/>
+        <a:srgbClr val="E8E8E8"/>
       </a:lt2>
       <a:accent1>
-        <a:srgbClr val="4F81BD"/>
+        <a:srgbClr val="156082"/>
       </a:accent1>
       <a:accent2>
-        <a:srgbClr val="C0504D"/>
+        <a:srgbClr val="E97132"/>
       </a:accent2>
       <a:accent3>
-        <a:srgbClr val="9BBB59"/>
+        <a:srgbClr val="196B24"/>
       </a:accent3>
       <a:accent4>
-        <a:srgbClr val="8064A2"/>
+        <a:srgbClr val="0F9ED5"/>
       </a:accent4>
       <a:accent5>
-        <a:srgbClr val="4BACC6"/>
+        <a:srgbClr val="A02B93"/>
       </a:accent5>
       <a:accent6>
-        <a:srgbClr val="F79646"/>
+        <a:srgbClr val="4EA72E"/>
       </a:accent6>
       <a:hlink>
-        <a:srgbClr val="0000FF"/>
+        <a:srgbClr val="467886"/>
       </a:hlink>
       <a:folHlink>
-        <a:srgbClr val="800080"/>
+        <a:srgbClr val="96607D"/>
       </a:folHlink>
     </a:clrScheme>
     <a:fontScheme name="Office">
       <a:majorFont>
-        <a:latin typeface="Calibri"/>
+        <a:latin typeface="Aptos Display" panose="02110004020202020204"/>
         <a:ea typeface=""/>
         <a:cs typeface=""/>
-        <a:font script="Jpan" typeface="ＭＳ Ｐゴシック"/>
+        <a:font script="Jpan" typeface="游ゴシック Light"/>
         <a:font script="Hang" typeface="맑은 고딕"/>
-        <a:font script="Hans" typeface="宋体"/>
+        <a:font script="Hans" typeface="等线 Light"/>
         <a:font script="Hant" typeface="新細明體"/>
         <a:font script="Arab" typeface="Times New Roman"/>
         <a:font script="Hebr" typeface="Times New Roman"/>
@@ -25271,14 +25325,31 @@
         <a:font script="Viet" typeface="Times New Roman"/>
         <a:font script="Uigh" typeface="Microsoft Uighur"/>
         <a:font script="Geor" typeface="Sylfaen"/>
+        <a:font script="Armn" typeface="Arial"/>
+        <a:font script="Bugi" typeface="Leelawadee UI"/>
+        <a:font script="Bopo" typeface="Microsoft JhengHei"/>
+        <a:font script="Java" typeface="Javanese Text"/>
+        <a:font script="Lisu" typeface="Segoe UI"/>
+        <a:font script="Mymr" typeface="Myanmar Text"/>
+        <a:font script="Nkoo" typeface="Ebrima"/>
+        <a:font script="Olck" typeface="Nirmala UI"/>
+        <a:font script="Osma" typeface="Ebrima"/>
+        <a:font script="Phag" typeface="Phagspa"/>
+        <a:font script="Syrn" typeface="Estrangelo Edessa"/>
+        <a:font script="Syrj" typeface="Estrangelo Edessa"/>
+        <a:font script="Syre" typeface="Estrangelo Edessa"/>
+        <a:font script="Sora" typeface="Nirmala UI"/>
+        <a:font script="Tale" typeface="Microsoft Tai Le"/>
+        <a:font script="Talu" typeface="Microsoft New Tai Lue"/>
+        <a:font script="Tfng" typeface="Ebrima"/>
       </a:majorFont>
       <a:minorFont>
-        <a:latin typeface="Calibri"/>
+        <a:latin typeface="Aptos" panose="02110004020202020204"/>
         <a:ea typeface=""/>
         <a:cs typeface=""/>
-        <a:font script="Jpan" typeface="ＭＳ Ｐゴシック"/>
+        <a:font script="Jpan" typeface="游ゴシック"/>
         <a:font script="Hang" typeface="맑은 고딕"/>
-        <a:font script="Hans" typeface="宋体"/>
+        <a:font script="Hans" typeface="等线"/>
         <a:font script="Hant" typeface="新細明體"/>
         <a:font script="Arab" typeface="Arial"/>
         <a:font script="Hebr" typeface="Arial"/>
@@ -25306,6 +25377,23 @@
         <a:font script="Viet" typeface="Arial"/>
         <a:font script="Uigh" typeface="Microsoft Uighur"/>
         <a:font script="Geor" typeface="Sylfaen"/>
+        <a:font script="Armn" typeface="Arial"/>
+        <a:font script="Bugi" typeface="Leelawadee UI"/>
+        <a:font script="Bopo" typeface="Microsoft JhengHei"/>
+        <a:font script="Java" typeface="Javanese Text"/>
+        <a:font script="Lisu" typeface="Segoe UI"/>
+        <a:font script="Mymr" typeface="Myanmar Text"/>
+        <a:font script="Nkoo" typeface="Ebrima"/>
+        <a:font script="Olck" typeface="Nirmala UI"/>
+        <a:font script="Osma" typeface="Ebrima"/>
+        <a:font script="Phag" typeface="Phagspa"/>
+        <a:font script="Syrn" typeface="Estrangelo Edessa"/>
+        <a:font script="Syrj" typeface="Estrangelo Edessa"/>
+        <a:font script="Syre" typeface="Estrangelo Edessa"/>
+        <a:font script="Sora" typeface="Nirmala UI"/>
+        <a:font script="Tale" typeface="Microsoft Tai Le"/>
+        <a:font script="Talu" typeface="Microsoft New Tai Lue"/>
+        <a:font script="Tfng" typeface="Ebrima"/>
       </a:minorFont>
     </a:fontScheme>
     <a:fmtScheme name="Office">
@@ -25317,180 +25405,136 @@
           <a:gsLst>
             <a:gs pos="0">
               <a:schemeClr val="phClr">
-                <a:tint val="50000"/>
-                <a:satMod val="300000"/>
+                <a:lumMod val="110000"/>
+                <a:satMod val="105000"/>
+                <a:tint val="67000"/>
               </a:schemeClr>
             </a:gs>
-            <a:gs pos="35000">
+            <a:gs pos="50000">
               <a:schemeClr val="phClr">
-                <a:tint val="37000"/>
-                <a:satMod val="300000"/>
+                <a:lumMod val="105000"/>
+                <a:satMod val="103000"/>
+                <a:tint val="73000"/>
               </a:schemeClr>
             </a:gs>
             <a:gs pos="100000">
               <a:schemeClr val="phClr">
-                <a:tint val="15000"/>
-                <a:satMod val="350000"/>
+                <a:lumMod val="105000"/>
+                <a:satMod val="109000"/>
+                <a:tint val="81000"/>
               </a:schemeClr>
             </a:gs>
           </a:gsLst>
-          <a:lin ang="16200000" scaled="1"/>
+          <a:lin ang="5400000" scaled="0"/>
         </a:gradFill>
         <a:gradFill rotWithShape="1">
           <a:gsLst>
             <a:gs pos="0">
               <a:schemeClr val="phClr">
-                <a:tint val="100000"/>
+                <a:satMod val="103000"/>
+                <a:lumMod val="102000"/>
+                <a:tint val="94000"/>
+              </a:schemeClr>
+            </a:gs>
+            <a:gs pos="50000">
+              <a:schemeClr val="phClr">
+                <a:satMod val="110000"/>
+                <a:lumMod val="100000"/>
                 <a:shade val="100000"/>
-                <a:satMod val="130000"/>
               </a:schemeClr>
             </a:gs>
             <a:gs pos="100000">
               <a:schemeClr val="phClr">
-                <a:tint val="50000"/>
-                <a:shade val="100000"/>
-                <a:satMod val="350000"/>
+                <a:lumMod val="99000"/>
+                <a:satMod val="120000"/>
+                <a:shade val="78000"/>
               </a:schemeClr>
             </a:gs>
           </a:gsLst>
-          <a:lin ang="16200000" scaled="0"/>
+          <a:lin ang="5400000" scaled="0"/>
         </a:gradFill>
       </a:fillStyleLst>
       <a:lnStyleLst>
-        <a:ln w="9525" cap="flat" cmpd="sng" algn="ctr">
+        <a:ln w="12700" cap="flat" cmpd="sng" algn="ctr">
           <a:solidFill>
-            <a:schemeClr val="phClr">
-              <a:shade val="95000"/>
-              <a:satMod val="105000"/>
-            </a:schemeClr>
+            <a:schemeClr val="phClr"/>
           </a:solidFill>
           <a:prstDash val="solid"/>
+          <a:miter lim="800000"/>
+        </a:ln>
+        <a:ln w="19050" cap="flat" cmpd="sng" algn="ctr">
+          <a:solidFill>
+            <a:schemeClr val="phClr"/>
+          </a:solidFill>
+          <a:prstDash val="solid"/>
+          <a:miter lim="800000"/>
         </a:ln>
         <a:ln w="25400" cap="flat" cmpd="sng" algn="ctr">
           <a:solidFill>
             <a:schemeClr val="phClr"/>
           </a:solidFill>
           <a:prstDash val="solid"/>
-        </a:ln>
-        <a:ln w="38100" cap="flat" cmpd="sng" algn="ctr">
-          <a:solidFill>
-            <a:schemeClr val="phClr"/>
-          </a:solidFill>
-          <a:prstDash val="solid"/>
+          <a:miter lim="800000"/>
         </a:ln>
       </a:lnStyleLst>
       <a:effectStyleLst>
         <a:effectStyle>
+          <a:effectLst/>
+        </a:effectStyle>
+        <a:effectStyle>
+          <a:effectLst/>
+        </a:effectStyle>
+        <a:effectStyle>
           <a:effectLst>
-            <a:outerShdw blurRad="40000" dist="20000" dir="5400000" rotWithShape="0">
+            <a:outerShdw blurRad="57150" dist="19050" dir="5400000" algn="ctr" rotWithShape="0">
               <a:srgbClr val="000000">
-                <a:alpha val="38000"/>
+                <a:alpha val="63000"/>
               </a:srgbClr>
             </a:outerShdw>
           </a:effectLst>
-        </a:effectStyle>
-        <a:effectStyle>
-          <a:effectLst>
-            <a:outerShdw blurRad="40000" dist="23000" dir="5400000" rotWithShape="0">
-              <a:srgbClr val="000000">
-                <a:alpha val="35000"/>
-              </a:srgbClr>
-            </a:outerShdw>
-          </a:effectLst>
-        </a:effectStyle>
-        <a:effectStyle>
-          <a:effectLst>
-            <a:outerShdw blurRad="40000" dist="23000" dir="5400000" rotWithShape="0">
-              <a:srgbClr val="000000">
-                <a:alpha val="35000"/>
-              </a:srgbClr>
-            </a:outerShdw>
-          </a:effectLst>
-          <a:scene3d>
-            <a:camera prst="orthographicFront">
-              <a:rot lat="0" lon="0" rev="0"/>
-            </a:camera>
-            <a:lightRig rig="threePt" dir="t">
-              <a:rot lat="0" lon="0" rev="1200000"/>
-            </a:lightRig>
-          </a:scene3d>
-          <a:sp3d>
-            <a:bevelT w="63500" h="25400"/>
-          </a:sp3d>
         </a:effectStyle>
       </a:effectStyleLst>
       <a:bgFillStyleLst>
         <a:solidFill>
           <a:schemeClr val="phClr"/>
         </a:solidFill>
+        <a:solidFill>
+          <a:schemeClr val="phClr">
+            <a:tint val="95000"/>
+            <a:satMod val="170000"/>
+          </a:schemeClr>
+        </a:solidFill>
         <a:gradFill rotWithShape="1">
           <a:gsLst>
             <a:gs pos="0">
               <a:schemeClr val="phClr">
-                <a:tint val="40000"/>
-                <a:satMod val="350000"/>
+                <a:tint val="93000"/>
+                <a:satMod val="150000"/>
+                <a:shade val="98000"/>
+                <a:lumMod val="102000"/>
               </a:schemeClr>
             </a:gs>
-            <a:gs pos="40000">
+            <a:gs pos="50000">
               <a:schemeClr val="phClr">
-                <a:tint val="45000"/>
-                <a:shade val="99000"/>
-                <a:satMod val="350000"/>
+                <a:tint val="98000"/>
+                <a:satMod val="130000"/>
+                <a:shade val="90000"/>
+                <a:lumMod val="103000"/>
               </a:schemeClr>
             </a:gs>
             <a:gs pos="100000">
               <a:schemeClr val="phClr">
-                <a:shade val="20000"/>
-                <a:satMod val="255000"/>
+                <a:shade val="63000"/>
+                <a:satMod val="120000"/>
               </a:schemeClr>
             </a:gs>
           </a:gsLst>
-          <a:path path="circle">
-            <a:fillToRect l="50000" t="-80000" r="50000" b="180000"/>
-          </a:path>
-        </a:gradFill>
-        <a:gradFill rotWithShape="1">
-          <a:gsLst>
-            <a:gs pos="0">
-              <a:schemeClr val="phClr">
-                <a:tint val="80000"/>
-                <a:satMod val="300000"/>
-              </a:schemeClr>
-            </a:gs>
-            <a:gs pos="100000">
-              <a:schemeClr val="phClr">
-                <a:shade val="30000"/>
-                <a:satMod val="200000"/>
-              </a:schemeClr>
-            </a:gs>
-          </a:gsLst>
-          <a:path path="circle">
-            <a:fillToRect l="50000" t="50000" r="50000" b="50000"/>
-          </a:path>
+          <a:lin ang="5400000" scaled="0"/>
         </a:gradFill>
       </a:bgFillStyleLst>
     </a:fmtScheme>
   </a:themeElements>
   <a:objectDefaults>
-    <a:spDef>
-      <a:spPr/>
-      <a:bodyPr/>
-      <a:lstStyle/>
-      <a:style>
-        <a:lnRef idx="1">
-          <a:schemeClr val="accent1"/>
-        </a:lnRef>
-        <a:fillRef idx="3">
-          <a:schemeClr val="accent1"/>
-        </a:fillRef>
-        <a:effectRef idx="2">
-          <a:schemeClr val="accent1"/>
-        </a:effectRef>
-        <a:fontRef idx="minor">
-          <a:schemeClr val="lt1"/>
-        </a:fontRef>
-      </a:style>
-    </a:spDef>
     <a:lnDef>
       <a:spPr/>
       <a:bodyPr/>
@@ -25512,5 +25556,10 @@
     </a:lnDef>
   </a:objectDefaults>
   <a:extraClrSchemeLst/>
+  <a:extLst>
+    <a:ext uri="{05A4C25C-085E-4340-85A3-A5531E510DB2}">
+      <thm15:themeFamily xmlns:thm15="http://schemas.microsoft.com/office/thememl/2012/main" name="Office Theme" id="{2E142A2C-CD16-42D6-873A-C26D2A0506FA}" vid="{1BDDFF52-6CD6-40A5-AB3C-68EB2F1E4D0A}"/>
+    </a:ext>
+  </a:extLst>
 </a:theme>
 </file>